--- a/Tracey-Scott-Portfolio.pptx
+++ b/Tracey-Scott-Portfolio.pptx
@@ -2616,7 +2616,7 @@
                 <a:ea typeface="Calibri" pitchFamily="34" charset="-122"/>
                 <a:cs typeface="Calibri" pitchFamily="34" charset="-120"/>
               </a:rPr>
-              <a:t>Cybersecurity-focused IT leader with 4+ years building and securing enterprise cloud and hybrid infrastructure in fast-paced startup environments.</a:t>
+              <a:t>Cybersecurity-focused IT leader with 5+ years building and securing enterprise cloud and hybrid infrastructure in fast-paced startup environments.</a:t>
             </a:r>
             <a:endParaRPr lang="en-US" sz="1500" dirty="0"/>
           </a:p>
@@ -2732,7 +2732,7 @@
                 <a:ea typeface="Georgia" pitchFamily="34" charset="-122"/>
                 <a:cs typeface="Georgia" pitchFamily="34" charset="-120"/>
               </a:rPr>
-              <a:t>4+</a:t>
+              <a:t>5+</a:t>
             </a:r>
             <a:endParaRPr lang="en-US" sz="4800" dirty="0"/>
           </a:p>

--- a/Tracey-Scott-Portfolio.pptx
+++ b/Tracey-Scott-Portfolio.pptx
@@ -128,7 +128,7 @@
             <a:pPr>
               <a:defRPr sz="1400" b="0" i="0" u="none" strike="noStrike">
                 <a:solidFill>
-                  <a:srgbClr val="1E2761"/>
+                  <a:srgbClr val="111111"/>
                 </a:solidFill>
                 <a:latin typeface="Arial"/>
               </a:defRPr>
@@ -136,7 +136,7 @@
             <a:r>
               <a:rPr sz="1400" b="0" i="0" u="none" strike="noStrike">
                 <a:solidFill>
-                  <a:srgbClr val="1E2761"/>
+                  <a:srgbClr val="111111"/>
                 </a:solidFill>
                 <a:latin typeface="Arial"/>
               </a:rPr>
@@ -169,11 +169,11 @@
           </c:tx>
           <c:spPr>
             <a:solidFill>
-              <a:srgbClr val="F59E0B"/>
+              <a:srgbClr val="D4AF37"/>
             </a:solidFill>
             <a:ln w="38100" cap="flat">
               <a:solidFill>
-                <a:srgbClr val="F59E0B"/>
+                <a:srgbClr val="D4AF37"/>
               </a:solidFill>
               <a:prstDash val="solid"/>
               <a:round/>
@@ -190,7 +190,7 @@
                 <a:pPr>
                   <a:defRPr b="0" i="0" strike="noStrike" sz="1200" u="none">
                     <a:solidFill>
-                      <a:srgbClr val="0F172A"/>
+                      <a:srgbClr val="0A0A0A"/>
                     </a:solidFill>
                     <a:latin typeface="Arial"/>
                   </a:defRPr>
@@ -210,11 +210,11 @@
             <c:size val="6"/>
             <c:spPr>
               <a:solidFill>
-                <a:srgbClr val="F59E0B"/>
+                <a:srgbClr val="D4AF37"/>
               </a:solidFill>
               <a:ln w="9525" cap="flat">
                 <a:solidFill>
-                  <a:srgbClr val="F59E0B"/>
+                  <a:srgbClr val="D4AF37"/>
                 </a:solidFill>
                 <a:prstDash val="solid"/>
                 <a:round/>
@@ -288,7 +288,7 @@
               <a:pPr>
                 <a:defRPr b="0" i="0" strike="noStrike" sz="1200" u="none">
                   <a:solidFill>
-                    <a:srgbClr val="0F172A"/>
+                    <a:srgbClr val="0A0A0A"/>
                   </a:solidFill>
                   <a:latin typeface="Arial"/>
                 </a:defRPr>
@@ -335,7 +335,7 @@
             <a:pPr>
               <a:defRPr sz="1200" b="0" i="0" u="none" strike="noStrike">
                 <a:solidFill>
-                  <a:srgbClr val="64748B"/>
+                  <a:srgbClr val="9CA3AF"/>
                 </a:solidFill>
                 <a:latin typeface="Arial"/>
               </a:defRPr>
@@ -387,7 +387,7 @@
             <a:pPr>
               <a:defRPr sz="1200" b="0" i="0" u="none" strike="noStrike">
                 <a:solidFill>
-                  <a:srgbClr val="64748B"/>
+                  <a:srgbClr val="9CA3AF"/>
                 </a:solidFill>
                 <a:latin typeface="Arial"/>
               </a:defRPr>
@@ -439,7 +439,7 @@
             <a:pPr>
               <a:defRPr sz="1400" b="0" i="0" u="none" strike="noStrike">
                 <a:solidFill>
-                  <a:srgbClr val="1E2761"/>
+                  <a:srgbClr val="111111"/>
                 </a:solidFill>
                 <a:latin typeface="Arial"/>
               </a:defRPr>
@@ -447,7 +447,7 @@
             <a:r>
               <a:rPr sz="1400" b="0" i="0" u="none" strike="noStrike">
                 <a:solidFill>
-                  <a:srgbClr val="1E2761"/>
+                  <a:srgbClr val="111111"/>
                 </a:solidFill>
                 <a:latin typeface="Arial"/>
               </a:rPr>
@@ -496,7 +496,7 @@
             <c:bubble3D val="0"/>
             <c:spPr>
               <a:solidFill>
-                <a:srgbClr val="1E2761"/>
+                <a:srgbClr val="111111"/>
               </a:solidFill>
               <a:effectLst/>
             </c:spPr>
@@ -506,7 +506,7 @@
             <c:bubble3D val="0"/>
             <c:spPr>
               <a:solidFill>
-                <a:srgbClr val="CADCFC"/>
+                <a:srgbClr val="E5E7EB"/>
               </a:solidFill>
               <a:effectLst/>
             </c:spPr>
@@ -523,7 +523,7 @@
                   <a:pPr>
                     <a:defRPr sz="1200" b="0" i="0" u="none" strike="noStrike">
                       <a:solidFill>
-                        <a:srgbClr val="FFFFFF"/>
+                        <a:srgbClr val="F5F5F5"/>
                       </a:solidFill>
                       <a:latin typeface="Arial"/>
                     </a:defRPr>
@@ -548,7 +548,7 @@
                   <a:pPr>
                     <a:defRPr sz="1200" b="0" i="0" u="none" strike="noStrike">
                       <a:solidFill>
-                        <a:srgbClr val="FFFFFF"/>
+                        <a:srgbClr val="F5F5F5"/>
                       </a:solidFill>
                       <a:latin typeface="Arial"/>
                     </a:defRPr>
@@ -669,7 +669,7 @@
           </c:tx>
           <c:spPr>
             <a:solidFill>
-              <a:srgbClr val="1E2761"/>
+              <a:srgbClr val="111111"/>
             </a:solidFill>
             <a:effectLst/>
           </c:spPr>
@@ -683,7 +683,7 @@
                 <a:pPr>
                   <a:defRPr b="0" i="0" strike="noStrike" sz="1200" u="none">
                     <a:solidFill>
-                      <a:srgbClr val="0F172A"/>
+                      <a:srgbClr val="0A0A0A"/>
                     </a:solidFill>
                     <a:latin typeface="Arial"/>
                   </a:defRPr>
@@ -775,7 +775,7 @@
               <a:pPr>
                 <a:defRPr b="0" i="0" strike="noStrike" sz="1200" u="none">
                   <a:solidFill>
-                    <a:srgbClr val="0F172A"/>
+                    <a:srgbClr val="0A0A0A"/>
                   </a:solidFill>
                   <a:latin typeface="Arial"/>
                 </a:defRPr>
@@ -823,7 +823,7 @@
             <a:pPr>
               <a:defRPr sz="1300" b="0" i="0" u="none" strike="noStrike">
                 <a:solidFill>
-                  <a:srgbClr val="0F172A"/>
+                  <a:srgbClr val="0A0A0A"/>
                 </a:solidFill>
                 <a:latin typeface="Arial"/>
               </a:defRPr>
@@ -877,7 +877,7 @@
             <a:pPr>
               <a:defRPr sz="1200" b="0" i="0" u="none" strike="noStrike">
                 <a:solidFill>
-                  <a:srgbClr val="64748B"/>
+                  <a:srgbClr val="9CA3AF"/>
                 </a:solidFill>
                 <a:latin typeface="Arial"/>
               </a:defRPr>
@@ -2281,7 +2281,7 @@
     <p:bg>
       <p:bgPr>
         <a:solidFill>
-          <a:srgbClr val="1E2761"/>
+          <a:srgbClr val="111111"/>
         </a:solidFill>
       </p:bgPr>
     </p:bg>
@@ -2314,7 +2314,7 @@
             <a:avLst/>
           </a:prstGeom>
           <a:solidFill>
-            <a:srgbClr val="F59E0B"/>
+            <a:srgbClr val="D4AF37"/>
           </a:solidFill>
           <a:ln/>
         </p:spPr>
@@ -2346,7 +2346,7 @@
             <a:r>
               <a:rPr lang="en-US" sz="6000" b="1" spc="200" kern="0" dirty="0">
                 <a:solidFill>
-                  <a:srgbClr val="FFFFFF"/>
+                  <a:srgbClr val="F5F5F5"/>
                 </a:solidFill>
                 <a:latin typeface="Georgia" pitchFamily="34" charset="0"/>
                 <a:ea typeface="Georgia" pitchFamily="34" charset="-122"/>
@@ -2385,7 +2385,7 @@
             <a:r>
               <a:rPr lang="en-US" sz="2200" dirty="0">
                 <a:solidFill>
-                  <a:srgbClr val="CADCFC"/>
+                  <a:srgbClr val="E5E7EB"/>
                 </a:solidFill>
                 <a:latin typeface="Calibri" pitchFamily="34" charset="0"/>
                 <a:ea typeface="Calibri" pitchFamily="34" charset="-122"/>
@@ -2412,7 +2412,7 @@
             <a:avLst/>
           </a:prstGeom>
           <a:solidFill>
-            <a:srgbClr val="F59E0B"/>
+            <a:srgbClr val="D4AF37"/>
           </a:solidFill>
           <a:ln/>
         </p:spPr>
@@ -2444,7 +2444,7 @@
             <a:r>
               <a:rPr lang="en-US" sz="1600" dirty="0">
                 <a:solidFill>
-                  <a:srgbClr val="FFFFFF"/>
+                  <a:srgbClr val="F5F5F5"/>
                 </a:solidFill>
               </a:rPr>
               <a:t>IT Operations Manager &amp; Business Analyst  |  Greenville, SC</a:t>
@@ -2480,7 +2480,7 @@
             <a:r>
               <a:rPr lang="en-US" sz="1400" i="1" dirty="0">
                 <a:solidFill>
-                  <a:srgbClr val="F59E0B"/>
+                  <a:srgbClr val="D4AF37"/>
                 </a:solidFill>
               </a:rPr>
               <a:t>Portfolio Deck  •  2026</a:t>
@@ -2503,7 +2503,7 @@
     <p:bg>
       <p:bgPr>
         <a:solidFill>
-          <a:srgbClr val="FFFFFF"/>
+          <a:srgbClr val="F5F5F5"/>
         </a:solidFill>
       </p:bgPr>
     </p:bg>
@@ -2548,7 +2548,7 @@
             <a:r>
               <a:rPr lang="en-US" sz="4000" b="1" dirty="0">
                 <a:solidFill>
-                  <a:srgbClr val="1E2761"/>
+                  <a:srgbClr val="111111"/>
                 </a:solidFill>
                 <a:latin typeface="Georgia" pitchFamily="34" charset="0"/>
                 <a:ea typeface="Georgia" pitchFamily="34" charset="-122"/>
@@ -2575,7 +2575,7 @@
             <a:avLst/>
           </a:prstGeom>
           <a:solidFill>
-            <a:srgbClr val="CADCFC"/>
+            <a:srgbClr val="E5E7EB"/>
           </a:solidFill>
           <a:ln/>
         </p:spPr>
@@ -2610,7 +2610,7 @@
             <a:r>
               <a:rPr lang="en-US" sz="1500" dirty="0">
                 <a:solidFill>
-                  <a:srgbClr val="0F172A"/>
+                  <a:srgbClr val="0A0A0A"/>
                 </a:solidFill>
                 <a:latin typeface="Calibri" pitchFamily="34" charset="0"/>
                 <a:ea typeface="Calibri" pitchFamily="34" charset="-122"/>
@@ -2630,7 +2630,7 @@
             <a:r>
               <a:rPr lang="en-US" sz="1500" dirty="0">
                 <a:solidFill>
-                  <a:srgbClr val="0F172A"/>
+                  <a:srgbClr val="0A0A0A"/>
                 </a:solidFill>
                 <a:latin typeface="Calibri" pitchFamily="34" charset="0"/>
                 <a:ea typeface="Calibri" pitchFamily="34" charset="-122"/>
@@ -2647,7 +2647,7 @@
             <a:r>
               <a:rPr lang="en-US" sz="1500" dirty="0">
                 <a:solidFill>
-                  <a:srgbClr val="0F172A"/>
+                  <a:srgbClr val="0A0A0A"/>
                 </a:solidFill>
                 <a:latin typeface="Calibri" pitchFamily="34" charset="0"/>
                 <a:ea typeface="Calibri" pitchFamily="34" charset="-122"/>
@@ -2674,7 +2674,7 @@
             <a:avLst/>
           </a:prstGeom>
           <a:solidFill>
-            <a:srgbClr val="1E2761"/>
+            <a:srgbClr val="111111"/>
           </a:solidFill>
           <a:ln/>
         </p:spPr>
@@ -2694,7 +2694,7 @@
             <a:avLst/>
           </a:prstGeom>
           <a:solidFill>
-            <a:srgbClr val="F59E0B"/>
+            <a:srgbClr val="D4AF37"/>
           </a:solidFill>
           <a:ln/>
         </p:spPr>
@@ -2726,7 +2726,7 @@
             <a:r>
               <a:rPr lang="en-US" sz="4800" b="1" dirty="0">
                 <a:solidFill>
-                  <a:srgbClr val="FFFFFF"/>
+                  <a:srgbClr val="F5F5F5"/>
                 </a:solidFill>
                 <a:latin typeface="Georgia" pitchFamily="34" charset="0"/>
                 <a:ea typeface="Georgia" pitchFamily="34" charset="-122"/>
@@ -2765,7 +2765,7 @@
             <a:r>
               <a:rPr lang="en-US" sz="1300" dirty="0">
                 <a:solidFill>
-                  <a:srgbClr val="CADCFC"/>
+                  <a:srgbClr val="E5E7EB"/>
                 </a:solidFill>
               </a:rPr>
               <a:t>Years Experience</a:t>
@@ -2789,7 +2789,7 @@
             <a:avLst/>
           </a:prstGeom>
           <a:solidFill>
-            <a:srgbClr val="1E2761"/>
+            <a:srgbClr val="111111"/>
           </a:solidFill>
           <a:ln/>
         </p:spPr>
@@ -2809,7 +2809,7 @@
             <a:avLst/>
           </a:prstGeom>
           <a:solidFill>
-            <a:srgbClr val="F59E0B"/>
+            <a:srgbClr val="D4AF37"/>
           </a:solidFill>
           <a:ln/>
         </p:spPr>
@@ -2841,7 +2841,7 @@
             <a:r>
               <a:rPr lang="en-US" sz="4800" b="1" dirty="0">
                 <a:solidFill>
-                  <a:srgbClr val="FFFFFF"/>
+                  <a:srgbClr val="F5F5F5"/>
                 </a:solidFill>
                 <a:latin typeface="Georgia" pitchFamily="34" charset="0"/>
                 <a:ea typeface="Georgia" pitchFamily="34" charset="-122"/>
@@ -2880,7 +2880,7 @@
             <a:r>
               <a:rPr lang="en-US" sz="1300" dirty="0">
                 <a:solidFill>
-                  <a:srgbClr val="CADCFC"/>
+                  <a:srgbClr val="E5E7EB"/>
                 </a:solidFill>
               </a:rPr>
               <a:t>Months to Full Security Framework</a:t>
@@ -2904,7 +2904,7 @@
             <a:avLst/>
           </a:prstGeom>
           <a:solidFill>
-            <a:srgbClr val="1E2761"/>
+            <a:srgbClr val="111111"/>
           </a:solidFill>
           <a:ln/>
         </p:spPr>
@@ -2924,7 +2924,7 @@
             <a:avLst/>
           </a:prstGeom>
           <a:solidFill>
-            <a:srgbClr val="F59E0B"/>
+            <a:srgbClr val="D4AF37"/>
           </a:solidFill>
           <a:ln/>
         </p:spPr>
@@ -2956,7 +2956,7 @@
             <a:r>
               <a:rPr lang="en-US" sz="4800" b="1" dirty="0">
                 <a:solidFill>
-                  <a:srgbClr val="FFFFFF"/>
+                  <a:srgbClr val="F5F5F5"/>
                 </a:solidFill>
                 <a:latin typeface="Georgia" pitchFamily="34" charset="0"/>
                 <a:ea typeface="Georgia" pitchFamily="34" charset="-122"/>
@@ -2995,7 +2995,7 @@
             <a:r>
               <a:rPr lang="en-US" sz="1300" dirty="0">
                 <a:solidFill>
-                  <a:srgbClr val="CADCFC"/>
+                  <a:srgbClr val="E5E7EB"/>
                 </a:solidFill>
               </a:rPr>
               <a:t>Predictive Model Accuracy</a:t>
@@ -3019,7 +3019,7 @@
             <a:avLst/>
           </a:prstGeom>
           <a:solidFill>
-            <a:srgbClr val="1E2761"/>
+            <a:srgbClr val="111111"/>
           </a:solidFill>
           <a:ln/>
         </p:spPr>
@@ -3039,7 +3039,7 @@
             <a:avLst/>
           </a:prstGeom>
           <a:solidFill>
-            <a:srgbClr val="F59E0B"/>
+            <a:srgbClr val="D4AF37"/>
           </a:solidFill>
           <a:ln/>
         </p:spPr>
@@ -3071,7 +3071,7 @@
             <a:r>
               <a:rPr lang="en-US" sz="4800" b="1" dirty="0">
                 <a:solidFill>
-                  <a:srgbClr val="FFFFFF"/>
+                  <a:srgbClr val="F5F5F5"/>
                 </a:solidFill>
                 <a:latin typeface="Georgia" pitchFamily="34" charset="0"/>
                 <a:ea typeface="Georgia" pitchFamily="34" charset="-122"/>
@@ -3110,7 +3110,7 @@
             <a:r>
               <a:rPr lang="en-US" sz="1300" dirty="0">
                 <a:solidFill>
-                  <a:srgbClr val="CADCFC"/>
+                  <a:srgbClr val="E5E7EB"/>
                 </a:solidFill>
               </a:rPr>
               <a:t>Clouds (AWS • Azure • GCP)</a:t>
@@ -3134,7 +3134,7 @@
             <a:avLst/>
           </a:prstGeom>
           <a:solidFill>
-            <a:srgbClr val="1E2761"/>
+            <a:srgbClr val="111111"/>
           </a:solidFill>
           <a:ln/>
         </p:spPr>
@@ -3166,7 +3166,7 @@
             <a:r>
               <a:rPr lang="en-US" sz="1000" dirty="0">
                 <a:solidFill>
-                  <a:srgbClr val="CADCFC"/>
+                  <a:srgbClr val="E5E7EB"/>
                 </a:solidFill>
               </a:rPr>
               <a:t>Tracey Scott  |  Cybersecurity • Cloud • SOC  |  traceysscott82@gmail.com</a:t>
@@ -3202,7 +3202,7 @@
             <a:r>
               <a:rPr lang="en-US" sz="1000" dirty="0">
                 <a:solidFill>
-                  <a:srgbClr val="CADCFC"/>
+                  <a:srgbClr val="E5E7EB"/>
                 </a:solidFill>
               </a:rPr>
               <a:t>2</a:t>
@@ -3225,7 +3225,7 @@
     <p:bg>
       <p:bgPr>
         <a:solidFill>
-          <a:srgbClr val="FFFFFF"/>
+          <a:srgbClr val="F5F5F5"/>
         </a:solidFill>
       </p:bgPr>
     </p:bg>
@@ -3270,7 +3270,7 @@
             <a:r>
               <a:rPr lang="en-US" sz="3600" b="1" dirty="0">
                 <a:solidFill>
-                  <a:srgbClr val="1E2761"/>
+                  <a:srgbClr val="111111"/>
                 </a:solidFill>
                 <a:latin typeface="Georgia" pitchFamily="34" charset="0"/>
                 <a:ea typeface="Georgia" pitchFamily="34" charset="-122"/>
@@ -3297,11 +3297,11 @@
             <a:avLst/>
           </a:prstGeom>
           <a:solidFill>
-            <a:srgbClr val="FFFFFF"/>
+            <a:srgbClr val="F5F5F5"/>
           </a:solidFill>
           <a:ln w="12700">
             <a:solidFill>
-              <a:srgbClr val="CADCFC"/>
+              <a:srgbClr val="E5E7EB"/>
             </a:solidFill>
             <a:prstDash val="solid"/>
           </a:ln>
@@ -3329,7 +3329,7 @@
             <a:avLst/>
           </a:prstGeom>
           <a:solidFill>
-            <a:srgbClr val="F59E0B"/>
+            <a:srgbClr val="D4AF37"/>
           </a:solidFill>
           <a:ln/>
         </p:spPr>
@@ -3361,7 +3361,7 @@
             <a:r>
               <a:rPr lang="en-US" sz="1800" b="1" dirty="0">
                 <a:solidFill>
-                  <a:srgbClr val="1E2761"/>
+                  <a:srgbClr val="111111"/>
                 </a:solidFill>
                 <a:latin typeface="Georgia" pitchFamily="34" charset="0"/>
                 <a:ea typeface="Georgia" pitchFamily="34" charset="-122"/>
@@ -3401,7 +3401,7 @@
             <a:r>
               <a:rPr lang="en-US" sz="1300" dirty="0">
                 <a:solidFill>
-                  <a:srgbClr val="0F172A"/>
+                  <a:srgbClr val="0A0A0A"/>
                 </a:solidFill>
               </a:rPr>
               <a:t>IDS/IPS &amp; Firewall Admin</a:t>
@@ -3416,7 +3416,7 @@
             <a:r>
               <a:rPr lang="en-US" sz="1300" dirty="0">
                 <a:solidFill>
-                  <a:srgbClr val="0F172A"/>
+                  <a:srgbClr val="0A0A0A"/>
                 </a:solidFill>
               </a:rPr>
               <a:t>Endpoint / EDR &amp; MDM</a:t>
@@ -3431,7 +3431,7 @@
             <a:r>
               <a:rPr lang="en-US" sz="1300" dirty="0">
                 <a:solidFill>
-                  <a:srgbClr val="0F172A"/>
+                  <a:srgbClr val="0A0A0A"/>
                 </a:solidFill>
               </a:rPr>
               <a:t>Incident Response</a:t>
@@ -3446,7 +3446,7 @@
             <a:r>
               <a:rPr lang="en-US" sz="1300" dirty="0">
                 <a:solidFill>
-                  <a:srgbClr val="0F172A"/>
+                  <a:srgbClr val="0A0A0A"/>
                 </a:solidFill>
               </a:rPr>
               <a:t>Org Training via KnowBe4</a:t>
@@ -3470,11 +3470,11 @@
             <a:avLst/>
           </a:prstGeom>
           <a:solidFill>
-            <a:srgbClr val="FFFFFF"/>
+            <a:srgbClr val="F5F5F5"/>
           </a:solidFill>
           <a:ln w="12700">
             <a:solidFill>
-              <a:srgbClr val="CADCFC"/>
+              <a:srgbClr val="E5E7EB"/>
             </a:solidFill>
             <a:prstDash val="solid"/>
           </a:ln>
@@ -3502,7 +3502,7 @@
             <a:avLst/>
           </a:prstGeom>
           <a:solidFill>
-            <a:srgbClr val="F59E0B"/>
+            <a:srgbClr val="D4AF37"/>
           </a:solidFill>
           <a:ln/>
         </p:spPr>
@@ -3534,7 +3534,7 @@
             <a:r>
               <a:rPr lang="en-US" sz="1800" b="1" dirty="0">
                 <a:solidFill>
-                  <a:srgbClr val="1E2761"/>
+                  <a:srgbClr val="111111"/>
                 </a:solidFill>
                 <a:latin typeface="Georgia" pitchFamily="34" charset="0"/>
                 <a:ea typeface="Georgia" pitchFamily="34" charset="-122"/>
@@ -3574,7 +3574,7 @@
             <a:r>
               <a:rPr lang="en-US" sz="1300" dirty="0">
                 <a:solidFill>
-                  <a:srgbClr val="0F172A"/>
+                  <a:srgbClr val="0A0A0A"/>
                 </a:solidFill>
               </a:rPr>
               <a:t>AWS, Azure, GCP</a:t>
@@ -3589,7 +3589,7 @@
             <a:r>
               <a:rPr lang="en-US" sz="1300" dirty="0">
                 <a:solidFill>
-                  <a:srgbClr val="0F172A"/>
+                  <a:srgbClr val="0A0A0A"/>
                 </a:solidFill>
               </a:rPr>
               <a:t>IAM / RBAC / Azure AD</a:t>
@@ -3604,7 +3604,7 @@
             <a:r>
               <a:rPr lang="en-US" sz="1300" dirty="0">
                 <a:solidFill>
-                  <a:srgbClr val="0F172A"/>
+                  <a:srgbClr val="0A0A0A"/>
                 </a:solidFill>
               </a:rPr>
               <a:t>VMware, Hyper-V, Docker</a:t>
@@ -3619,7 +3619,7 @@
             <a:r>
               <a:rPr lang="en-US" sz="1300" dirty="0">
                 <a:solidFill>
-                  <a:srgbClr val="0F172A"/>
+                  <a:srgbClr val="0A0A0A"/>
                 </a:solidFill>
               </a:rPr>
               <a:t>M365 &amp; SaaS Admin</a:t>
@@ -3643,11 +3643,11 @@
             <a:avLst/>
           </a:prstGeom>
           <a:solidFill>
-            <a:srgbClr val="FFFFFF"/>
+            <a:srgbClr val="F5F5F5"/>
           </a:solidFill>
           <a:ln w="12700">
             <a:solidFill>
-              <a:srgbClr val="CADCFC"/>
+              <a:srgbClr val="E5E7EB"/>
             </a:solidFill>
             <a:prstDash val="solid"/>
           </a:ln>
@@ -3675,7 +3675,7 @@
             <a:avLst/>
           </a:prstGeom>
           <a:solidFill>
-            <a:srgbClr val="F59E0B"/>
+            <a:srgbClr val="D4AF37"/>
           </a:solidFill>
           <a:ln/>
         </p:spPr>
@@ -3707,7 +3707,7 @@
             <a:r>
               <a:rPr lang="en-US" sz="1800" b="1" dirty="0">
                 <a:solidFill>
-                  <a:srgbClr val="1E2761"/>
+                  <a:srgbClr val="111111"/>
                 </a:solidFill>
                 <a:latin typeface="Georgia" pitchFamily="34" charset="0"/>
                 <a:ea typeface="Georgia" pitchFamily="34" charset="-122"/>
@@ -3747,7 +3747,7 @@
             <a:r>
               <a:rPr lang="en-US" sz="1300" dirty="0">
                 <a:solidFill>
-                  <a:srgbClr val="0F172A"/>
+                  <a:srgbClr val="0A0A0A"/>
                 </a:solidFill>
               </a:rPr>
               <a:t>GDPR, SOX, ITIL</a:t>
@@ -3762,7 +3762,7 @@
             <a:r>
               <a:rPr lang="en-US" sz="1300" dirty="0">
                 <a:solidFill>
-                  <a:srgbClr val="0F172A"/>
+                  <a:srgbClr val="0A0A0A"/>
                 </a:solidFill>
               </a:rPr>
               <a:t>Risk Assessment</a:t>
@@ -3777,7 +3777,7 @@
             <a:r>
               <a:rPr lang="en-US" sz="1300" dirty="0">
                 <a:solidFill>
-                  <a:srgbClr val="0F172A"/>
+                  <a:srgbClr val="0A0A0A"/>
                 </a:solidFill>
               </a:rPr>
               <a:t>Vulnerability Management</a:t>
@@ -3792,7 +3792,7 @@
             <a:r>
               <a:rPr lang="en-US" sz="1300" dirty="0">
                 <a:solidFill>
-                  <a:srgbClr val="0F172A"/>
+                  <a:srgbClr val="0A0A0A"/>
                 </a:solidFill>
               </a:rPr>
               <a:t>Security Policy Design</a:t>
@@ -3816,11 +3816,11 @@
             <a:avLst/>
           </a:prstGeom>
           <a:solidFill>
-            <a:srgbClr val="FFFFFF"/>
+            <a:srgbClr val="F5F5F5"/>
           </a:solidFill>
           <a:ln w="12700">
             <a:solidFill>
-              <a:srgbClr val="CADCFC"/>
+              <a:srgbClr val="E5E7EB"/>
             </a:solidFill>
             <a:prstDash val="solid"/>
           </a:ln>
@@ -3848,7 +3848,7 @@
             <a:avLst/>
           </a:prstGeom>
           <a:solidFill>
-            <a:srgbClr val="F59E0B"/>
+            <a:srgbClr val="D4AF37"/>
           </a:solidFill>
           <a:ln/>
         </p:spPr>
@@ -3880,7 +3880,7 @@
             <a:r>
               <a:rPr lang="en-US" sz="1800" b="1" dirty="0">
                 <a:solidFill>
-                  <a:srgbClr val="1E2761"/>
+                  <a:srgbClr val="111111"/>
                 </a:solidFill>
                 <a:latin typeface="Georgia" pitchFamily="34" charset="0"/>
                 <a:ea typeface="Georgia" pitchFamily="34" charset="-122"/>
@@ -3920,7 +3920,7 @@
             <a:r>
               <a:rPr lang="en-US" sz="1300" dirty="0">
                 <a:solidFill>
-                  <a:srgbClr val="0F172A"/>
+                  <a:srgbClr val="0A0A0A"/>
                 </a:solidFill>
               </a:rPr>
               <a:t>PowerShell, Python, SQL</a:t>
@@ -3935,7 +3935,7 @@
             <a:r>
               <a:rPr lang="en-US" sz="1300" dirty="0">
                 <a:solidFill>
-                  <a:srgbClr val="0F172A"/>
+                  <a:srgbClr val="0A0A0A"/>
                 </a:solidFill>
               </a:rPr>
               <a:t>Excel (Pivot Tables, VLOOKUP)</a:t>
@@ -3950,7 +3950,7 @@
             <a:r>
               <a:rPr lang="en-US" sz="1300" dirty="0">
                 <a:solidFill>
-                  <a:srgbClr val="0F172A"/>
+                  <a:srgbClr val="0A0A0A"/>
                 </a:solidFill>
               </a:rPr>
               <a:t>Power BI, Tableau &amp; LLMs</a:t>
@@ -3965,7 +3965,7 @@
             <a:r>
               <a:rPr lang="en-US" sz="1300" dirty="0">
                 <a:solidFill>
-                  <a:srgbClr val="0F172A"/>
+                  <a:srgbClr val="0A0A0A"/>
                 </a:solidFill>
               </a:rPr>
               <a:t>Predictive Modeling &amp; Automation</a:t>
@@ -3989,7 +3989,7 @@
             <a:avLst/>
           </a:prstGeom>
           <a:solidFill>
-            <a:srgbClr val="1E2761"/>
+            <a:srgbClr val="111111"/>
           </a:solidFill>
           <a:ln/>
         </p:spPr>
@@ -4021,7 +4021,7 @@
             <a:r>
               <a:rPr lang="en-US" sz="1000" dirty="0">
                 <a:solidFill>
-                  <a:srgbClr val="CADCFC"/>
+                  <a:srgbClr val="E5E7EB"/>
                 </a:solidFill>
               </a:rPr>
               <a:t>Tracey Scott  |  Cybersecurity • Cloud • SOC  |  traceysscott82@gmail.com</a:t>
@@ -4057,7 +4057,7 @@
             <a:r>
               <a:rPr lang="en-US" sz="1000" dirty="0">
                 <a:solidFill>
-                  <a:srgbClr val="CADCFC"/>
+                  <a:srgbClr val="E5E7EB"/>
                 </a:solidFill>
               </a:rPr>
               <a:t>3</a:t>
@@ -4080,7 +4080,7 @@
     <p:bg>
       <p:bgPr>
         <a:solidFill>
-          <a:srgbClr val="FFFFFF"/>
+          <a:srgbClr val="F5F5F5"/>
         </a:solidFill>
       </p:bgPr>
     </p:bg>
@@ -4125,7 +4125,7 @@
             <a:r>
               <a:rPr lang="en-US" sz="3600" b="1" dirty="0">
                 <a:solidFill>
-                  <a:srgbClr val="1E2761"/>
+                  <a:srgbClr val="111111"/>
                 </a:solidFill>
                 <a:latin typeface="Georgia" pitchFamily="34" charset="0"/>
                 <a:ea typeface="Georgia" pitchFamily="34" charset="-122"/>
@@ -4164,7 +4164,7 @@
             <a:r>
               <a:rPr lang="en-US" sz="1400" i="1" dirty="0">
                 <a:solidFill>
-                  <a:srgbClr val="64748B"/>
+                  <a:srgbClr val="9CA3AF"/>
                 </a:solidFill>
               </a:rPr>
               <a:t>Executive view I built at RightPath to monitor posture, incidents, and compliance.</a:t>
@@ -4188,7 +4188,7 @@
             <a:avLst/>
           </a:prstGeom>
           <a:solidFill>
-            <a:srgbClr val="1E2761"/>
+            <a:srgbClr val="111111"/>
           </a:solidFill>
           <a:ln/>
         </p:spPr>
@@ -4220,7 +4220,7 @@
             <a:r>
               <a:rPr lang="en-US" sz="3000" b="1" dirty="0">
                 <a:solidFill>
-                  <a:srgbClr val="F59E0B"/>
+                  <a:srgbClr val="D4AF37"/>
                 </a:solidFill>
                 <a:latin typeface="Georgia" pitchFamily="34" charset="0"/>
                 <a:ea typeface="Georgia" pitchFamily="34" charset="-122"/>
@@ -4259,7 +4259,7 @@
             <a:r>
               <a:rPr lang="en-US" sz="1200" dirty="0">
                 <a:solidFill>
-                  <a:srgbClr val="CADCFC"/>
+                  <a:srgbClr val="E5E7EB"/>
                 </a:solidFill>
               </a:rPr>
               <a:t>Uptime</a:t>
@@ -4283,7 +4283,7 @@
             <a:avLst/>
           </a:prstGeom>
           <a:solidFill>
-            <a:srgbClr val="1E2761"/>
+            <a:srgbClr val="111111"/>
           </a:solidFill>
           <a:ln/>
         </p:spPr>
@@ -4315,7 +4315,7 @@
             <a:r>
               <a:rPr lang="en-US" sz="3000" b="1" dirty="0">
                 <a:solidFill>
-                  <a:srgbClr val="F59E0B"/>
+                  <a:srgbClr val="D4AF37"/>
                 </a:solidFill>
                 <a:latin typeface="Georgia" pitchFamily="34" charset="0"/>
                 <a:ea typeface="Georgia" pitchFamily="34" charset="-122"/>
@@ -4354,7 +4354,7 @@
             <a:r>
               <a:rPr lang="en-US" sz="1200" dirty="0">
                 <a:solidFill>
-                  <a:srgbClr val="CADCFC"/>
+                  <a:srgbClr val="E5E7EB"/>
                 </a:solidFill>
               </a:rPr>
               <a:t>Critical Breaches</a:t>
@@ -4378,7 +4378,7 @@
             <a:avLst/>
           </a:prstGeom>
           <a:solidFill>
-            <a:srgbClr val="1E2761"/>
+            <a:srgbClr val="111111"/>
           </a:solidFill>
           <a:ln/>
         </p:spPr>
@@ -4410,7 +4410,7 @@
             <a:r>
               <a:rPr lang="en-US" sz="3000" b="1" dirty="0">
                 <a:solidFill>
-                  <a:srgbClr val="F59E0B"/>
+                  <a:srgbClr val="D4AF37"/>
                 </a:solidFill>
                 <a:latin typeface="Georgia" pitchFamily="34" charset="0"/>
                 <a:ea typeface="Georgia" pitchFamily="34" charset="-122"/>
@@ -4449,7 +4449,7 @@
             <a:r>
               <a:rPr lang="en-US" sz="1200" dirty="0">
                 <a:solidFill>
-                  <a:srgbClr val="CADCFC"/>
+                  <a:srgbClr val="E5E7EB"/>
                 </a:solidFill>
               </a:rPr>
               <a:t>Threats Mitigated</a:t>
@@ -4473,7 +4473,7 @@
             <a:avLst/>
           </a:prstGeom>
           <a:solidFill>
-            <a:srgbClr val="1E2761"/>
+            <a:srgbClr val="111111"/>
           </a:solidFill>
           <a:ln/>
         </p:spPr>
@@ -4505,7 +4505,7 @@
             <a:r>
               <a:rPr lang="en-US" sz="3000" b="1" dirty="0">
                 <a:solidFill>
-                  <a:srgbClr val="F59E0B"/>
+                  <a:srgbClr val="D4AF37"/>
                 </a:solidFill>
                 <a:latin typeface="Georgia" pitchFamily="34" charset="0"/>
                 <a:ea typeface="Georgia" pitchFamily="34" charset="-122"/>
@@ -4544,7 +4544,7 @@
             <a:r>
               <a:rPr lang="en-US" sz="1200" dirty="0">
                 <a:solidFill>
-                  <a:srgbClr val="CADCFC"/>
+                  <a:srgbClr val="E5E7EB"/>
                 </a:solidFill>
               </a:rPr>
               <a:t>RBAC Coverage</a:t>
@@ -4600,7 +4600,7 @@
             <a:avLst/>
           </a:prstGeom>
           <a:solidFill>
-            <a:srgbClr val="1E2761"/>
+            <a:srgbClr val="111111"/>
           </a:solidFill>
           <a:ln/>
         </p:spPr>
@@ -4632,7 +4632,7 @@
             <a:r>
               <a:rPr lang="en-US" sz="1000" dirty="0">
                 <a:solidFill>
-                  <a:srgbClr val="CADCFC"/>
+                  <a:srgbClr val="E5E7EB"/>
                 </a:solidFill>
               </a:rPr>
               <a:t>Tracey Scott  |  Cybersecurity • Cloud • SOC  |  traceysscott82@gmail.com</a:t>
@@ -4668,7 +4668,7 @@
             <a:r>
               <a:rPr lang="en-US" sz="1000" dirty="0">
                 <a:solidFill>
-                  <a:srgbClr val="CADCFC"/>
+                  <a:srgbClr val="E5E7EB"/>
                 </a:solidFill>
               </a:rPr>
               <a:t>4</a:t>
@@ -4691,7 +4691,7 @@
     <p:bg>
       <p:bgPr>
         <a:solidFill>
-          <a:srgbClr val="FFFFFF"/>
+          <a:srgbClr val="F5F5F5"/>
         </a:solidFill>
       </p:bgPr>
     </p:bg>
@@ -4736,7 +4736,7 @@
             <a:r>
               <a:rPr lang="en-US" sz="3600" b="1" dirty="0">
                 <a:solidFill>
-                  <a:srgbClr val="1E2761"/>
+                  <a:srgbClr val="111111"/>
                 </a:solidFill>
                 <a:latin typeface="Georgia" pitchFamily="34" charset="0"/>
                 <a:ea typeface="Georgia" pitchFamily="34" charset="-122"/>
@@ -4763,7 +4763,7 @@
             <a:avLst/>
           </a:prstGeom>
           <a:solidFill>
-            <a:srgbClr val="CADCFC"/>
+            <a:srgbClr val="E5E7EB"/>
           </a:solidFill>
           <a:ln/>
         </p:spPr>
@@ -4783,7 +4783,7 @@
             <a:avLst/>
           </a:prstGeom>
           <a:solidFill>
-            <a:srgbClr val="F59E0B"/>
+            <a:srgbClr val="D4AF37"/>
           </a:solidFill>
           <a:ln/>
         </p:spPr>
@@ -4815,7 +4815,7 @@
             <a:r>
               <a:rPr lang="en-US" sz="1300" b="1" dirty="0">
                 <a:solidFill>
-                  <a:srgbClr val="F59E0B"/>
+                  <a:srgbClr val="D4AF37"/>
                 </a:solidFill>
                 <a:latin typeface="Georgia" pitchFamily="34" charset="0"/>
                 <a:ea typeface="Georgia" pitchFamily="34" charset="-122"/>
@@ -4854,7 +4854,7 @@
             <a:r>
               <a:rPr lang="en-US" sz="1400" b="1" dirty="0">
                 <a:solidFill>
-                  <a:srgbClr val="1E2761"/>
+                  <a:srgbClr val="111111"/>
                 </a:solidFill>
               </a:rPr>
               <a:t>Enterprise Security Framework</a:t>
@@ -4890,7 +4890,7 @@
             <a:r>
               <a:rPr lang="en-US" sz="1100" dirty="0">
                 <a:solidFill>
-                  <a:srgbClr val="0F172A"/>
+                  <a:srgbClr val="0A0A0A"/>
                 </a:solidFill>
               </a:rPr>
               <a:t>Architected endpoint, IDS/IPS, MDM, and access governance for startup in 6 months.</a:t>
@@ -4914,7 +4914,7 @@
             <a:avLst/>
           </a:prstGeom>
           <a:solidFill>
-            <a:srgbClr val="CADCFC"/>
+            <a:srgbClr val="E5E7EB"/>
           </a:solidFill>
           <a:ln/>
         </p:spPr>
@@ -4934,7 +4934,7 @@
             <a:avLst/>
           </a:prstGeom>
           <a:solidFill>
-            <a:srgbClr val="F59E0B"/>
+            <a:srgbClr val="D4AF37"/>
           </a:solidFill>
           <a:ln/>
         </p:spPr>
@@ -4966,7 +4966,7 @@
             <a:r>
               <a:rPr lang="en-US" sz="1300" b="1" dirty="0">
                 <a:solidFill>
-                  <a:srgbClr val="F59E0B"/>
+                  <a:srgbClr val="D4AF37"/>
                 </a:solidFill>
                 <a:latin typeface="Georgia" pitchFamily="34" charset="0"/>
                 <a:ea typeface="Georgia" pitchFamily="34" charset="-122"/>
@@ -5005,7 +5005,7 @@
             <a:r>
               <a:rPr lang="en-US" sz="1400" b="1" dirty="0">
                 <a:solidFill>
-                  <a:srgbClr val="1E2761"/>
+                  <a:srgbClr val="111111"/>
                 </a:solidFill>
               </a:rPr>
               <a:t>Secure Multi-Cloud Deployment</a:t>
@@ -5041,7 +5041,7 @@
             <a:r>
               <a:rPr lang="en-US" sz="1100" dirty="0">
                 <a:solidFill>
-                  <a:srgbClr val="0F172A"/>
+                  <a:srgbClr val="0A0A0A"/>
                 </a:solidFill>
               </a:rPr>
               <a:t>AWS + Azure infrastructure with IAM, RBAC, encryption, and least-privilege controls.</a:t>
@@ -5065,7 +5065,7 @@
             <a:avLst/>
           </a:prstGeom>
           <a:solidFill>
-            <a:srgbClr val="CADCFC"/>
+            <a:srgbClr val="E5E7EB"/>
           </a:solidFill>
           <a:ln/>
         </p:spPr>
@@ -5085,7 +5085,7 @@
             <a:avLst/>
           </a:prstGeom>
           <a:solidFill>
-            <a:srgbClr val="F59E0B"/>
+            <a:srgbClr val="D4AF37"/>
           </a:solidFill>
           <a:ln/>
         </p:spPr>
@@ -5117,7 +5117,7 @@
             <a:r>
               <a:rPr lang="en-US" sz="1300" b="1" dirty="0">
                 <a:solidFill>
-                  <a:srgbClr val="F59E0B"/>
+                  <a:srgbClr val="D4AF37"/>
                 </a:solidFill>
                 <a:latin typeface="Georgia" pitchFamily="34" charset="0"/>
                 <a:ea typeface="Georgia" pitchFamily="34" charset="-122"/>
@@ -5156,7 +5156,7 @@
             <a:r>
               <a:rPr lang="en-US" sz="1400" b="1" dirty="0">
                 <a:solidFill>
-                  <a:srgbClr val="1E2761"/>
+                  <a:srgbClr val="111111"/>
                 </a:solidFill>
               </a:rPr>
               <a:t>CRM Secure Deployment</a:t>
@@ -5192,7 +5192,7 @@
             <a:r>
               <a:rPr lang="en-US" sz="1100" dirty="0">
                 <a:solidFill>
-                  <a:srgbClr val="0F172A"/>
+                  <a:srgbClr val="0A0A0A"/>
                 </a:solidFill>
               </a:rPr>
               <a:t>Complete CRM build — coding, development, maintenance, secure auth, encryption, RBAC.</a:t>
@@ -5216,7 +5216,7 @@
             <a:avLst/>
           </a:prstGeom>
           <a:solidFill>
-            <a:srgbClr val="CADCFC"/>
+            <a:srgbClr val="E5E7EB"/>
           </a:solidFill>
           <a:ln/>
         </p:spPr>
@@ -5236,7 +5236,7 @@
             <a:avLst/>
           </a:prstGeom>
           <a:solidFill>
-            <a:srgbClr val="F59E0B"/>
+            <a:srgbClr val="D4AF37"/>
           </a:solidFill>
           <a:ln/>
         </p:spPr>
@@ -5268,7 +5268,7 @@
             <a:r>
               <a:rPr lang="en-US" sz="1300" b="1" dirty="0">
                 <a:solidFill>
-                  <a:srgbClr val="F59E0B"/>
+                  <a:srgbClr val="D4AF37"/>
                 </a:solidFill>
                 <a:latin typeface="Georgia" pitchFamily="34" charset="0"/>
                 <a:ea typeface="Georgia" pitchFamily="34" charset="-122"/>
@@ -5307,7 +5307,7 @@
             <a:r>
               <a:rPr lang="en-US" sz="1400" b="1" dirty="0">
                 <a:solidFill>
-                  <a:srgbClr val="1E2761"/>
+                  <a:srgbClr val="111111"/>
                 </a:solidFill>
               </a:rPr>
               <a:t>Executive Dashboards</a:t>
@@ -5343,7 +5343,7 @@
             <a:r>
               <a:rPr lang="en-US" sz="1100" dirty="0">
                 <a:solidFill>
-                  <a:srgbClr val="0F172A"/>
+                  <a:srgbClr val="0A0A0A"/>
                 </a:solidFill>
               </a:rPr>
               <a:t>Power BI dashboards for incidents, compliance, and sales metrics — auditing, trends &amp; revenue forecasting.</a:t>
@@ -5367,7 +5367,7 @@
             <a:avLst/>
           </a:prstGeom>
           <a:solidFill>
-            <a:srgbClr val="CADCFC"/>
+            <a:srgbClr val="E5E7EB"/>
           </a:solidFill>
           <a:ln/>
         </p:spPr>
@@ -5387,7 +5387,7 @@
             <a:avLst/>
           </a:prstGeom>
           <a:solidFill>
-            <a:srgbClr val="F59E0B"/>
+            <a:srgbClr val="D4AF37"/>
           </a:solidFill>
           <a:ln/>
         </p:spPr>
@@ -5419,7 +5419,7 @@
             <a:r>
               <a:rPr lang="en-US" sz="1300" b="1" dirty="0">
                 <a:solidFill>
-                  <a:srgbClr val="F59E0B"/>
+                  <a:srgbClr val="D4AF37"/>
                 </a:solidFill>
                 <a:latin typeface="Georgia" pitchFamily="34" charset="0"/>
                 <a:ea typeface="Georgia" pitchFamily="34" charset="-122"/>
@@ -5458,7 +5458,7 @@
             <a:r>
               <a:rPr lang="en-US" sz="1400" b="1" dirty="0">
                 <a:solidFill>
-                  <a:srgbClr val="1E2761"/>
+                  <a:srgbClr val="111111"/>
                 </a:solidFill>
               </a:rPr>
               <a:t>Incident Response &amp; KnowBe4</a:t>
@@ -5494,7 +5494,7 @@
             <a:r>
               <a:rPr lang="en-US" sz="1100" dirty="0">
                 <a:solidFill>
-                  <a:srgbClr val="0F172A"/>
+                  <a:srgbClr val="0A0A0A"/>
                 </a:solidFill>
               </a:rPr>
               <a:t>IR playbooks, remediation workflows, and org-wide KnowBe4 security awareness training.</a:t>
@@ -5518,7 +5518,7 @@
             <a:avLst/>
           </a:prstGeom>
           <a:solidFill>
-            <a:srgbClr val="CADCFC"/>
+            <a:srgbClr val="E5E7EB"/>
           </a:solidFill>
           <a:ln/>
         </p:spPr>
@@ -5538,7 +5538,7 @@
             <a:avLst/>
           </a:prstGeom>
           <a:solidFill>
-            <a:srgbClr val="F59E0B"/>
+            <a:srgbClr val="D4AF37"/>
           </a:solidFill>
           <a:ln/>
         </p:spPr>
@@ -5570,7 +5570,7 @@
             <a:r>
               <a:rPr lang="en-US" sz="1300" b="1" dirty="0">
                 <a:solidFill>
-                  <a:srgbClr val="F59E0B"/>
+                  <a:srgbClr val="D4AF37"/>
                 </a:solidFill>
                 <a:latin typeface="Georgia" pitchFamily="34" charset="0"/>
                 <a:ea typeface="Georgia" pitchFamily="34" charset="-122"/>
@@ -5609,7 +5609,7 @@
             <a:r>
               <a:rPr lang="en-US" sz="1400" b="1" dirty="0">
                 <a:solidFill>
-                  <a:srgbClr val="1E2761"/>
+                  <a:srgbClr val="111111"/>
                 </a:solidFill>
               </a:rPr>
               <a:t>IT Ticketing System</a:t>
@@ -5645,7 +5645,7 @@
             <a:r>
               <a:rPr lang="en-US" sz="1100" dirty="0">
                 <a:solidFill>
-                  <a:srgbClr val="0F172A"/>
+                  <a:srgbClr val="0A0A0A"/>
                 </a:solidFill>
               </a:rPr>
               <a:t>Built ticketing system for org-wide issue reporting, triage, and resolution tracking.</a:t>
@@ -5669,7 +5669,7 @@
             <a:avLst/>
           </a:prstGeom>
           <a:solidFill>
-            <a:srgbClr val="CADCFC"/>
+            <a:srgbClr val="E5E7EB"/>
           </a:solidFill>
           <a:ln/>
         </p:spPr>
@@ -5689,7 +5689,7 @@
             <a:avLst/>
           </a:prstGeom>
           <a:solidFill>
-            <a:srgbClr val="F59E0B"/>
+            <a:srgbClr val="D4AF37"/>
           </a:solidFill>
           <a:ln/>
         </p:spPr>
@@ -5721,7 +5721,7 @@
             <a:r>
               <a:rPr lang="en-US" sz="1300" b="1" dirty="0">
                 <a:solidFill>
-                  <a:srgbClr val="F59E0B"/>
+                  <a:srgbClr val="D4AF37"/>
                 </a:solidFill>
                 <a:latin typeface="Georgia" pitchFamily="34" charset="0"/>
                 <a:ea typeface="Georgia" pitchFamily="34" charset="-122"/>
@@ -5760,7 +5760,7 @@
             <a:r>
               <a:rPr lang="en-US" sz="1400" b="1" dirty="0">
                 <a:solidFill>
-                  <a:srgbClr val="1E2761"/>
+                  <a:srgbClr val="111111"/>
                 </a:solidFill>
               </a:rPr>
               <a:t>Internal AI Chatbots (LLM)</a:t>
@@ -5796,7 +5796,7 @@
             <a:r>
               <a:rPr lang="en-US" sz="1100" dirty="0">
                 <a:solidFill>
-                  <a:srgbClr val="0F172A"/>
+                  <a:srgbClr val="0A0A0A"/>
                 </a:solidFill>
               </a:rPr>
               <a:t>LLM-powered chatbots for multiple departments with CRM, Microsoft 365, and SharePoint connectivity.</a:t>
@@ -5820,7 +5820,7 @@
             <a:avLst/>
           </a:prstGeom>
           <a:solidFill>
-            <a:srgbClr val="1E2761"/>
+            <a:srgbClr val="111111"/>
           </a:solidFill>
           <a:ln/>
         </p:spPr>
@@ -5852,7 +5852,7 @@
             <a:r>
               <a:rPr lang="en-US" sz="1000" dirty="0">
                 <a:solidFill>
-                  <a:srgbClr val="CADCFC"/>
+                  <a:srgbClr val="E5E7EB"/>
                 </a:solidFill>
               </a:rPr>
               <a:t>Tracey Scott  |  Cybersecurity • Cloud • SOC  |  traceysscott82@gmail.com</a:t>
@@ -5888,7 +5888,7 @@
             <a:r>
               <a:rPr lang="en-US" sz="1000" dirty="0">
                 <a:solidFill>
-                  <a:srgbClr val="CADCFC"/>
+                  <a:srgbClr val="E5E7EB"/>
                 </a:solidFill>
               </a:rPr>
               <a:t>5</a:t>
@@ -5911,7 +5911,7 @@
     <p:bg>
       <p:bgPr>
         <a:solidFill>
-          <a:srgbClr val="FFFFFF"/>
+          <a:srgbClr val="F5F5F5"/>
         </a:solidFill>
       </p:bgPr>
     </p:bg>
@@ -5956,7 +5956,7 @@
             <a:r>
               <a:rPr lang="en-US" sz="3600" b="1" dirty="0">
                 <a:solidFill>
-                  <a:srgbClr val="1E2761"/>
+                  <a:srgbClr val="111111"/>
                 </a:solidFill>
                 <a:latin typeface="Georgia" pitchFamily="34" charset="0"/>
                 <a:ea typeface="Georgia" pitchFamily="34" charset="-122"/>
@@ -5995,7 +5995,7 @@
             <a:r>
               <a:rPr lang="en-US" sz="1400" i="1" dirty="0">
                 <a:solidFill>
-                  <a:srgbClr val="64748B"/>
+                  <a:srgbClr val="9CA3AF"/>
                 </a:solidFill>
               </a:rPr>
               <a:t>Self-assessed proficiency across the stack I use in production.</a:t>
@@ -6035,7 +6035,7 @@
             <a:avLst/>
           </a:prstGeom>
           <a:solidFill>
-            <a:srgbClr val="1E2761"/>
+            <a:srgbClr val="111111"/>
           </a:solidFill>
           <a:ln/>
         </p:spPr>
@@ -6067,7 +6067,7 @@
             <a:r>
               <a:rPr lang="en-US" sz="1000" dirty="0">
                 <a:solidFill>
-                  <a:srgbClr val="CADCFC"/>
+                  <a:srgbClr val="E5E7EB"/>
                 </a:solidFill>
               </a:rPr>
               <a:t>Tracey Scott  |  Cybersecurity • Cloud • SOC  |  traceysscott82@gmail.com</a:t>
@@ -6103,7 +6103,7 @@
             <a:r>
               <a:rPr lang="en-US" sz="1000" dirty="0">
                 <a:solidFill>
-                  <a:srgbClr val="CADCFC"/>
+                  <a:srgbClr val="E5E7EB"/>
                 </a:solidFill>
               </a:rPr>
               <a:t>6</a:t>
@@ -6126,7 +6126,7 @@
     <p:bg>
       <p:bgPr>
         <a:solidFill>
-          <a:srgbClr val="1E2761"/>
+          <a:srgbClr val="111111"/>
         </a:solidFill>
       </p:bgPr>
     </p:bg>
@@ -6171,7 +6171,7 @@
             <a:r>
               <a:rPr lang="en-US" sz="3600" b="1" dirty="0">
                 <a:solidFill>
-                  <a:srgbClr val="FFFFFF"/>
+                  <a:srgbClr val="F5F5F5"/>
                 </a:solidFill>
                 <a:latin typeface="Georgia" pitchFamily="34" charset="0"/>
                 <a:ea typeface="Georgia" pitchFamily="34" charset="-122"/>
@@ -6198,7 +6198,7 @@
             <a:avLst/>
           </a:prstGeom>
           <a:solidFill>
-            <a:srgbClr val="F59E0B"/>
+            <a:srgbClr val="D4AF37"/>
           </a:solidFill>
           <a:ln/>
         </p:spPr>
@@ -6218,13 +6218,13 @@
             <a:avLst/>
           </a:prstGeom>
           <a:solidFill>
-            <a:srgbClr val="FFFFFF">
+            <a:srgbClr val="F5F5F5">
               <a:alpha val="10000"/>
             </a:srgbClr>
           </a:solidFill>
           <a:ln w="12700">
             <a:solidFill>
-              <a:srgbClr val="CADCFC"/>
+              <a:srgbClr val="E5E7EB"/>
             </a:solidFill>
             <a:prstDash val="solid"/>
           </a:ln>
@@ -6257,7 +6257,7 @@
             <a:r>
               <a:rPr lang="en-US" sz="4400" b="1" dirty="0">
                 <a:solidFill>
-                  <a:srgbClr val="F59E0B"/>
+                  <a:srgbClr val="D4AF37"/>
                 </a:solidFill>
                 <a:latin typeface="Georgia" pitchFamily="34" charset="0"/>
                 <a:ea typeface="Georgia" pitchFamily="34" charset="-122"/>
@@ -6296,7 +6296,7 @@
             <a:r>
               <a:rPr lang="en-US" sz="1300" dirty="0">
                 <a:solidFill>
-                  <a:srgbClr val="FFFFFF"/>
+                  <a:srgbClr val="F5F5F5"/>
                 </a:solidFill>
               </a:rPr>
               <a:t>Full security framework stood up from zero</a:t>
@@ -6320,13 +6320,13 @@
             <a:avLst/>
           </a:prstGeom>
           <a:solidFill>
-            <a:srgbClr val="FFFFFF">
+            <a:srgbClr val="F5F5F5">
               <a:alpha val="10000"/>
             </a:srgbClr>
           </a:solidFill>
           <a:ln w="12700">
             <a:solidFill>
-              <a:srgbClr val="CADCFC"/>
+              <a:srgbClr val="E5E7EB"/>
             </a:solidFill>
             <a:prstDash val="solid"/>
           </a:ln>
@@ -6359,7 +6359,7 @@
             <a:r>
               <a:rPr lang="en-US" sz="4400" b="1" dirty="0">
                 <a:solidFill>
-                  <a:srgbClr val="F59E0B"/>
+                  <a:srgbClr val="D4AF37"/>
                 </a:solidFill>
                 <a:latin typeface="Georgia" pitchFamily="34" charset="0"/>
                 <a:ea typeface="Georgia" pitchFamily="34" charset="-122"/>
@@ -6398,7 +6398,7 @@
             <a:r>
               <a:rPr lang="en-US" sz="1300" dirty="0">
                 <a:solidFill>
-                  <a:srgbClr val="FFFFFF"/>
+                  <a:srgbClr val="F5F5F5"/>
                 </a:solidFill>
               </a:rPr>
               <a:t>Predictive model accuracy delivered to stakeholders</a:t>
@@ -6422,13 +6422,13 @@
             <a:avLst/>
           </a:prstGeom>
           <a:solidFill>
-            <a:srgbClr val="FFFFFF">
+            <a:srgbClr val="F5F5F5">
               <a:alpha val="10000"/>
             </a:srgbClr>
           </a:solidFill>
           <a:ln w="12700">
             <a:solidFill>
-              <a:srgbClr val="CADCFC"/>
+              <a:srgbClr val="E5E7EB"/>
             </a:solidFill>
             <a:prstDash val="solid"/>
           </a:ln>
@@ -6461,7 +6461,7 @@
             <a:r>
               <a:rPr lang="en-US" sz="4400" b="1" dirty="0">
                 <a:solidFill>
-                  <a:srgbClr val="F59E0B"/>
+                  <a:srgbClr val="D4AF37"/>
                 </a:solidFill>
                 <a:latin typeface="Georgia" pitchFamily="34" charset="0"/>
                 <a:ea typeface="Georgia" pitchFamily="34" charset="-122"/>
@@ -6500,7 +6500,7 @@
             <a:r>
               <a:rPr lang="en-US" sz="1300" dirty="0">
                 <a:solidFill>
-                  <a:srgbClr val="FFFFFF"/>
+                  <a:srgbClr val="F5F5F5"/>
                 </a:solidFill>
               </a:rPr>
               <a:t>Reporting accuracy gain through data validation</a:t>
@@ -6524,13 +6524,13 @@
             <a:avLst/>
           </a:prstGeom>
           <a:solidFill>
-            <a:srgbClr val="FFFFFF">
+            <a:srgbClr val="F5F5F5">
               <a:alpha val="10000"/>
             </a:srgbClr>
           </a:solidFill>
           <a:ln w="12700">
             <a:solidFill>
-              <a:srgbClr val="CADCFC"/>
+              <a:srgbClr val="E5E7EB"/>
             </a:solidFill>
             <a:prstDash val="solid"/>
           </a:ln>
@@ -6563,7 +6563,7 @@
             <a:r>
               <a:rPr lang="en-US" sz="4400" b="1" dirty="0">
                 <a:solidFill>
-                  <a:srgbClr val="F59E0B"/>
+                  <a:srgbClr val="D4AF37"/>
                 </a:solidFill>
                 <a:latin typeface="Georgia" pitchFamily="34" charset="0"/>
                 <a:ea typeface="Georgia" pitchFamily="34" charset="-122"/>
@@ -6602,7 +6602,7 @@
             <a:r>
               <a:rPr lang="en-US" sz="1300" dirty="0">
                 <a:solidFill>
-                  <a:srgbClr val="FFFFFF"/>
+                  <a:srgbClr val="F5F5F5"/>
                 </a:solidFill>
               </a:rPr>
               <a:t>RBAC / least-privilege coverage across hybrid env</a:t>
@@ -6626,13 +6626,13 @@
             <a:avLst/>
           </a:prstGeom>
           <a:solidFill>
-            <a:srgbClr val="FFFFFF">
+            <a:srgbClr val="F5F5F5">
               <a:alpha val="10000"/>
             </a:srgbClr>
           </a:solidFill>
           <a:ln w="12700">
             <a:solidFill>
-              <a:srgbClr val="CADCFC"/>
+              <a:srgbClr val="E5E7EB"/>
             </a:solidFill>
             <a:prstDash val="solid"/>
           </a:ln>
@@ -6665,7 +6665,7 @@
             <a:r>
               <a:rPr lang="en-US" sz="4400" b="1" dirty="0">
                 <a:solidFill>
-                  <a:srgbClr val="F59E0B"/>
+                  <a:srgbClr val="D4AF37"/>
                 </a:solidFill>
                 <a:latin typeface="Georgia" pitchFamily="34" charset="0"/>
                 <a:ea typeface="Georgia" pitchFamily="34" charset="-122"/>
@@ -6704,7 +6704,7 @@
             <a:r>
               <a:rPr lang="en-US" sz="1300" dirty="0">
                 <a:solidFill>
-                  <a:srgbClr val="FFFFFF"/>
+                  <a:srgbClr val="F5F5F5"/>
                 </a:solidFill>
               </a:rPr>
               <a:t>Critical incidents since framework rollout</a:t>
@@ -6728,13 +6728,13 @@
             <a:avLst/>
           </a:prstGeom>
           <a:solidFill>
-            <a:srgbClr val="FFFFFF">
+            <a:srgbClr val="F5F5F5">
               <a:alpha val="10000"/>
             </a:srgbClr>
           </a:solidFill>
           <a:ln w="12700">
             <a:solidFill>
-              <a:srgbClr val="CADCFC"/>
+              <a:srgbClr val="E5E7EB"/>
             </a:solidFill>
             <a:prstDash val="solid"/>
           </a:ln>
@@ -6767,7 +6767,7 @@
             <a:r>
               <a:rPr lang="en-US" sz="4400" b="1" dirty="0">
                 <a:solidFill>
-                  <a:srgbClr val="F59E0B"/>
+                  <a:srgbClr val="D4AF37"/>
                 </a:solidFill>
                 <a:latin typeface="Georgia" pitchFamily="34" charset="0"/>
                 <a:ea typeface="Georgia" pitchFamily="34" charset="-122"/>
@@ -6806,7 +6806,7 @@
             <a:r>
               <a:rPr lang="en-US" sz="1300" dirty="0">
                 <a:solidFill>
-                  <a:srgbClr val="FFFFFF"/>
+                  <a:srgbClr val="F5F5F5"/>
                 </a:solidFill>
               </a:rPr>
               <a:t>Public clouds secured and administered (AWS/Azure/GCP)</a:t>
@@ -6830,7 +6830,7 @@
             <a:avLst/>
           </a:prstGeom>
           <a:solidFill>
-            <a:srgbClr val="1E2761"/>
+            <a:srgbClr val="111111"/>
           </a:solidFill>
           <a:ln/>
         </p:spPr>
@@ -6862,7 +6862,7 @@
             <a:r>
               <a:rPr lang="en-US" sz="1000" dirty="0">
                 <a:solidFill>
-                  <a:srgbClr val="CADCFC"/>
+                  <a:srgbClr val="E5E7EB"/>
                 </a:solidFill>
               </a:rPr>
               <a:t>Tracey Scott  |  Cybersecurity • Cloud • SOC  |  traceysscott82@gmail.com</a:t>
@@ -6898,7 +6898,7 @@
             <a:r>
               <a:rPr lang="en-US" sz="1000" dirty="0">
                 <a:solidFill>
-                  <a:srgbClr val="CADCFC"/>
+                  <a:srgbClr val="E5E7EB"/>
                 </a:solidFill>
               </a:rPr>
               <a:t>7</a:t>
@@ -6921,7 +6921,7 @@
     <p:bg>
       <p:bgPr>
         <a:solidFill>
-          <a:srgbClr val="FFFFFF"/>
+          <a:srgbClr val="F5F5F5"/>
         </a:solidFill>
       </p:bgPr>
     </p:bg>
@@ -6966,7 +6966,7 @@
             <a:r>
               <a:rPr lang="en-US" sz="4000" b="1" dirty="0">
                 <a:solidFill>
-                  <a:srgbClr val="1E2761"/>
+                  <a:srgbClr val="111111"/>
                 </a:solidFill>
                 <a:latin typeface="Georgia" pitchFamily="34" charset="0"/>
                 <a:ea typeface="Georgia" pitchFamily="34" charset="-122"/>
@@ -6993,7 +6993,7 @@
             <a:avLst/>
           </a:prstGeom>
           <a:solidFill>
-            <a:srgbClr val="CADCFC"/>
+            <a:srgbClr val="E5E7EB"/>
           </a:solidFill>
           <a:ln/>
         </p:spPr>
@@ -7025,7 +7025,7 @@
             <a:r>
               <a:rPr lang="en-US" sz="2000" b="1" dirty="0">
                 <a:solidFill>
-                  <a:srgbClr val="1E2761"/>
+                  <a:srgbClr val="111111"/>
                 </a:solidFill>
               </a:rPr>
               <a:t>Professional Goals</a:t>
@@ -7065,7 +7065,7 @@
             <a:r>
               <a:rPr lang="en-US" sz="1500" dirty="0">
                 <a:solidFill>
-                  <a:srgbClr val="0F172A"/>
+                  <a:srgbClr val="0A0A0A"/>
                 </a:solidFill>
               </a:rPr>
               <a:t>Earned CISSP certification</a:t>
@@ -7083,7 +7083,7 @@
             <a:r>
               <a:rPr lang="en-US" sz="1500" dirty="0">
                 <a:solidFill>
-                  <a:srgbClr val="0F172A"/>
+                  <a:srgbClr val="0A0A0A"/>
                 </a:solidFill>
               </a:rPr>
               <a:t>Lead a cybersecurity operations team or SOC</a:t>
@@ -7101,7 +7101,7 @@
             <a:r>
               <a:rPr lang="en-US" sz="1500" dirty="0">
                 <a:solidFill>
-                  <a:srgbClr val="0F172A"/>
+                  <a:srgbClr val="0A0A0A"/>
                 </a:solidFill>
               </a:rPr>
               <a:t>Deepen cloud security automation &amp; IaC practice</a:t>
@@ -7119,7 +7119,7 @@
             <a:r>
               <a:rPr lang="en-US" sz="1500" dirty="0">
                 <a:solidFill>
-                  <a:srgbClr val="0F172A"/>
+                  <a:srgbClr val="0A0A0A"/>
                 </a:solidFill>
               </a:rPr>
               <a:t>Mentor women entering cybersecurity via RTC &amp; ISSA</a:t>
@@ -7134,7 +7134,7 @@
             <a:r>
               <a:rPr lang="en-US" sz="1500" dirty="0">
                 <a:solidFill>
-                  <a:srgbClr val="0F172A"/>
+                  <a:srgbClr val="0A0A0A"/>
                 </a:solidFill>
               </a:rPr>
               <a:t>Contribute to enterprise zero-trust architecture</a:t>
@@ -7158,7 +7158,7 @@
             <a:avLst/>
           </a:prstGeom>
           <a:solidFill>
-            <a:srgbClr val="1E2761"/>
+            <a:srgbClr val="111111"/>
           </a:solidFill>
           <a:ln/>
         </p:spPr>
@@ -7178,7 +7178,7 @@
             <a:avLst/>
           </a:prstGeom>
           <a:solidFill>
-            <a:srgbClr val="F59E0B"/>
+            <a:srgbClr val="D4AF37"/>
           </a:solidFill>
           <a:ln/>
         </p:spPr>
@@ -7210,7 +7210,7 @@
             <a:r>
               <a:rPr lang="en-US" sz="2400" b="1" dirty="0">
                 <a:solidFill>
-                  <a:srgbClr val="FFFFFF"/>
+                  <a:srgbClr val="F5F5F5"/>
                 </a:solidFill>
                 <a:latin typeface="Georgia" pitchFamily="34" charset="0"/>
                 <a:ea typeface="Georgia" pitchFamily="34" charset="-122"/>
@@ -7252,7 +7252,7 @@
             <a:r>
               <a:rPr lang="en-US" sz="1800" b="1" dirty="0">
                 <a:solidFill>
-                  <a:srgbClr val="F59E0B"/>
+                  <a:srgbClr val="D4AF37"/>
                 </a:solidFill>
               </a:rPr>
               <a:t>Tracey Scott</a:t>
@@ -7269,7 +7269,7 @@
             <a:r>
               <a:rPr lang="en-US" sz="1400" i="1" dirty="0">
                 <a:solidFill>
-                  <a:srgbClr val="CADCFC"/>
+                  <a:srgbClr val="E5E7EB"/>
                 </a:solidFill>
               </a:rPr>
               <a:t>IT Operations Manager &amp; Business Analyst</a:t>
@@ -7286,7 +7286,7 @@
             <a:r>
               <a:rPr lang="en-US" sz="1400" dirty="0">
                 <a:solidFill>
-                  <a:srgbClr val="FFFFFF"/>
+                  <a:srgbClr val="F5F5F5"/>
                 </a:solidFill>
               </a:rPr>
               <a:t>Greenville, SC</a:t>
@@ -7303,7 +7303,7 @@
             <a:r>
               <a:rPr lang="en-US" sz="1400" dirty="0">
                 <a:solidFill>
-                  <a:srgbClr val="FFFFFF"/>
+                  <a:srgbClr val="F5F5F5"/>
                 </a:solidFill>
               </a:rPr>
               <a:t>(864) 775-2929</a:t>
@@ -7320,7 +7320,7 @@
             <a:r>
               <a:rPr lang="en-US" sz="1400" dirty="0">
                 <a:solidFill>
-                  <a:srgbClr val="FFFFFF"/>
+                  <a:srgbClr val="F5F5F5"/>
                 </a:solidFill>
               </a:rPr>
               <a:t>traceysscott82@gmail.com</a:t>
@@ -7337,7 +7337,7 @@
             <a:r>
               <a:rPr lang="en-US" sz="1400" dirty="0">
                 <a:solidFill>
-                  <a:srgbClr val="FFFFFF"/>
+                  <a:srgbClr val="F5F5F5"/>
                 </a:solidFill>
               </a:rPr>
               <a:t>linkedin.com/in/traceysscott</a:t>
@@ -7351,7 +7351,7 @@
             <a:r>
               <a:rPr lang="en-US" sz="1400" b="1" dirty="0">
                 <a:solidFill>
-                  <a:srgbClr val="F59E0B"/>
+                  <a:srgbClr val="D4AF37"/>
                 </a:solidFill>
               </a:rPr>
               <a:t>traceytheanalyst.github.io</a:t>
@@ -7375,7 +7375,7 @@
             <a:avLst/>
           </a:prstGeom>
           <a:solidFill>
-            <a:srgbClr val="1E2761"/>
+            <a:srgbClr val="111111"/>
           </a:solidFill>
           <a:ln/>
         </p:spPr>
@@ -7407,7 +7407,7 @@
             <a:r>
               <a:rPr lang="en-US" sz="1000" dirty="0">
                 <a:solidFill>
-                  <a:srgbClr val="CADCFC"/>
+                  <a:srgbClr val="E5E7EB"/>
                 </a:solidFill>
               </a:rPr>
               <a:t>Tracey Scott  |  Cybersecurity • Cloud • SOC  |  traceysscott82@gmail.com</a:t>
@@ -7443,7 +7443,7 @@
             <a:r>
               <a:rPr lang="en-US" sz="1000" dirty="0">
                 <a:solidFill>
-                  <a:srgbClr val="CADCFC"/>
+                  <a:srgbClr val="E5E7EB"/>
                 </a:solidFill>
               </a:rPr>
               <a:t>8</a:t>

--- a/Tracey-Scott-Portfolio.pptx
+++ b/Tracey-Scott-Portfolio.pptx
@@ -128,7 +128,7 @@
             <a:pPr>
               <a:defRPr sz="1400" b="0" i="0" u="none" strike="noStrike">
                 <a:solidFill>
-                  <a:srgbClr val="111111"/>
+                  <a:srgbClr val="0A0E27"/>
                 </a:solidFill>
                 <a:latin typeface="Arial"/>
               </a:defRPr>
@@ -136,7 +136,7 @@
             <a:r>
               <a:rPr sz="1400" b="0" i="0" u="none" strike="noStrike">
                 <a:solidFill>
-                  <a:srgbClr val="111111"/>
+                  <a:srgbClr val="0A0E27"/>
                 </a:solidFill>
                 <a:latin typeface="Arial"/>
               </a:rPr>
@@ -169,11 +169,11 @@
           </c:tx>
           <c:spPr>
             <a:solidFill>
-              <a:srgbClr val="D4AF37"/>
+              <a:srgbClr val="00F0FF"/>
             </a:solidFill>
             <a:ln w="38100" cap="flat">
               <a:solidFill>
-                <a:srgbClr val="D4AF37"/>
+                <a:srgbClr val="00F0FF"/>
               </a:solidFill>
               <a:prstDash val="solid"/>
               <a:round/>
@@ -190,7 +190,7 @@
                 <a:pPr>
                   <a:defRPr b="0" i="0" strike="noStrike" sz="1200" u="none">
                     <a:solidFill>
-                      <a:srgbClr val="0A0A0A"/>
+                      <a:srgbClr val="050816"/>
                     </a:solidFill>
                     <a:latin typeface="Arial"/>
                   </a:defRPr>
@@ -210,11 +210,11 @@
             <c:size val="6"/>
             <c:spPr>
               <a:solidFill>
-                <a:srgbClr val="D4AF37"/>
+                <a:srgbClr val="00F0FF"/>
               </a:solidFill>
               <a:ln w="9525" cap="flat">
                 <a:solidFill>
-                  <a:srgbClr val="D4AF37"/>
+                  <a:srgbClr val="00F0FF"/>
                 </a:solidFill>
                 <a:prstDash val="solid"/>
                 <a:round/>
@@ -288,7 +288,7 @@
               <a:pPr>
                 <a:defRPr b="0" i="0" strike="noStrike" sz="1200" u="none">
                   <a:solidFill>
-                    <a:srgbClr val="0A0A0A"/>
+                    <a:srgbClr val="050816"/>
                   </a:solidFill>
                   <a:latin typeface="Arial"/>
                 </a:defRPr>
@@ -335,7 +335,7 @@
             <a:pPr>
               <a:defRPr sz="1200" b="0" i="0" u="none" strike="noStrike">
                 <a:solidFill>
-                  <a:srgbClr val="9CA3AF"/>
+                  <a:srgbClr val="6B7280"/>
                 </a:solidFill>
                 <a:latin typeface="Arial"/>
               </a:defRPr>
@@ -387,7 +387,7 @@
             <a:pPr>
               <a:defRPr sz="1200" b="0" i="0" u="none" strike="noStrike">
                 <a:solidFill>
-                  <a:srgbClr val="9CA3AF"/>
+                  <a:srgbClr val="6B7280"/>
                 </a:solidFill>
                 <a:latin typeface="Arial"/>
               </a:defRPr>
@@ -439,7 +439,7 @@
             <a:pPr>
               <a:defRPr sz="1400" b="0" i="0" u="none" strike="noStrike">
                 <a:solidFill>
-                  <a:srgbClr val="111111"/>
+                  <a:srgbClr val="0A0E27"/>
                 </a:solidFill>
                 <a:latin typeface="Arial"/>
               </a:defRPr>
@@ -447,7 +447,7 @@
             <a:r>
               <a:rPr sz="1400" b="0" i="0" u="none" strike="noStrike">
                 <a:solidFill>
-                  <a:srgbClr val="111111"/>
+                  <a:srgbClr val="0A0E27"/>
                 </a:solidFill>
                 <a:latin typeface="Arial"/>
               </a:rPr>
@@ -496,7 +496,7 @@
             <c:bubble3D val="0"/>
             <c:spPr>
               <a:solidFill>
-                <a:srgbClr val="111111"/>
+                <a:srgbClr val="0A0E27"/>
               </a:solidFill>
               <a:effectLst/>
             </c:spPr>
@@ -506,7 +506,7 @@
             <c:bubble3D val="0"/>
             <c:spPr>
               <a:solidFill>
-                <a:srgbClr val="E5E7EB"/>
+                <a:srgbClr val="E6F1FF"/>
               </a:solidFill>
               <a:effectLst/>
             </c:spPr>
@@ -523,7 +523,7 @@
                   <a:pPr>
                     <a:defRPr sz="1200" b="0" i="0" u="none" strike="noStrike">
                       <a:solidFill>
-                        <a:srgbClr val="F5F5F5"/>
+                        <a:srgbClr val="FFFFFF"/>
                       </a:solidFill>
                       <a:latin typeface="Arial"/>
                     </a:defRPr>
@@ -548,7 +548,7 @@
                   <a:pPr>
                     <a:defRPr sz="1200" b="0" i="0" u="none" strike="noStrike">
                       <a:solidFill>
-                        <a:srgbClr val="F5F5F5"/>
+                        <a:srgbClr val="FFFFFF"/>
                       </a:solidFill>
                       <a:latin typeface="Arial"/>
                     </a:defRPr>
@@ -669,7 +669,7 @@
           </c:tx>
           <c:spPr>
             <a:solidFill>
-              <a:srgbClr val="111111"/>
+              <a:srgbClr val="0A0E27"/>
             </a:solidFill>
             <a:effectLst/>
           </c:spPr>
@@ -683,7 +683,7 @@
                 <a:pPr>
                   <a:defRPr b="0" i="0" strike="noStrike" sz="1200" u="none">
                     <a:solidFill>
-                      <a:srgbClr val="0A0A0A"/>
+                      <a:srgbClr val="050816"/>
                     </a:solidFill>
                     <a:latin typeface="Arial"/>
                   </a:defRPr>
@@ -775,7 +775,7 @@
               <a:pPr>
                 <a:defRPr b="0" i="0" strike="noStrike" sz="1200" u="none">
                   <a:solidFill>
-                    <a:srgbClr val="0A0A0A"/>
+                    <a:srgbClr val="050816"/>
                   </a:solidFill>
                   <a:latin typeface="Arial"/>
                 </a:defRPr>
@@ -823,7 +823,7 @@
             <a:pPr>
               <a:defRPr sz="1300" b="0" i="0" u="none" strike="noStrike">
                 <a:solidFill>
-                  <a:srgbClr val="0A0A0A"/>
+                  <a:srgbClr val="050816"/>
                 </a:solidFill>
                 <a:latin typeface="Arial"/>
               </a:defRPr>
@@ -877,7 +877,7 @@
             <a:pPr>
               <a:defRPr sz="1200" b="0" i="0" u="none" strike="noStrike">
                 <a:solidFill>
-                  <a:srgbClr val="9CA3AF"/>
+                  <a:srgbClr val="6B7280"/>
                 </a:solidFill>
                 <a:latin typeface="Arial"/>
               </a:defRPr>
@@ -2281,7 +2281,7 @@
     <p:bg>
       <p:bgPr>
         <a:solidFill>
-          <a:srgbClr val="111111"/>
+          <a:srgbClr val="0A0E27"/>
         </a:solidFill>
       </p:bgPr>
     </p:bg>
@@ -2314,7 +2314,7 @@
             <a:avLst/>
           </a:prstGeom>
           <a:solidFill>
-            <a:srgbClr val="D4AF37"/>
+            <a:srgbClr val="00F0FF"/>
           </a:solidFill>
           <a:ln/>
         </p:spPr>
@@ -2346,7 +2346,7 @@
             <a:r>
               <a:rPr lang="en-US" sz="6000" b="1" spc="200" kern="0" dirty="0">
                 <a:solidFill>
-                  <a:srgbClr val="F5F5F5"/>
+                  <a:srgbClr val="FFFFFF"/>
                 </a:solidFill>
                 <a:latin typeface="Georgia" pitchFamily="34" charset="0"/>
                 <a:ea typeface="Georgia" pitchFamily="34" charset="-122"/>
@@ -2385,7 +2385,7 @@
             <a:r>
               <a:rPr lang="en-US" sz="2200" dirty="0">
                 <a:solidFill>
-                  <a:srgbClr val="E5E7EB"/>
+                  <a:srgbClr val="E6F1FF"/>
                 </a:solidFill>
                 <a:latin typeface="Calibri" pitchFamily="34" charset="0"/>
                 <a:ea typeface="Calibri" pitchFamily="34" charset="-122"/>
@@ -2412,7 +2412,7 @@
             <a:avLst/>
           </a:prstGeom>
           <a:solidFill>
-            <a:srgbClr val="D4AF37"/>
+            <a:srgbClr val="00F0FF"/>
           </a:solidFill>
           <a:ln/>
         </p:spPr>
@@ -2444,7 +2444,7 @@
             <a:r>
               <a:rPr lang="en-US" sz="1600" dirty="0">
                 <a:solidFill>
-                  <a:srgbClr val="F5F5F5"/>
+                  <a:srgbClr val="FFFFFF"/>
                 </a:solidFill>
               </a:rPr>
               <a:t>IT Operations Manager &amp; Business Analyst  |  Greenville, SC</a:t>
@@ -2480,7 +2480,7 @@
             <a:r>
               <a:rPr lang="en-US" sz="1400" i="1" dirty="0">
                 <a:solidFill>
-                  <a:srgbClr val="D4AF37"/>
+                  <a:srgbClr val="00F0FF"/>
                 </a:solidFill>
               </a:rPr>
               <a:t>Portfolio Deck  •  2026</a:t>
@@ -2503,7 +2503,7 @@
     <p:bg>
       <p:bgPr>
         <a:solidFill>
-          <a:srgbClr val="F5F5F5"/>
+          <a:srgbClr val="FFFFFF"/>
         </a:solidFill>
       </p:bgPr>
     </p:bg>
@@ -2548,7 +2548,7 @@
             <a:r>
               <a:rPr lang="en-US" sz="4000" b="1" dirty="0">
                 <a:solidFill>
-                  <a:srgbClr val="111111"/>
+                  <a:srgbClr val="0A0E27"/>
                 </a:solidFill>
                 <a:latin typeface="Georgia" pitchFamily="34" charset="0"/>
                 <a:ea typeface="Georgia" pitchFamily="34" charset="-122"/>
@@ -2575,7 +2575,7 @@
             <a:avLst/>
           </a:prstGeom>
           <a:solidFill>
-            <a:srgbClr val="E5E7EB"/>
+            <a:srgbClr val="E6F1FF"/>
           </a:solidFill>
           <a:ln/>
         </p:spPr>
@@ -2610,7 +2610,7 @@
             <a:r>
               <a:rPr lang="en-US" sz="1500" dirty="0">
                 <a:solidFill>
-                  <a:srgbClr val="0A0A0A"/>
+                  <a:srgbClr val="050816"/>
                 </a:solidFill>
                 <a:latin typeface="Calibri" pitchFamily="34" charset="0"/>
                 <a:ea typeface="Calibri" pitchFamily="34" charset="-122"/>
@@ -2630,7 +2630,7 @@
             <a:r>
               <a:rPr lang="en-US" sz="1500" dirty="0">
                 <a:solidFill>
-                  <a:srgbClr val="0A0A0A"/>
+                  <a:srgbClr val="050816"/>
                 </a:solidFill>
                 <a:latin typeface="Calibri" pitchFamily="34" charset="0"/>
                 <a:ea typeface="Calibri" pitchFamily="34" charset="-122"/>
@@ -2647,7 +2647,7 @@
             <a:r>
               <a:rPr lang="en-US" sz="1500" dirty="0">
                 <a:solidFill>
-                  <a:srgbClr val="0A0A0A"/>
+                  <a:srgbClr val="050816"/>
                 </a:solidFill>
                 <a:latin typeface="Calibri" pitchFamily="34" charset="0"/>
                 <a:ea typeface="Calibri" pitchFamily="34" charset="-122"/>
@@ -2674,7 +2674,7 @@
             <a:avLst/>
           </a:prstGeom>
           <a:solidFill>
-            <a:srgbClr val="111111"/>
+            <a:srgbClr val="0A0E27"/>
           </a:solidFill>
           <a:ln/>
         </p:spPr>
@@ -2694,7 +2694,7 @@
             <a:avLst/>
           </a:prstGeom>
           <a:solidFill>
-            <a:srgbClr val="D4AF37"/>
+            <a:srgbClr val="00F0FF"/>
           </a:solidFill>
           <a:ln/>
         </p:spPr>
@@ -2726,7 +2726,7 @@
             <a:r>
               <a:rPr lang="en-US" sz="4800" b="1" dirty="0">
                 <a:solidFill>
-                  <a:srgbClr val="F5F5F5"/>
+                  <a:srgbClr val="FFFFFF"/>
                 </a:solidFill>
                 <a:latin typeface="Georgia" pitchFamily="34" charset="0"/>
                 <a:ea typeface="Georgia" pitchFamily="34" charset="-122"/>
@@ -2765,7 +2765,7 @@
             <a:r>
               <a:rPr lang="en-US" sz="1300" dirty="0">
                 <a:solidFill>
-                  <a:srgbClr val="E5E7EB"/>
+                  <a:srgbClr val="E6F1FF"/>
                 </a:solidFill>
               </a:rPr>
               <a:t>Years Experience</a:t>
@@ -2789,7 +2789,7 @@
             <a:avLst/>
           </a:prstGeom>
           <a:solidFill>
-            <a:srgbClr val="111111"/>
+            <a:srgbClr val="0A0E27"/>
           </a:solidFill>
           <a:ln/>
         </p:spPr>
@@ -2809,7 +2809,7 @@
             <a:avLst/>
           </a:prstGeom>
           <a:solidFill>
-            <a:srgbClr val="D4AF37"/>
+            <a:srgbClr val="00F0FF"/>
           </a:solidFill>
           <a:ln/>
         </p:spPr>
@@ -2841,7 +2841,7 @@
             <a:r>
               <a:rPr lang="en-US" sz="4800" b="1" dirty="0">
                 <a:solidFill>
-                  <a:srgbClr val="F5F5F5"/>
+                  <a:srgbClr val="FFFFFF"/>
                 </a:solidFill>
                 <a:latin typeface="Georgia" pitchFamily="34" charset="0"/>
                 <a:ea typeface="Georgia" pitchFamily="34" charset="-122"/>
@@ -2880,7 +2880,7 @@
             <a:r>
               <a:rPr lang="en-US" sz="1300" dirty="0">
                 <a:solidFill>
-                  <a:srgbClr val="E5E7EB"/>
+                  <a:srgbClr val="E6F1FF"/>
                 </a:solidFill>
               </a:rPr>
               <a:t>Months to Full Security Framework</a:t>
@@ -2904,7 +2904,7 @@
             <a:avLst/>
           </a:prstGeom>
           <a:solidFill>
-            <a:srgbClr val="111111"/>
+            <a:srgbClr val="0A0E27"/>
           </a:solidFill>
           <a:ln/>
         </p:spPr>
@@ -2924,7 +2924,7 @@
             <a:avLst/>
           </a:prstGeom>
           <a:solidFill>
-            <a:srgbClr val="D4AF37"/>
+            <a:srgbClr val="00F0FF"/>
           </a:solidFill>
           <a:ln/>
         </p:spPr>
@@ -2956,7 +2956,7 @@
             <a:r>
               <a:rPr lang="en-US" sz="4800" b="1" dirty="0">
                 <a:solidFill>
-                  <a:srgbClr val="F5F5F5"/>
+                  <a:srgbClr val="FFFFFF"/>
                 </a:solidFill>
                 <a:latin typeface="Georgia" pitchFamily="34" charset="0"/>
                 <a:ea typeface="Georgia" pitchFamily="34" charset="-122"/>
@@ -2995,7 +2995,7 @@
             <a:r>
               <a:rPr lang="en-US" sz="1300" dirty="0">
                 <a:solidFill>
-                  <a:srgbClr val="E5E7EB"/>
+                  <a:srgbClr val="E6F1FF"/>
                 </a:solidFill>
               </a:rPr>
               <a:t>Predictive Model Accuracy</a:t>
@@ -3019,7 +3019,7 @@
             <a:avLst/>
           </a:prstGeom>
           <a:solidFill>
-            <a:srgbClr val="111111"/>
+            <a:srgbClr val="0A0E27"/>
           </a:solidFill>
           <a:ln/>
         </p:spPr>
@@ -3039,7 +3039,7 @@
             <a:avLst/>
           </a:prstGeom>
           <a:solidFill>
-            <a:srgbClr val="D4AF37"/>
+            <a:srgbClr val="00F0FF"/>
           </a:solidFill>
           <a:ln/>
         </p:spPr>
@@ -3071,7 +3071,7 @@
             <a:r>
               <a:rPr lang="en-US" sz="4800" b="1" dirty="0">
                 <a:solidFill>
-                  <a:srgbClr val="F5F5F5"/>
+                  <a:srgbClr val="FFFFFF"/>
                 </a:solidFill>
                 <a:latin typeface="Georgia" pitchFamily="34" charset="0"/>
                 <a:ea typeface="Georgia" pitchFamily="34" charset="-122"/>
@@ -3110,7 +3110,7 @@
             <a:r>
               <a:rPr lang="en-US" sz="1300" dirty="0">
                 <a:solidFill>
-                  <a:srgbClr val="E5E7EB"/>
+                  <a:srgbClr val="E6F1FF"/>
                 </a:solidFill>
               </a:rPr>
               <a:t>Clouds (AWS • Azure • GCP)</a:t>
@@ -3134,7 +3134,7 @@
             <a:avLst/>
           </a:prstGeom>
           <a:solidFill>
-            <a:srgbClr val="111111"/>
+            <a:srgbClr val="0A0E27"/>
           </a:solidFill>
           <a:ln/>
         </p:spPr>
@@ -3166,7 +3166,7 @@
             <a:r>
               <a:rPr lang="en-US" sz="1000" dirty="0">
                 <a:solidFill>
-                  <a:srgbClr val="E5E7EB"/>
+                  <a:srgbClr val="E6F1FF"/>
                 </a:solidFill>
               </a:rPr>
               <a:t>Tracey Scott  |  Cybersecurity • Cloud • SOC  |  traceysscott82@gmail.com</a:t>
@@ -3202,7 +3202,7 @@
             <a:r>
               <a:rPr lang="en-US" sz="1000" dirty="0">
                 <a:solidFill>
-                  <a:srgbClr val="E5E7EB"/>
+                  <a:srgbClr val="E6F1FF"/>
                 </a:solidFill>
               </a:rPr>
               <a:t>2</a:t>
@@ -3225,7 +3225,7 @@
     <p:bg>
       <p:bgPr>
         <a:solidFill>
-          <a:srgbClr val="F5F5F5"/>
+          <a:srgbClr val="FFFFFF"/>
         </a:solidFill>
       </p:bgPr>
     </p:bg>
@@ -3270,7 +3270,7 @@
             <a:r>
               <a:rPr lang="en-US" sz="3600" b="1" dirty="0">
                 <a:solidFill>
-                  <a:srgbClr val="111111"/>
+                  <a:srgbClr val="0A0E27"/>
                 </a:solidFill>
                 <a:latin typeface="Georgia" pitchFamily="34" charset="0"/>
                 <a:ea typeface="Georgia" pitchFamily="34" charset="-122"/>
@@ -3297,11 +3297,11 @@
             <a:avLst/>
           </a:prstGeom>
           <a:solidFill>
-            <a:srgbClr val="F5F5F5"/>
+            <a:srgbClr val="FFFFFF"/>
           </a:solidFill>
           <a:ln w="12700">
             <a:solidFill>
-              <a:srgbClr val="E5E7EB"/>
+              <a:srgbClr val="E6F1FF"/>
             </a:solidFill>
             <a:prstDash val="solid"/>
           </a:ln>
@@ -3329,7 +3329,7 @@
             <a:avLst/>
           </a:prstGeom>
           <a:solidFill>
-            <a:srgbClr val="D4AF37"/>
+            <a:srgbClr val="00F0FF"/>
           </a:solidFill>
           <a:ln/>
         </p:spPr>
@@ -3361,7 +3361,7 @@
             <a:r>
               <a:rPr lang="en-US" sz="1800" b="1" dirty="0">
                 <a:solidFill>
-                  <a:srgbClr val="111111"/>
+                  <a:srgbClr val="0A0E27"/>
                 </a:solidFill>
                 <a:latin typeface="Georgia" pitchFamily="34" charset="0"/>
                 <a:ea typeface="Georgia" pitchFamily="34" charset="-122"/>
@@ -3401,7 +3401,7 @@
             <a:r>
               <a:rPr lang="en-US" sz="1300" dirty="0">
                 <a:solidFill>
-                  <a:srgbClr val="0A0A0A"/>
+                  <a:srgbClr val="050816"/>
                 </a:solidFill>
               </a:rPr>
               <a:t>IDS/IPS &amp; Firewall Admin</a:t>
@@ -3416,7 +3416,7 @@
             <a:r>
               <a:rPr lang="en-US" sz="1300" dirty="0">
                 <a:solidFill>
-                  <a:srgbClr val="0A0A0A"/>
+                  <a:srgbClr val="050816"/>
                 </a:solidFill>
               </a:rPr>
               <a:t>Endpoint / EDR &amp; MDM</a:t>
@@ -3431,7 +3431,7 @@
             <a:r>
               <a:rPr lang="en-US" sz="1300" dirty="0">
                 <a:solidFill>
-                  <a:srgbClr val="0A0A0A"/>
+                  <a:srgbClr val="050816"/>
                 </a:solidFill>
               </a:rPr>
               <a:t>Incident Response</a:t>
@@ -3446,7 +3446,7 @@
             <a:r>
               <a:rPr lang="en-US" sz="1300" dirty="0">
                 <a:solidFill>
-                  <a:srgbClr val="0A0A0A"/>
+                  <a:srgbClr val="050816"/>
                 </a:solidFill>
               </a:rPr>
               <a:t>Org Training via KnowBe4</a:t>
@@ -3470,11 +3470,11 @@
             <a:avLst/>
           </a:prstGeom>
           <a:solidFill>
-            <a:srgbClr val="F5F5F5"/>
+            <a:srgbClr val="FFFFFF"/>
           </a:solidFill>
           <a:ln w="12700">
             <a:solidFill>
-              <a:srgbClr val="E5E7EB"/>
+              <a:srgbClr val="E6F1FF"/>
             </a:solidFill>
             <a:prstDash val="solid"/>
           </a:ln>
@@ -3502,7 +3502,7 @@
             <a:avLst/>
           </a:prstGeom>
           <a:solidFill>
-            <a:srgbClr val="D4AF37"/>
+            <a:srgbClr val="00F0FF"/>
           </a:solidFill>
           <a:ln/>
         </p:spPr>
@@ -3534,7 +3534,7 @@
             <a:r>
               <a:rPr lang="en-US" sz="1800" b="1" dirty="0">
                 <a:solidFill>
-                  <a:srgbClr val="111111"/>
+                  <a:srgbClr val="0A0E27"/>
                 </a:solidFill>
                 <a:latin typeface="Georgia" pitchFamily="34" charset="0"/>
                 <a:ea typeface="Georgia" pitchFamily="34" charset="-122"/>
@@ -3574,7 +3574,7 @@
             <a:r>
               <a:rPr lang="en-US" sz="1300" dirty="0">
                 <a:solidFill>
-                  <a:srgbClr val="0A0A0A"/>
+                  <a:srgbClr val="050816"/>
                 </a:solidFill>
               </a:rPr>
               <a:t>AWS, Azure, GCP</a:t>
@@ -3589,7 +3589,7 @@
             <a:r>
               <a:rPr lang="en-US" sz="1300" dirty="0">
                 <a:solidFill>
-                  <a:srgbClr val="0A0A0A"/>
+                  <a:srgbClr val="050816"/>
                 </a:solidFill>
               </a:rPr>
               <a:t>IAM / RBAC / Azure AD</a:t>
@@ -3604,7 +3604,7 @@
             <a:r>
               <a:rPr lang="en-US" sz="1300" dirty="0">
                 <a:solidFill>
-                  <a:srgbClr val="0A0A0A"/>
+                  <a:srgbClr val="050816"/>
                 </a:solidFill>
               </a:rPr>
               <a:t>VMware, Hyper-V, Docker</a:t>
@@ -3619,7 +3619,7 @@
             <a:r>
               <a:rPr lang="en-US" sz="1300" dirty="0">
                 <a:solidFill>
-                  <a:srgbClr val="0A0A0A"/>
+                  <a:srgbClr val="050816"/>
                 </a:solidFill>
               </a:rPr>
               <a:t>M365 &amp; SaaS Admin</a:t>
@@ -3643,11 +3643,11 @@
             <a:avLst/>
           </a:prstGeom>
           <a:solidFill>
-            <a:srgbClr val="F5F5F5"/>
+            <a:srgbClr val="FFFFFF"/>
           </a:solidFill>
           <a:ln w="12700">
             <a:solidFill>
-              <a:srgbClr val="E5E7EB"/>
+              <a:srgbClr val="E6F1FF"/>
             </a:solidFill>
             <a:prstDash val="solid"/>
           </a:ln>
@@ -3675,7 +3675,7 @@
             <a:avLst/>
           </a:prstGeom>
           <a:solidFill>
-            <a:srgbClr val="D4AF37"/>
+            <a:srgbClr val="00F0FF"/>
           </a:solidFill>
           <a:ln/>
         </p:spPr>
@@ -3707,7 +3707,7 @@
             <a:r>
               <a:rPr lang="en-US" sz="1800" b="1" dirty="0">
                 <a:solidFill>
-                  <a:srgbClr val="111111"/>
+                  <a:srgbClr val="0A0E27"/>
                 </a:solidFill>
                 <a:latin typeface="Georgia" pitchFamily="34" charset="0"/>
                 <a:ea typeface="Georgia" pitchFamily="34" charset="-122"/>
@@ -3747,7 +3747,7 @@
             <a:r>
               <a:rPr lang="en-US" sz="1300" dirty="0">
                 <a:solidFill>
-                  <a:srgbClr val="0A0A0A"/>
+                  <a:srgbClr val="050816"/>
                 </a:solidFill>
               </a:rPr>
               <a:t>GDPR, SOX, ITIL</a:t>
@@ -3762,7 +3762,7 @@
             <a:r>
               <a:rPr lang="en-US" sz="1300" dirty="0">
                 <a:solidFill>
-                  <a:srgbClr val="0A0A0A"/>
+                  <a:srgbClr val="050816"/>
                 </a:solidFill>
               </a:rPr>
               <a:t>Risk Assessment</a:t>
@@ -3777,7 +3777,7 @@
             <a:r>
               <a:rPr lang="en-US" sz="1300" dirty="0">
                 <a:solidFill>
-                  <a:srgbClr val="0A0A0A"/>
+                  <a:srgbClr val="050816"/>
                 </a:solidFill>
               </a:rPr>
               <a:t>Vulnerability Management</a:t>
@@ -3792,7 +3792,7 @@
             <a:r>
               <a:rPr lang="en-US" sz="1300" dirty="0">
                 <a:solidFill>
-                  <a:srgbClr val="0A0A0A"/>
+                  <a:srgbClr val="050816"/>
                 </a:solidFill>
               </a:rPr>
               <a:t>Security Policy Design</a:t>
@@ -3816,11 +3816,11 @@
             <a:avLst/>
           </a:prstGeom>
           <a:solidFill>
-            <a:srgbClr val="F5F5F5"/>
+            <a:srgbClr val="FFFFFF"/>
           </a:solidFill>
           <a:ln w="12700">
             <a:solidFill>
-              <a:srgbClr val="E5E7EB"/>
+              <a:srgbClr val="E6F1FF"/>
             </a:solidFill>
             <a:prstDash val="solid"/>
           </a:ln>
@@ -3848,7 +3848,7 @@
             <a:avLst/>
           </a:prstGeom>
           <a:solidFill>
-            <a:srgbClr val="D4AF37"/>
+            <a:srgbClr val="00F0FF"/>
           </a:solidFill>
           <a:ln/>
         </p:spPr>
@@ -3880,7 +3880,7 @@
             <a:r>
               <a:rPr lang="en-US" sz="1800" b="1" dirty="0">
                 <a:solidFill>
-                  <a:srgbClr val="111111"/>
+                  <a:srgbClr val="0A0E27"/>
                 </a:solidFill>
                 <a:latin typeface="Georgia" pitchFamily="34" charset="0"/>
                 <a:ea typeface="Georgia" pitchFamily="34" charset="-122"/>
@@ -3920,7 +3920,7 @@
             <a:r>
               <a:rPr lang="en-US" sz="1300" dirty="0">
                 <a:solidFill>
-                  <a:srgbClr val="0A0A0A"/>
+                  <a:srgbClr val="050816"/>
                 </a:solidFill>
               </a:rPr>
               <a:t>PowerShell, Python, SQL</a:t>
@@ -3935,7 +3935,7 @@
             <a:r>
               <a:rPr lang="en-US" sz="1300" dirty="0">
                 <a:solidFill>
-                  <a:srgbClr val="0A0A0A"/>
+                  <a:srgbClr val="050816"/>
                 </a:solidFill>
               </a:rPr>
               <a:t>Excel (Pivot Tables, VLOOKUP)</a:t>
@@ -3950,7 +3950,7 @@
             <a:r>
               <a:rPr lang="en-US" sz="1300" dirty="0">
                 <a:solidFill>
-                  <a:srgbClr val="0A0A0A"/>
+                  <a:srgbClr val="050816"/>
                 </a:solidFill>
               </a:rPr>
               <a:t>Power BI, Tableau &amp; LLMs</a:t>
@@ -3965,7 +3965,7 @@
             <a:r>
               <a:rPr lang="en-US" sz="1300" dirty="0">
                 <a:solidFill>
-                  <a:srgbClr val="0A0A0A"/>
+                  <a:srgbClr val="050816"/>
                 </a:solidFill>
               </a:rPr>
               <a:t>Predictive Modeling &amp; Automation</a:t>
@@ -3989,7 +3989,7 @@
             <a:avLst/>
           </a:prstGeom>
           <a:solidFill>
-            <a:srgbClr val="111111"/>
+            <a:srgbClr val="0A0E27"/>
           </a:solidFill>
           <a:ln/>
         </p:spPr>
@@ -4021,7 +4021,7 @@
             <a:r>
               <a:rPr lang="en-US" sz="1000" dirty="0">
                 <a:solidFill>
-                  <a:srgbClr val="E5E7EB"/>
+                  <a:srgbClr val="E6F1FF"/>
                 </a:solidFill>
               </a:rPr>
               <a:t>Tracey Scott  |  Cybersecurity • Cloud • SOC  |  traceysscott82@gmail.com</a:t>
@@ -4057,7 +4057,7 @@
             <a:r>
               <a:rPr lang="en-US" sz="1000" dirty="0">
                 <a:solidFill>
-                  <a:srgbClr val="E5E7EB"/>
+                  <a:srgbClr val="E6F1FF"/>
                 </a:solidFill>
               </a:rPr>
               <a:t>3</a:t>
@@ -4080,7 +4080,7 @@
     <p:bg>
       <p:bgPr>
         <a:solidFill>
-          <a:srgbClr val="F5F5F5"/>
+          <a:srgbClr val="FFFFFF"/>
         </a:solidFill>
       </p:bgPr>
     </p:bg>
@@ -4125,7 +4125,7 @@
             <a:r>
               <a:rPr lang="en-US" sz="3600" b="1" dirty="0">
                 <a:solidFill>
-                  <a:srgbClr val="111111"/>
+                  <a:srgbClr val="0A0E27"/>
                 </a:solidFill>
                 <a:latin typeface="Georgia" pitchFamily="34" charset="0"/>
                 <a:ea typeface="Georgia" pitchFamily="34" charset="-122"/>
@@ -4164,7 +4164,7 @@
             <a:r>
               <a:rPr lang="en-US" sz="1400" i="1" dirty="0">
                 <a:solidFill>
-                  <a:srgbClr val="9CA3AF"/>
+                  <a:srgbClr val="6B7280"/>
                 </a:solidFill>
               </a:rPr>
               <a:t>Executive view I built at RightPath to monitor posture, incidents, and compliance.</a:t>
@@ -4188,7 +4188,7 @@
             <a:avLst/>
           </a:prstGeom>
           <a:solidFill>
-            <a:srgbClr val="111111"/>
+            <a:srgbClr val="0A0E27"/>
           </a:solidFill>
           <a:ln/>
         </p:spPr>
@@ -4220,7 +4220,7 @@
             <a:r>
               <a:rPr lang="en-US" sz="3000" b="1" dirty="0">
                 <a:solidFill>
-                  <a:srgbClr val="D4AF37"/>
+                  <a:srgbClr val="00F0FF"/>
                 </a:solidFill>
                 <a:latin typeface="Georgia" pitchFamily="34" charset="0"/>
                 <a:ea typeface="Georgia" pitchFamily="34" charset="-122"/>
@@ -4259,7 +4259,7 @@
             <a:r>
               <a:rPr lang="en-US" sz="1200" dirty="0">
                 <a:solidFill>
-                  <a:srgbClr val="E5E7EB"/>
+                  <a:srgbClr val="E6F1FF"/>
                 </a:solidFill>
               </a:rPr>
               <a:t>Uptime</a:t>
@@ -4283,7 +4283,7 @@
             <a:avLst/>
           </a:prstGeom>
           <a:solidFill>
-            <a:srgbClr val="111111"/>
+            <a:srgbClr val="0A0E27"/>
           </a:solidFill>
           <a:ln/>
         </p:spPr>
@@ -4315,7 +4315,7 @@
             <a:r>
               <a:rPr lang="en-US" sz="3000" b="1" dirty="0">
                 <a:solidFill>
-                  <a:srgbClr val="D4AF37"/>
+                  <a:srgbClr val="00F0FF"/>
                 </a:solidFill>
                 <a:latin typeface="Georgia" pitchFamily="34" charset="0"/>
                 <a:ea typeface="Georgia" pitchFamily="34" charset="-122"/>
@@ -4354,7 +4354,7 @@
             <a:r>
               <a:rPr lang="en-US" sz="1200" dirty="0">
                 <a:solidFill>
-                  <a:srgbClr val="E5E7EB"/>
+                  <a:srgbClr val="E6F1FF"/>
                 </a:solidFill>
               </a:rPr>
               <a:t>Critical Breaches</a:t>
@@ -4378,7 +4378,7 @@
             <a:avLst/>
           </a:prstGeom>
           <a:solidFill>
-            <a:srgbClr val="111111"/>
+            <a:srgbClr val="0A0E27"/>
           </a:solidFill>
           <a:ln/>
         </p:spPr>
@@ -4410,7 +4410,7 @@
             <a:r>
               <a:rPr lang="en-US" sz="3000" b="1" dirty="0">
                 <a:solidFill>
-                  <a:srgbClr val="D4AF37"/>
+                  <a:srgbClr val="00F0FF"/>
                 </a:solidFill>
                 <a:latin typeface="Georgia" pitchFamily="34" charset="0"/>
                 <a:ea typeface="Georgia" pitchFamily="34" charset="-122"/>
@@ -4449,7 +4449,7 @@
             <a:r>
               <a:rPr lang="en-US" sz="1200" dirty="0">
                 <a:solidFill>
-                  <a:srgbClr val="E5E7EB"/>
+                  <a:srgbClr val="E6F1FF"/>
                 </a:solidFill>
               </a:rPr>
               <a:t>Threats Mitigated</a:t>
@@ -4473,7 +4473,7 @@
             <a:avLst/>
           </a:prstGeom>
           <a:solidFill>
-            <a:srgbClr val="111111"/>
+            <a:srgbClr val="0A0E27"/>
           </a:solidFill>
           <a:ln/>
         </p:spPr>
@@ -4505,7 +4505,7 @@
             <a:r>
               <a:rPr lang="en-US" sz="3000" b="1" dirty="0">
                 <a:solidFill>
-                  <a:srgbClr val="D4AF37"/>
+                  <a:srgbClr val="00F0FF"/>
                 </a:solidFill>
                 <a:latin typeface="Georgia" pitchFamily="34" charset="0"/>
                 <a:ea typeface="Georgia" pitchFamily="34" charset="-122"/>
@@ -4544,7 +4544,7 @@
             <a:r>
               <a:rPr lang="en-US" sz="1200" dirty="0">
                 <a:solidFill>
-                  <a:srgbClr val="E5E7EB"/>
+                  <a:srgbClr val="E6F1FF"/>
                 </a:solidFill>
               </a:rPr>
               <a:t>RBAC Coverage</a:t>
@@ -4600,7 +4600,7 @@
             <a:avLst/>
           </a:prstGeom>
           <a:solidFill>
-            <a:srgbClr val="111111"/>
+            <a:srgbClr val="0A0E27"/>
           </a:solidFill>
           <a:ln/>
         </p:spPr>
@@ -4632,7 +4632,7 @@
             <a:r>
               <a:rPr lang="en-US" sz="1000" dirty="0">
                 <a:solidFill>
-                  <a:srgbClr val="E5E7EB"/>
+                  <a:srgbClr val="E6F1FF"/>
                 </a:solidFill>
               </a:rPr>
               <a:t>Tracey Scott  |  Cybersecurity • Cloud • SOC  |  traceysscott82@gmail.com</a:t>
@@ -4668,7 +4668,7 @@
             <a:r>
               <a:rPr lang="en-US" sz="1000" dirty="0">
                 <a:solidFill>
-                  <a:srgbClr val="E5E7EB"/>
+                  <a:srgbClr val="E6F1FF"/>
                 </a:solidFill>
               </a:rPr>
               <a:t>4</a:t>
@@ -4691,7 +4691,7 @@
     <p:bg>
       <p:bgPr>
         <a:solidFill>
-          <a:srgbClr val="F5F5F5"/>
+          <a:srgbClr val="FFFFFF"/>
         </a:solidFill>
       </p:bgPr>
     </p:bg>
@@ -4736,7 +4736,7 @@
             <a:r>
               <a:rPr lang="en-US" sz="3600" b="1" dirty="0">
                 <a:solidFill>
-                  <a:srgbClr val="111111"/>
+                  <a:srgbClr val="0A0E27"/>
                 </a:solidFill>
                 <a:latin typeface="Georgia" pitchFamily="34" charset="0"/>
                 <a:ea typeface="Georgia" pitchFamily="34" charset="-122"/>
@@ -4763,7 +4763,7 @@
             <a:avLst/>
           </a:prstGeom>
           <a:solidFill>
-            <a:srgbClr val="E5E7EB"/>
+            <a:srgbClr val="E6F1FF"/>
           </a:solidFill>
           <a:ln/>
         </p:spPr>
@@ -4783,7 +4783,7 @@
             <a:avLst/>
           </a:prstGeom>
           <a:solidFill>
-            <a:srgbClr val="D4AF37"/>
+            <a:srgbClr val="00F0FF"/>
           </a:solidFill>
           <a:ln/>
         </p:spPr>
@@ -4815,7 +4815,7 @@
             <a:r>
               <a:rPr lang="en-US" sz="1300" b="1" dirty="0">
                 <a:solidFill>
-                  <a:srgbClr val="D4AF37"/>
+                  <a:srgbClr val="00F0FF"/>
                 </a:solidFill>
                 <a:latin typeface="Georgia" pitchFamily="34" charset="0"/>
                 <a:ea typeface="Georgia" pitchFamily="34" charset="-122"/>
@@ -4854,7 +4854,7 @@
             <a:r>
               <a:rPr lang="en-US" sz="1400" b="1" dirty="0">
                 <a:solidFill>
-                  <a:srgbClr val="111111"/>
+                  <a:srgbClr val="0A0E27"/>
                 </a:solidFill>
               </a:rPr>
               <a:t>Enterprise Security Framework</a:t>
@@ -4890,7 +4890,7 @@
             <a:r>
               <a:rPr lang="en-US" sz="1100" dirty="0">
                 <a:solidFill>
-                  <a:srgbClr val="0A0A0A"/>
+                  <a:srgbClr val="050816"/>
                 </a:solidFill>
               </a:rPr>
               <a:t>Architected endpoint, IDS/IPS, MDM, and access governance for startup in 6 months.</a:t>
@@ -4914,7 +4914,7 @@
             <a:avLst/>
           </a:prstGeom>
           <a:solidFill>
-            <a:srgbClr val="E5E7EB"/>
+            <a:srgbClr val="E6F1FF"/>
           </a:solidFill>
           <a:ln/>
         </p:spPr>
@@ -4934,7 +4934,7 @@
             <a:avLst/>
           </a:prstGeom>
           <a:solidFill>
-            <a:srgbClr val="D4AF37"/>
+            <a:srgbClr val="00F0FF"/>
           </a:solidFill>
           <a:ln/>
         </p:spPr>
@@ -4966,7 +4966,7 @@
             <a:r>
               <a:rPr lang="en-US" sz="1300" b="1" dirty="0">
                 <a:solidFill>
-                  <a:srgbClr val="D4AF37"/>
+                  <a:srgbClr val="00F0FF"/>
                 </a:solidFill>
                 <a:latin typeface="Georgia" pitchFamily="34" charset="0"/>
                 <a:ea typeface="Georgia" pitchFamily="34" charset="-122"/>
@@ -5005,7 +5005,7 @@
             <a:r>
               <a:rPr lang="en-US" sz="1400" b="1" dirty="0">
                 <a:solidFill>
-                  <a:srgbClr val="111111"/>
+                  <a:srgbClr val="0A0E27"/>
                 </a:solidFill>
               </a:rPr>
               <a:t>Secure Multi-Cloud Deployment</a:t>
@@ -5041,7 +5041,7 @@
             <a:r>
               <a:rPr lang="en-US" sz="1100" dirty="0">
                 <a:solidFill>
-                  <a:srgbClr val="0A0A0A"/>
+                  <a:srgbClr val="050816"/>
                 </a:solidFill>
               </a:rPr>
               <a:t>AWS + Azure infrastructure with IAM, RBAC, encryption, and least-privilege controls.</a:t>
@@ -5065,7 +5065,7 @@
             <a:avLst/>
           </a:prstGeom>
           <a:solidFill>
-            <a:srgbClr val="E5E7EB"/>
+            <a:srgbClr val="E6F1FF"/>
           </a:solidFill>
           <a:ln/>
         </p:spPr>
@@ -5085,7 +5085,7 @@
             <a:avLst/>
           </a:prstGeom>
           <a:solidFill>
-            <a:srgbClr val="D4AF37"/>
+            <a:srgbClr val="00F0FF"/>
           </a:solidFill>
           <a:ln/>
         </p:spPr>
@@ -5117,7 +5117,7 @@
             <a:r>
               <a:rPr lang="en-US" sz="1300" b="1" dirty="0">
                 <a:solidFill>
-                  <a:srgbClr val="D4AF37"/>
+                  <a:srgbClr val="00F0FF"/>
                 </a:solidFill>
                 <a:latin typeface="Georgia" pitchFamily="34" charset="0"/>
                 <a:ea typeface="Georgia" pitchFamily="34" charset="-122"/>
@@ -5156,7 +5156,7 @@
             <a:r>
               <a:rPr lang="en-US" sz="1400" b="1" dirty="0">
                 <a:solidFill>
-                  <a:srgbClr val="111111"/>
+                  <a:srgbClr val="0A0E27"/>
                 </a:solidFill>
               </a:rPr>
               <a:t>CRM Secure Deployment</a:t>
@@ -5192,7 +5192,7 @@
             <a:r>
               <a:rPr lang="en-US" sz="1100" dirty="0">
                 <a:solidFill>
-                  <a:srgbClr val="0A0A0A"/>
+                  <a:srgbClr val="050816"/>
                 </a:solidFill>
               </a:rPr>
               <a:t>Complete CRM build — coding, development, maintenance, secure auth, encryption, RBAC.</a:t>
@@ -5216,7 +5216,7 @@
             <a:avLst/>
           </a:prstGeom>
           <a:solidFill>
-            <a:srgbClr val="E5E7EB"/>
+            <a:srgbClr val="E6F1FF"/>
           </a:solidFill>
           <a:ln/>
         </p:spPr>
@@ -5236,7 +5236,7 @@
             <a:avLst/>
           </a:prstGeom>
           <a:solidFill>
-            <a:srgbClr val="D4AF37"/>
+            <a:srgbClr val="00F0FF"/>
           </a:solidFill>
           <a:ln/>
         </p:spPr>
@@ -5268,7 +5268,7 @@
             <a:r>
               <a:rPr lang="en-US" sz="1300" b="1" dirty="0">
                 <a:solidFill>
-                  <a:srgbClr val="D4AF37"/>
+                  <a:srgbClr val="00F0FF"/>
                 </a:solidFill>
                 <a:latin typeface="Georgia" pitchFamily="34" charset="0"/>
                 <a:ea typeface="Georgia" pitchFamily="34" charset="-122"/>
@@ -5307,7 +5307,7 @@
             <a:r>
               <a:rPr lang="en-US" sz="1400" b="1" dirty="0">
                 <a:solidFill>
-                  <a:srgbClr val="111111"/>
+                  <a:srgbClr val="0A0E27"/>
                 </a:solidFill>
               </a:rPr>
               <a:t>Executive Dashboards</a:t>
@@ -5343,7 +5343,7 @@
             <a:r>
               <a:rPr lang="en-US" sz="1100" dirty="0">
                 <a:solidFill>
-                  <a:srgbClr val="0A0A0A"/>
+                  <a:srgbClr val="050816"/>
                 </a:solidFill>
               </a:rPr>
               <a:t>Power BI dashboards for incidents, compliance, and sales metrics — auditing, trends &amp; revenue forecasting.</a:t>
@@ -5367,7 +5367,7 @@
             <a:avLst/>
           </a:prstGeom>
           <a:solidFill>
-            <a:srgbClr val="E5E7EB"/>
+            <a:srgbClr val="E6F1FF"/>
           </a:solidFill>
           <a:ln/>
         </p:spPr>
@@ -5387,7 +5387,7 @@
             <a:avLst/>
           </a:prstGeom>
           <a:solidFill>
-            <a:srgbClr val="D4AF37"/>
+            <a:srgbClr val="00F0FF"/>
           </a:solidFill>
           <a:ln/>
         </p:spPr>
@@ -5419,7 +5419,7 @@
             <a:r>
               <a:rPr lang="en-US" sz="1300" b="1" dirty="0">
                 <a:solidFill>
-                  <a:srgbClr val="D4AF37"/>
+                  <a:srgbClr val="00F0FF"/>
                 </a:solidFill>
                 <a:latin typeface="Georgia" pitchFamily="34" charset="0"/>
                 <a:ea typeface="Georgia" pitchFamily="34" charset="-122"/>
@@ -5458,7 +5458,7 @@
             <a:r>
               <a:rPr lang="en-US" sz="1400" b="1" dirty="0">
                 <a:solidFill>
-                  <a:srgbClr val="111111"/>
+                  <a:srgbClr val="0A0E27"/>
                 </a:solidFill>
               </a:rPr>
               <a:t>Incident Response &amp; KnowBe4</a:t>
@@ -5494,7 +5494,7 @@
             <a:r>
               <a:rPr lang="en-US" sz="1100" dirty="0">
                 <a:solidFill>
-                  <a:srgbClr val="0A0A0A"/>
+                  <a:srgbClr val="050816"/>
                 </a:solidFill>
               </a:rPr>
               <a:t>IR playbooks, remediation workflows, and org-wide KnowBe4 security awareness training.</a:t>
@@ -5518,7 +5518,7 @@
             <a:avLst/>
           </a:prstGeom>
           <a:solidFill>
-            <a:srgbClr val="E5E7EB"/>
+            <a:srgbClr val="E6F1FF"/>
           </a:solidFill>
           <a:ln/>
         </p:spPr>
@@ -5538,7 +5538,7 @@
             <a:avLst/>
           </a:prstGeom>
           <a:solidFill>
-            <a:srgbClr val="D4AF37"/>
+            <a:srgbClr val="00F0FF"/>
           </a:solidFill>
           <a:ln/>
         </p:spPr>
@@ -5570,7 +5570,7 @@
             <a:r>
               <a:rPr lang="en-US" sz="1300" b="1" dirty="0">
                 <a:solidFill>
-                  <a:srgbClr val="D4AF37"/>
+                  <a:srgbClr val="00F0FF"/>
                 </a:solidFill>
                 <a:latin typeface="Georgia" pitchFamily="34" charset="0"/>
                 <a:ea typeface="Georgia" pitchFamily="34" charset="-122"/>
@@ -5609,7 +5609,7 @@
             <a:r>
               <a:rPr lang="en-US" sz="1400" b="1" dirty="0">
                 <a:solidFill>
-                  <a:srgbClr val="111111"/>
+                  <a:srgbClr val="0A0E27"/>
                 </a:solidFill>
               </a:rPr>
               <a:t>IT Ticketing System</a:t>
@@ -5645,7 +5645,7 @@
             <a:r>
               <a:rPr lang="en-US" sz="1100" dirty="0">
                 <a:solidFill>
-                  <a:srgbClr val="0A0A0A"/>
+                  <a:srgbClr val="050816"/>
                 </a:solidFill>
               </a:rPr>
               <a:t>Built ticketing system for org-wide issue reporting, triage, and resolution tracking.</a:t>
@@ -5669,7 +5669,7 @@
             <a:avLst/>
           </a:prstGeom>
           <a:solidFill>
-            <a:srgbClr val="E5E7EB"/>
+            <a:srgbClr val="E6F1FF"/>
           </a:solidFill>
           <a:ln/>
         </p:spPr>
@@ -5689,7 +5689,7 @@
             <a:avLst/>
           </a:prstGeom>
           <a:solidFill>
-            <a:srgbClr val="D4AF37"/>
+            <a:srgbClr val="00F0FF"/>
           </a:solidFill>
           <a:ln/>
         </p:spPr>
@@ -5721,7 +5721,7 @@
             <a:r>
               <a:rPr lang="en-US" sz="1300" b="1" dirty="0">
                 <a:solidFill>
-                  <a:srgbClr val="D4AF37"/>
+                  <a:srgbClr val="00F0FF"/>
                 </a:solidFill>
                 <a:latin typeface="Georgia" pitchFamily="34" charset="0"/>
                 <a:ea typeface="Georgia" pitchFamily="34" charset="-122"/>
@@ -5760,7 +5760,7 @@
             <a:r>
               <a:rPr lang="en-US" sz="1400" b="1" dirty="0">
                 <a:solidFill>
-                  <a:srgbClr val="111111"/>
+                  <a:srgbClr val="0A0E27"/>
                 </a:solidFill>
               </a:rPr>
               <a:t>Internal AI Chatbots (LLM)</a:t>
@@ -5796,7 +5796,7 @@
             <a:r>
               <a:rPr lang="en-US" sz="1100" dirty="0">
                 <a:solidFill>
-                  <a:srgbClr val="0A0A0A"/>
+                  <a:srgbClr val="050816"/>
                 </a:solidFill>
               </a:rPr>
               <a:t>LLM-powered chatbots for multiple departments with CRM, Microsoft 365, and SharePoint connectivity.</a:t>
@@ -5820,7 +5820,7 @@
             <a:avLst/>
           </a:prstGeom>
           <a:solidFill>
-            <a:srgbClr val="111111"/>
+            <a:srgbClr val="0A0E27"/>
           </a:solidFill>
           <a:ln/>
         </p:spPr>
@@ -5852,7 +5852,7 @@
             <a:r>
               <a:rPr lang="en-US" sz="1000" dirty="0">
                 <a:solidFill>
-                  <a:srgbClr val="E5E7EB"/>
+                  <a:srgbClr val="E6F1FF"/>
                 </a:solidFill>
               </a:rPr>
               <a:t>Tracey Scott  |  Cybersecurity • Cloud • SOC  |  traceysscott82@gmail.com</a:t>
@@ -5888,7 +5888,7 @@
             <a:r>
               <a:rPr lang="en-US" sz="1000" dirty="0">
                 <a:solidFill>
-                  <a:srgbClr val="E5E7EB"/>
+                  <a:srgbClr val="E6F1FF"/>
                 </a:solidFill>
               </a:rPr>
               <a:t>5</a:t>
@@ -5911,7 +5911,7 @@
     <p:bg>
       <p:bgPr>
         <a:solidFill>
-          <a:srgbClr val="F5F5F5"/>
+          <a:srgbClr val="FFFFFF"/>
         </a:solidFill>
       </p:bgPr>
     </p:bg>
@@ -5956,7 +5956,7 @@
             <a:r>
               <a:rPr lang="en-US" sz="3600" b="1" dirty="0">
                 <a:solidFill>
-                  <a:srgbClr val="111111"/>
+                  <a:srgbClr val="0A0E27"/>
                 </a:solidFill>
                 <a:latin typeface="Georgia" pitchFamily="34" charset="0"/>
                 <a:ea typeface="Georgia" pitchFamily="34" charset="-122"/>
@@ -5995,7 +5995,7 @@
             <a:r>
               <a:rPr lang="en-US" sz="1400" i="1" dirty="0">
                 <a:solidFill>
-                  <a:srgbClr val="9CA3AF"/>
+                  <a:srgbClr val="6B7280"/>
                 </a:solidFill>
               </a:rPr>
               <a:t>Self-assessed proficiency across the stack I use in production.</a:t>
@@ -6035,7 +6035,7 @@
             <a:avLst/>
           </a:prstGeom>
           <a:solidFill>
-            <a:srgbClr val="111111"/>
+            <a:srgbClr val="0A0E27"/>
           </a:solidFill>
           <a:ln/>
         </p:spPr>
@@ -6067,7 +6067,7 @@
             <a:r>
               <a:rPr lang="en-US" sz="1000" dirty="0">
                 <a:solidFill>
-                  <a:srgbClr val="E5E7EB"/>
+                  <a:srgbClr val="E6F1FF"/>
                 </a:solidFill>
               </a:rPr>
               <a:t>Tracey Scott  |  Cybersecurity • Cloud • SOC  |  traceysscott82@gmail.com</a:t>
@@ -6103,7 +6103,7 @@
             <a:r>
               <a:rPr lang="en-US" sz="1000" dirty="0">
                 <a:solidFill>
-                  <a:srgbClr val="E5E7EB"/>
+                  <a:srgbClr val="E6F1FF"/>
                 </a:solidFill>
               </a:rPr>
               <a:t>6</a:t>
@@ -6126,7 +6126,7 @@
     <p:bg>
       <p:bgPr>
         <a:solidFill>
-          <a:srgbClr val="111111"/>
+          <a:srgbClr val="0A0E27"/>
         </a:solidFill>
       </p:bgPr>
     </p:bg>
@@ -6171,7 +6171,7 @@
             <a:r>
               <a:rPr lang="en-US" sz="3600" b="1" dirty="0">
                 <a:solidFill>
-                  <a:srgbClr val="F5F5F5"/>
+                  <a:srgbClr val="FFFFFF"/>
                 </a:solidFill>
                 <a:latin typeface="Georgia" pitchFamily="34" charset="0"/>
                 <a:ea typeface="Georgia" pitchFamily="34" charset="-122"/>
@@ -6198,7 +6198,7 @@
             <a:avLst/>
           </a:prstGeom>
           <a:solidFill>
-            <a:srgbClr val="D4AF37"/>
+            <a:srgbClr val="00F0FF"/>
           </a:solidFill>
           <a:ln/>
         </p:spPr>
@@ -6218,13 +6218,13 @@
             <a:avLst/>
           </a:prstGeom>
           <a:solidFill>
-            <a:srgbClr val="F5F5F5">
+            <a:srgbClr val="FFFFFF">
               <a:alpha val="10000"/>
             </a:srgbClr>
           </a:solidFill>
           <a:ln w="12700">
             <a:solidFill>
-              <a:srgbClr val="E5E7EB"/>
+              <a:srgbClr val="E6F1FF"/>
             </a:solidFill>
             <a:prstDash val="solid"/>
           </a:ln>
@@ -6257,7 +6257,7 @@
             <a:r>
               <a:rPr lang="en-US" sz="4400" b="1" dirty="0">
                 <a:solidFill>
-                  <a:srgbClr val="D4AF37"/>
+                  <a:srgbClr val="00F0FF"/>
                 </a:solidFill>
                 <a:latin typeface="Georgia" pitchFamily="34" charset="0"/>
                 <a:ea typeface="Georgia" pitchFamily="34" charset="-122"/>
@@ -6296,7 +6296,7 @@
             <a:r>
               <a:rPr lang="en-US" sz="1300" dirty="0">
                 <a:solidFill>
-                  <a:srgbClr val="F5F5F5"/>
+                  <a:srgbClr val="FFFFFF"/>
                 </a:solidFill>
               </a:rPr>
               <a:t>Full security framework stood up from zero</a:t>
@@ -6320,13 +6320,13 @@
             <a:avLst/>
           </a:prstGeom>
           <a:solidFill>
-            <a:srgbClr val="F5F5F5">
+            <a:srgbClr val="FFFFFF">
               <a:alpha val="10000"/>
             </a:srgbClr>
           </a:solidFill>
           <a:ln w="12700">
             <a:solidFill>
-              <a:srgbClr val="E5E7EB"/>
+              <a:srgbClr val="E6F1FF"/>
             </a:solidFill>
             <a:prstDash val="solid"/>
           </a:ln>
@@ -6359,7 +6359,7 @@
             <a:r>
               <a:rPr lang="en-US" sz="4400" b="1" dirty="0">
                 <a:solidFill>
-                  <a:srgbClr val="D4AF37"/>
+                  <a:srgbClr val="00F0FF"/>
                 </a:solidFill>
                 <a:latin typeface="Georgia" pitchFamily="34" charset="0"/>
                 <a:ea typeface="Georgia" pitchFamily="34" charset="-122"/>
@@ -6398,7 +6398,7 @@
             <a:r>
               <a:rPr lang="en-US" sz="1300" dirty="0">
                 <a:solidFill>
-                  <a:srgbClr val="F5F5F5"/>
+                  <a:srgbClr val="FFFFFF"/>
                 </a:solidFill>
               </a:rPr>
               <a:t>Predictive model accuracy delivered to stakeholders</a:t>
@@ -6422,13 +6422,13 @@
             <a:avLst/>
           </a:prstGeom>
           <a:solidFill>
-            <a:srgbClr val="F5F5F5">
+            <a:srgbClr val="FFFFFF">
               <a:alpha val="10000"/>
             </a:srgbClr>
           </a:solidFill>
           <a:ln w="12700">
             <a:solidFill>
-              <a:srgbClr val="E5E7EB"/>
+              <a:srgbClr val="E6F1FF"/>
             </a:solidFill>
             <a:prstDash val="solid"/>
           </a:ln>
@@ -6461,7 +6461,7 @@
             <a:r>
               <a:rPr lang="en-US" sz="4400" b="1" dirty="0">
                 <a:solidFill>
-                  <a:srgbClr val="D4AF37"/>
+                  <a:srgbClr val="00F0FF"/>
                 </a:solidFill>
                 <a:latin typeface="Georgia" pitchFamily="34" charset="0"/>
                 <a:ea typeface="Georgia" pitchFamily="34" charset="-122"/>
@@ -6500,7 +6500,7 @@
             <a:r>
               <a:rPr lang="en-US" sz="1300" dirty="0">
                 <a:solidFill>
-                  <a:srgbClr val="F5F5F5"/>
+                  <a:srgbClr val="FFFFFF"/>
                 </a:solidFill>
               </a:rPr>
               <a:t>Reporting accuracy gain through data validation</a:t>
@@ -6524,13 +6524,13 @@
             <a:avLst/>
           </a:prstGeom>
           <a:solidFill>
-            <a:srgbClr val="F5F5F5">
+            <a:srgbClr val="FFFFFF">
               <a:alpha val="10000"/>
             </a:srgbClr>
           </a:solidFill>
           <a:ln w="12700">
             <a:solidFill>
-              <a:srgbClr val="E5E7EB"/>
+              <a:srgbClr val="E6F1FF"/>
             </a:solidFill>
             <a:prstDash val="solid"/>
           </a:ln>
@@ -6563,7 +6563,7 @@
             <a:r>
               <a:rPr lang="en-US" sz="4400" b="1" dirty="0">
                 <a:solidFill>
-                  <a:srgbClr val="D4AF37"/>
+                  <a:srgbClr val="00F0FF"/>
                 </a:solidFill>
                 <a:latin typeface="Georgia" pitchFamily="34" charset="0"/>
                 <a:ea typeface="Georgia" pitchFamily="34" charset="-122"/>
@@ -6602,7 +6602,7 @@
             <a:r>
               <a:rPr lang="en-US" sz="1300" dirty="0">
                 <a:solidFill>
-                  <a:srgbClr val="F5F5F5"/>
+                  <a:srgbClr val="FFFFFF"/>
                 </a:solidFill>
               </a:rPr>
               <a:t>RBAC / least-privilege coverage across hybrid env</a:t>
@@ -6626,13 +6626,13 @@
             <a:avLst/>
           </a:prstGeom>
           <a:solidFill>
-            <a:srgbClr val="F5F5F5">
+            <a:srgbClr val="FFFFFF">
               <a:alpha val="10000"/>
             </a:srgbClr>
           </a:solidFill>
           <a:ln w="12700">
             <a:solidFill>
-              <a:srgbClr val="E5E7EB"/>
+              <a:srgbClr val="E6F1FF"/>
             </a:solidFill>
             <a:prstDash val="solid"/>
           </a:ln>
@@ -6665,7 +6665,7 @@
             <a:r>
               <a:rPr lang="en-US" sz="4400" b="1" dirty="0">
                 <a:solidFill>
-                  <a:srgbClr val="D4AF37"/>
+                  <a:srgbClr val="00F0FF"/>
                 </a:solidFill>
                 <a:latin typeface="Georgia" pitchFamily="34" charset="0"/>
                 <a:ea typeface="Georgia" pitchFamily="34" charset="-122"/>
@@ -6704,7 +6704,7 @@
             <a:r>
               <a:rPr lang="en-US" sz="1300" dirty="0">
                 <a:solidFill>
-                  <a:srgbClr val="F5F5F5"/>
+                  <a:srgbClr val="FFFFFF"/>
                 </a:solidFill>
               </a:rPr>
               <a:t>Critical incidents since framework rollout</a:t>
@@ -6728,13 +6728,13 @@
             <a:avLst/>
           </a:prstGeom>
           <a:solidFill>
-            <a:srgbClr val="F5F5F5">
+            <a:srgbClr val="FFFFFF">
               <a:alpha val="10000"/>
             </a:srgbClr>
           </a:solidFill>
           <a:ln w="12700">
             <a:solidFill>
-              <a:srgbClr val="E5E7EB"/>
+              <a:srgbClr val="E6F1FF"/>
             </a:solidFill>
             <a:prstDash val="solid"/>
           </a:ln>
@@ -6767,7 +6767,7 @@
             <a:r>
               <a:rPr lang="en-US" sz="4400" b="1" dirty="0">
                 <a:solidFill>
-                  <a:srgbClr val="D4AF37"/>
+                  <a:srgbClr val="00F0FF"/>
                 </a:solidFill>
                 <a:latin typeface="Georgia" pitchFamily="34" charset="0"/>
                 <a:ea typeface="Georgia" pitchFamily="34" charset="-122"/>
@@ -6806,7 +6806,7 @@
             <a:r>
               <a:rPr lang="en-US" sz="1300" dirty="0">
                 <a:solidFill>
-                  <a:srgbClr val="F5F5F5"/>
+                  <a:srgbClr val="FFFFFF"/>
                 </a:solidFill>
               </a:rPr>
               <a:t>Public clouds secured and administered (AWS/Azure/GCP)</a:t>
@@ -6830,7 +6830,7 @@
             <a:avLst/>
           </a:prstGeom>
           <a:solidFill>
-            <a:srgbClr val="111111"/>
+            <a:srgbClr val="0A0E27"/>
           </a:solidFill>
           <a:ln/>
         </p:spPr>
@@ -6862,7 +6862,7 @@
             <a:r>
               <a:rPr lang="en-US" sz="1000" dirty="0">
                 <a:solidFill>
-                  <a:srgbClr val="E5E7EB"/>
+                  <a:srgbClr val="E6F1FF"/>
                 </a:solidFill>
               </a:rPr>
               <a:t>Tracey Scott  |  Cybersecurity • Cloud • SOC  |  traceysscott82@gmail.com</a:t>
@@ -6898,7 +6898,7 @@
             <a:r>
               <a:rPr lang="en-US" sz="1000" dirty="0">
                 <a:solidFill>
-                  <a:srgbClr val="E5E7EB"/>
+                  <a:srgbClr val="E6F1FF"/>
                 </a:solidFill>
               </a:rPr>
               <a:t>7</a:t>
@@ -6921,7 +6921,7 @@
     <p:bg>
       <p:bgPr>
         <a:solidFill>
-          <a:srgbClr val="F5F5F5"/>
+          <a:srgbClr val="FFFFFF"/>
         </a:solidFill>
       </p:bgPr>
     </p:bg>
@@ -6966,7 +6966,7 @@
             <a:r>
               <a:rPr lang="en-US" sz="4000" b="1" dirty="0">
                 <a:solidFill>
-                  <a:srgbClr val="111111"/>
+                  <a:srgbClr val="0A0E27"/>
                 </a:solidFill>
                 <a:latin typeface="Georgia" pitchFamily="34" charset="0"/>
                 <a:ea typeface="Georgia" pitchFamily="34" charset="-122"/>
@@ -6993,7 +6993,7 @@
             <a:avLst/>
           </a:prstGeom>
           <a:solidFill>
-            <a:srgbClr val="E5E7EB"/>
+            <a:srgbClr val="E6F1FF"/>
           </a:solidFill>
           <a:ln/>
         </p:spPr>
@@ -7025,7 +7025,7 @@
             <a:r>
               <a:rPr lang="en-US" sz="2000" b="1" dirty="0">
                 <a:solidFill>
-                  <a:srgbClr val="111111"/>
+                  <a:srgbClr val="0A0E27"/>
                 </a:solidFill>
               </a:rPr>
               <a:t>Professional Goals</a:t>
@@ -7065,7 +7065,7 @@
             <a:r>
               <a:rPr lang="en-US" sz="1500" dirty="0">
                 <a:solidFill>
-                  <a:srgbClr val="0A0A0A"/>
+                  <a:srgbClr val="050816"/>
                 </a:solidFill>
               </a:rPr>
               <a:t>Earned CISSP certification</a:t>
@@ -7083,7 +7083,7 @@
             <a:r>
               <a:rPr lang="en-US" sz="1500" dirty="0">
                 <a:solidFill>
-                  <a:srgbClr val="0A0A0A"/>
+                  <a:srgbClr val="050816"/>
                 </a:solidFill>
               </a:rPr>
               <a:t>Lead a cybersecurity operations team or SOC</a:t>
@@ -7101,7 +7101,7 @@
             <a:r>
               <a:rPr lang="en-US" sz="1500" dirty="0">
                 <a:solidFill>
-                  <a:srgbClr val="0A0A0A"/>
+                  <a:srgbClr val="050816"/>
                 </a:solidFill>
               </a:rPr>
               <a:t>Deepen cloud security automation &amp; IaC practice</a:t>
@@ -7119,7 +7119,7 @@
             <a:r>
               <a:rPr lang="en-US" sz="1500" dirty="0">
                 <a:solidFill>
-                  <a:srgbClr val="0A0A0A"/>
+                  <a:srgbClr val="050816"/>
                 </a:solidFill>
               </a:rPr>
               <a:t>Mentor women entering cybersecurity via RTC &amp; ISSA</a:t>
@@ -7134,7 +7134,7 @@
             <a:r>
               <a:rPr lang="en-US" sz="1500" dirty="0">
                 <a:solidFill>
-                  <a:srgbClr val="0A0A0A"/>
+                  <a:srgbClr val="050816"/>
                 </a:solidFill>
               </a:rPr>
               <a:t>Contribute to enterprise zero-trust architecture</a:t>
@@ -7158,7 +7158,7 @@
             <a:avLst/>
           </a:prstGeom>
           <a:solidFill>
-            <a:srgbClr val="111111"/>
+            <a:srgbClr val="0A0E27"/>
           </a:solidFill>
           <a:ln/>
         </p:spPr>
@@ -7178,7 +7178,7 @@
             <a:avLst/>
           </a:prstGeom>
           <a:solidFill>
-            <a:srgbClr val="D4AF37"/>
+            <a:srgbClr val="00F0FF"/>
           </a:solidFill>
           <a:ln/>
         </p:spPr>
@@ -7210,7 +7210,7 @@
             <a:r>
               <a:rPr lang="en-US" sz="2400" b="1" dirty="0">
                 <a:solidFill>
-                  <a:srgbClr val="F5F5F5"/>
+                  <a:srgbClr val="FFFFFF"/>
                 </a:solidFill>
                 <a:latin typeface="Georgia" pitchFamily="34" charset="0"/>
                 <a:ea typeface="Georgia" pitchFamily="34" charset="-122"/>
@@ -7252,7 +7252,7 @@
             <a:r>
               <a:rPr lang="en-US" sz="1800" b="1" dirty="0">
                 <a:solidFill>
-                  <a:srgbClr val="D4AF37"/>
+                  <a:srgbClr val="00F0FF"/>
                 </a:solidFill>
               </a:rPr>
               <a:t>Tracey Scott</a:t>
@@ -7269,7 +7269,7 @@
             <a:r>
               <a:rPr lang="en-US" sz="1400" i="1" dirty="0">
                 <a:solidFill>
-                  <a:srgbClr val="E5E7EB"/>
+                  <a:srgbClr val="E6F1FF"/>
                 </a:solidFill>
               </a:rPr>
               <a:t>IT Operations Manager &amp; Business Analyst</a:t>
@@ -7286,7 +7286,7 @@
             <a:r>
               <a:rPr lang="en-US" sz="1400" dirty="0">
                 <a:solidFill>
-                  <a:srgbClr val="F5F5F5"/>
+                  <a:srgbClr val="FFFFFF"/>
                 </a:solidFill>
               </a:rPr>
               <a:t>Greenville, SC</a:t>
@@ -7303,7 +7303,7 @@
             <a:r>
               <a:rPr lang="en-US" sz="1400" dirty="0">
                 <a:solidFill>
-                  <a:srgbClr val="F5F5F5"/>
+                  <a:srgbClr val="FFFFFF"/>
                 </a:solidFill>
               </a:rPr>
               <a:t>(864) 775-2929</a:t>
@@ -7320,7 +7320,7 @@
             <a:r>
               <a:rPr lang="en-US" sz="1400" dirty="0">
                 <a:solidFill>
-                  <a:srgbClr val="F5F5F5"/>
+                  <a:srgbClr val="FFFFFF"/>
                 </a:solidFill>
               </a:rPr>
               <a:t>traceysscott82@gmail.com</a:t>
@@ -7337,7 +7337,7 @@
             <a:r>
               <a:rPr lang="en-US" sz="1400" dirty="0">
                 <a:solidFill>
-                  <a:srgbClr val="F5F5F5"/>
+                  <a:srgbClr val="FFFFFF"/>
                 </a:solidFill>
               </a:rPr>
               <a:t>linkedin.com/in/traceysscott</a:t>
@@ -7351,7 +7351,7 @@
             <a:r>
               <a:rPr lang="en-US" sz="1400" b="1" dirty="0">
                 <a:solidFill>
-                  <a:srgbClr val="D4AF37"/>
+                  <a:srgbClr val="00F0FF"/>
                 </a:solidFill>
               </a:rPr>
               <a:t>traceytheanalyst.github.io</a:t>
@@ -7375,7 +7375,7 @@
             <a:avLst/>
           </a:prstGeom>
           <a:solidFill>
-            <a:srgbClr val="111111"/>
+            <a:srgbClr val="0A0E27"/>
           </a:solidFill>
           <a:ln/>
         </p:spPr>
@@ -7407,7 +7407,7 @@
             <a:r>
               <a:rPr lang="en-US" sz="1000" dirty="0">
                 <a:solidFill>
-                  <a:srgbClr val="E5E7EB"/>
+                  <a:srgbClr val="E6F1FF"/>
                 </a:solidFill>
               </a:rPr>
               <a:t>Tracey Scott  |  Cybersecurity • Cloud • SOC  |  traceysscott82@gmail.com</a:t>
@@ -7443,7 +7443,7 @@
             <a:r>
               <a:rPr lang="en-US" sz="1000" dirty="0">
                 <a:solidFill>
-                  <a:srgbClr val="E5E7EB"/>
+                  <a:srgbClr val="E6F1FF"/>
                 </a:solidFill>
               </a:rPr>
               <a:t>8</a:t>

--- a/Tracey-Scott-Portfolio.pptx
+++ b/Tracey-Scott-Portfolio.pptx
@@ -7354,7 +7354,7 @@
                   <a:srgbClr val="00F0FF"/>
                 </a:solidFill>
               </a:rPr>
-              <a:t>traceytheanalyst.github.io</a:t>
+              <a:t>cybertrace777.github.io</a:t>
             </a:r>
             <a:endParaRPr lang="en-US" sz="1400" dirty="0"/>
           </a:p>

--- a/Tracey-Scott-Portfolio.pptx
+++ b/Tracey-Scott-Portfolio.pptx
@@ -7057,7 +7057,7 @@
           <a:p>
             <a:pPr marL="342900" indent="-342900">
               <a:spcAft>
-                <a:spcPts val="800"/>
+                <a:spcPts val="1400"/>
               </a:spcAft>
               <a:buSzPct val="100000"/>
               <a:buChar char="•"/>
@@ -7074,9 +7074,6 @@
           </a:p>
           <a:p>
             <a:pPr marL="342900" indent="-342900">
-              <a:spcAft>
-                <a:spcPts val="800"/>
-              </a:spcAft>
               <a:buSzPct val="100000"/>
               <a:buChar char="•"/>
             </a:pPr>
@@ -7086,58 +7083,7 @@
                   <a:srgbClr val="050816"/>
                 </a:solidFill>
               </a:rPr>
-              <a:t>Lead a cybersecurity operations team or SOC</a:t>
-            </a:r>
-            <a:endParaRPr lang="en-US" sz="1500" dirty="0"/>
-          </a:p>
-          <a:p>
-            <a:pPr marL="342900" indent="-342900">
-              <a:spcAft>
-                <a:spcPts val="800"/>
-              </a:spcAft>
-              <a:buSzPct val="100000"/>
-              <a:buChar char="•"/>
-            </a:pPr>
-            <a:r>
-              <a:rPr lang="en-US" sz="1500" dirty="0">
-                <a:solidFill>
-                  <a:srgbClr val="050816"/>
-                </a:solidFill>
-              </a:rPr>
-              <a:t>Deepen cloud security automation &amp; IaC practice</a:t>
-            </a:r>
-            <a:endParaRPr lang="en-US" sz="1500" dirty="0"/>
-          </a:p>
-          <a:p>
-            <a:pPr marL="342900" indent="-342900">
-              <a:spcAft>
-                <a:spcPts val="800"/>
-              </a:spcAft>
-              <a:buSzPct val="100000"/>
-              <a:buChar char="•"/>
-            </a:pPr>
-            <a:r>
-              <a:rPr lang="en-US" sz="1500" dirty="0">
-                <a:solidFill>
-                  <a:srgbClr val="050816"/>
-                </a:solidFill>
-              </a:rPr>
               <a:t>Mentor Women entering cybersecurity via RTC &amp; ISSA</a:t>
-            </a:r>
-            <a:endParaRPr lang="en-US" sz="1500" dirty="0"/>
-          </a:p>
-          <a:p>
-            <a:pPr marL="342900" indent="-342900">
-              <a:buSzPct val="100000"/>
-              <a:buChar char="•"/>
-            </a:pPr>
-            <a:r>
-              <a:rPr lang="en-US" sz="1500" dirty="0">
-                <a:solidFill>
-                  <a:srgbClr val="050816"/>
-                </a:solidFill>
-              </a:rPr>
-              <a:t>Contribute to enterprise zero-trust architecture</a:t>
             </a:r>
             <a:endParaRPr lang="en-US" sz="1500" dirty="0"/>
           </a:p>

--- a/Tracey-Scott-Portfolio.pptx
+++ b/Tracey-Scott-Portfolio.pptx
@@ -37178,16 +37178,17 @@
         </p:nvPicPr>
         <p:blipFill>
           <a:blip r:embed="rId4">
-            <a:alphaModFix amt="50000"/>
+            <a:alphaModFix amt="97000"/>
           </a:blip>
+          <a:srcRect l="5670" r="6097"/>
           <a:stretch>
             <a:fillRect/>
           </a:stretch>
         </p:blipFill>
         <p:spPr>
           <a:xfrm>
-            <a:off x="0" y="0"/>
-            <a:ext cx="9144000" cy="5143500"/>
+            <a:off x="2651760" y="0"/>
+            <a:ext cx="6583680" cy="5096950"/>
           </a:xfrm>
           <a:prstGeom prst="rect">
             <a:avLst/>

--- a/Tracey-Scott-Portfolio.pptx
+++ b/Tracey-Scott-Portfolio.pptx
@@ -11290,246 +11290,6 @@
   <p:transition spd="med" advClick="1">
     <p:fade/>
   </p:transition>
-  <p:timing>
-    <p:tnLst>
-      <p:par>
-        <p:cTn id="1" dur="indefinite" restart="never" nodeType="tmRoot">
-          <p:childTnLst>
-            <p:seq concurrent="1" nextAc="seek">
-              <p:cTn id="2" dur="indefinite" nodeType="mainSeq">
-                <p:childTnLst>
-                  <p:par>
-                    <p:cTn id="3" presetID="10" presetClass="entr" presetSubtype="0" fill="hold" nodeType="afterPrev">
-                      <p:stCondLst>
-                        <p:cond delay="0"/>
-                      </p:stCondLst>
-                      <p:childTnLst>
-                        <p:set>
-                          <p:cBhvr>
-                            <p:cTn id="4" dur="1" fill="hold">
-                              <p:stCondLst>
-                                <p:cond delay="0"/>
-                              </p:stCondLst>
-                            </p:cTn>
-                            <p:tgtEl>
-                              <p:spTgt spid="72"/>
-                            </p:tgtEl>
-                            <p:attrNameLst>
-                              <p:attrName>style.visibility</p:attrName>
-                            </p:attrNameLst>
-                          </p:cBhvr>
-                          <p:to>
-                            <p:strVal val="visible"/>
-                          </p:to>
-                        </p:set>
-                        <p:animEffect transition="in" filter="fade">
-                          <p:cBhvr>
-                            <p:cTn id="100" dur="500"/>
-                            <p:tgtEl>
-                              <p:spTgt spid="72"/>
-                            </p:tgtEl>
-                          </p:cBhvr>
-                        </p:animEffect>
-                      </p:childTnLst>
-                    </p:cTn>
-                  </p:par>
-                  <p:par>
-                    <p:cTn id="5" presetID="10" presetClass="entr" presetSubtype="0" fill="hold" nodeType="afterPrev">
-                      <p:stCondLst>
-                        <p:cond delay="300"/>
-                      </p:stCondLst>
-                      <p:childTnLst>
-                        <p:set>
-                          <p:cBhvr>
-                            <p:cTn id="6" dur="1" fill="hold">
-                              <p:stCondLst>
-                                <p:cond delay="0"/>
-                              </p:stCondLst>
-                            </p:cTn>
-                            <p:tgtEl>
-                              <p:spTgt spid="61"/>
-                            </p:tgtEl>
-                            <p:attrNameLst>
-                              <p:attrName>style.visibility</p:attrName>
-                            </p:attrNameLst>
-                          </p:cBhvr>
-                          <p:to>
-                            <p:strVal val="visible"/>
-                          </p:to>
-                        </p:set>
-                        <p:animEffect transition="in" filter="fade">
-                          <p:cBhvr>
-                            <p:cTn id="101" dur="500"/>
-                            <p:tgtEl>
-                              <p:spTgt spid="61"/>
-                            </p:tgtEl>
-                          </p:cBhvr>
-                        </p:animEffect>
-                      </p:childTnLst>
-                    </p:cTn>
-                  </p:par>
-                  <p:par>
-                    <p:cTn id="7" presetID="10" presetClass="entr" presetSubtype="0" fill="hold" nodeType="afterPrev">
-                      <p:stCondLst>
-                        <p:cond delay="600"/>
-                      </p:stCondLst>
-                      <p:childTnLst>
-                        <p:set>
-                          <p:cBhvr>
-                            <p:cTn id="8" dur="1" fill="hold">
-                              <p:stCondLst>
-                                <p:cond delay="0"/>
-                              </p:stCondLst>
-                            </p:cTn>
-                            <p:tgtEl>
-                              <p:spTgt spid="62"/>
-                            </p:tgtEl>
-                            <p:attrNameLst>
-                              <p:attrName>style.visibility</p:attrName>
-                            </p:attrNameLst>
-                          </p:cBhvr>
-                          <p:to>
-                            <p:strVal val="visible"/>
-                          </p:to>
-                        </p:set>
-                        <p:animEffect transition="in" filter="fade">
-                          <p:cBhvr>
-                            <p:cTn id="102" dur="500"/>
-                            <p:tgtEl>
-                              <p:spTgt spid="62"/>
-                            </p:tgtEl>
-                          </p:cBhvr>
-                        </p:animEffect>
-                      </p:childTnLst>
-                    </p:cTn>
-                  </p:par>
-                  <p:par>
-                    <p:cTn id="9" presetID="10" presetClass="entr" presetSubtype="0" fill="hold" nodeType="afterPrev">
-                      <p:stCondLst>
-                        <p:cond delay="900"/>
-                      </p:stCondLst>
-                      <p:childTnLst>
-                        <p:set>
-                          <p:cBhvr>
-                            <p:cTn id="10" dur="1" fill="hold">
-                              <p:stCondLst>
-                                <p:cond delay="0"/>
-                              </p:stCondLst>
-                            </p:cTn>
-                            <p:tgtEl>
-                              <p:spTgt spid="63"/>
-                            </p:tgtEl>
-                            <p:attrNameLst>
-                              <p:attrName>style.visibility</p:attrName>
-                            </p:attrNameLst>
-                          </p:cBhvr>
-                          <p:to>
-                            <p:strVal val="visible"/>
-                          </p:to>
-                        </p:set>
-                        <p:animEffect transition="in" filter="fade">
-                          <p:cBhvr>
-                            <p:cTn id="103" dur="500"/>
-                            <p:tgtEl>
-                              <p:spTgt spid="63"/>
-                            </p:tgtEl>
-                          </p:cBhvr>
-                        </p:animEffect>
-                      </p:childTnLst>
-                    </p:cTn>
-                  </p:par>
-                  <p:par>
-                    <p:cTn id="11" presetID="10" presetClass="entr" presetSubtype="0" fill="hold" nodeType="afterPrev">
-                      <p:stCondLst>
-                        <p:cond delay="1200"/>
-                      </p:stCondLst>
-                      <p:childTnLst>
-                        <p:set>
-                          <p:cBhvr>
-                            <p:cTn id="12" dur="1" fill="hold">
-                              <p:stCondLst>
-                                <p:cond delay="0"/>
-                              </p:stCondLst>
-                            </p:cTn>
-                            <p:tgtEl>
-                              <p:spTgt spid="64"/>
-                            </p:tgtEl>
-                            <p:attrNameLst>
-                              <p:attrName>style.visibility</p:attrName>
-                            </p:attrNameLst>
-                          </p:cBhvr>
-                          <p:to>
-                            <p:strVal val="visible"/>
-                          </p:to>
-                        </p:set>
-                        <p:animEffect transition="in" filter="fade">
-                          <p:cBhvr>
-                            <p:cTn id="104" dur="500"/>
-                            <p:tgtEl>
-                              <p:spTgt spid="64"/>
-                            </p:tgtEl>
-                          </p:cBhvr>
-                        </p:animEffect>
-                      </p:childTnLst>
-                    </p:cTn>
-                  </p:par>
-                  <p:par>
-                    <p:cTn id="13" presetID="10" presetClass="entr" presetSubtype="0" fill="hold" nodeType="afterPrev">
-                      <p:stCondLst>
-                        <p:cond delay="1500"/>
-                      </p:stCondLst>
-                      <p:childTnLst>
-                        <p:set>
-                          <p:cBhvr>
-                            <p:cTn id="14" dur="1" fill="hold">
-                              <p:stCondLst>
-                                <p:cond delay="0"/>
-                              </p:stCondLst>
-                            </p:cTn>
-                            <p:tgtEl>
-                              <p:spTgt spid="65"/>
-                            </p:tgtEl>
-                            <p:attrNameLst>
-                              <p:attrName>style.visibility</p:attrName>
-                            </p:attrNameLst>
-                          </p:cBhvr>
-                          <p:to>
-                            <p:strVal val="visible"/>
-                          </p:to>
-                        </p:set>
-                        <p:animEffect transition="in" filter="fade">
-                          <p:cBhvr>
-                            <p:cTn id="105" dur="500"/>
-                            <p:tgtEl>
-                              <p:spTgt spid="65"/>
-                            </p:tgtEl>
-                          </p:cBhvr>
-                        </p:animEffect>
-                      </p:childTnLst>
-                    </p:cTn>
-                  </p:par>
-                </p:childTnLst>
-              </p:cTn>
-              <p:prevCondLst>
-                <p:cond evt="onPrev" delay="0">
-                  <p:tgtEl>
-                    <p:sldTgt/>
-                  </p:tgtEl>
-                </p:cond>
-              </p:prevCondLst>
-              <p:nextCondLst>
-                <p:cond evt="onNext" delay="0">
-                  <p:tgtEl>
-                    <p:sldTgt/>
-                  </p:tgtEl>
-                </p:cond>
-              </p:nextCondLst>
-            </p:seq>
-          </p:childTnLst>
-        </p:cTn>
-      </p:par>
-    </p:tnLst>
-  </p:timing>
 </p:sld>
 </file>
 
@@ -11711,176 +11471,6 @@
   <p:transition spd="med" advClick="1">
     <p:fade/>
   </p:transition>
-  <p:timing>
-    <p:tnLst>
-      <p:par>
-        <p:cTn id="1" dur="indefinite" restart="never" nodeType="tmRoot">
-          <p:childTnLst>
-            <p:seq concurrent="1" nextAc="seek">
-              <p:cTn id="2" dur="indefinite" nodeType="mainSeq">
-                <p:childTnLst>
-                  <p:par>
-                    <p:cTn id="3" presetID="10" presetClass="entr" presetSubtype="0" fill="hold" nodeType="afterPrev">
-                      <p:stCondLst>
-                        <p:cond delay="0"/>
-                      </p:stCondLst>
-                      <p:childTnLst>
-                        <p:set>
-                          <p:cBhvr>
-                            <p:cTn id="4" dur="1" fill="hold">
-                              <p:stCondLst>
-                                <p:cond delay="0"/>
-                              </p:stCondLst>
-                            </p:cTn>
-                            <p:tgtEl>
-                              <p:spTgt spid="273"/>
-                            </p:tgtEl>
-                            <p:attrNameLst>
-                              <p:attrName>style.visibility</p:attrName>
-                            </p:attrNameLst>
-                          </p:cBhvr>
-                          <p:to>
-                            <p:strVal val="visible"/>
-                          </p:to>
-                        </p:set>
-                        <p:animEffect transition="in" filter="fade">
-                          <p:cBhvr>
-                            <p:cTn id="100" dur="500"/>
-                            <p:tgtEl>
-                              <p:spTgt spid="273"/>
-                            </p:tgtEl>
-                          </p:cBhvr>
-                        </p:animEffect>
-                      </p:childTnLst>
-                    </p:cTn>
-                  </p:par>
-                  <p:par>
-                    <p:cTn id="5" presetID="10" presetClass="entr" presetSubtype="0" fill="hold" nodeType="afterPrev">
-                      <p:stCondLst>
-                        <p:cond delay="300"/>
-                      </p:stCondLst>
-                      <p:childTnLst>
-                        <p:set>
-                          <p:cBhvr>
-                            <p:cTn id="6" dur="1" fill="hold">
-                              <p:stCondLst>
-                                <p:cond delay="0"/>
-                              </p:stCondLst>
-                            </p:cTn>
-                            <p:tgtEl>
-                              <p:spTgt spid="274"/>
-                            </p:tgtEl>
-                            <p:attrNameLst>
-                              <p:attrName>style.visibility</p:attrName>
-                            </p:attrNameLst>
-                          </p:cBhvr>
-                          <p:to>
-                            <p:strVal val="visible"/>
-                          </p:to>
-                        </p:set>
-                        <p:animEffect transition="in" filter="fade">
-                          <p:cBhvr>
-                            <p:cTn id="101" dur="500"/>
-                            <p:tgtEl>
-                              <p:spTgt spid="274"/>
-                            </p:tgtEl>
-                          </p:cBhvr>
-                        </p:animEffect>
-                      </p:childTnLst>
-                    </p:cTn>
-                  </p:par>
-                  <p:par>
-                    <p:cTn id="7" presetID="10" presetClass="entr" presetSubtype="0" fill="hold" nodeType="afterPrev">
-                      <p:stCondLst>
-                        <p:cond delay="600"/>
-                      </p:stCondLst>
-                      <p:childTnLst>
-                        <p:set>
-                          <p:cBhvr>
-                            <p:cTn id="8" dur="1" fill="hold">
-                              <p:stCondLst>
-                                <p:cond delay="0"/>
-                              </p:stCondLst>
-                            </p:cTn>
-                            <p:tgtEl>
-                              <p:spTgt spid="275"/>
-                            </p:tgtEl>
-                            <p:attrNameLst>
-                              <p:attrName>style.visibility</p:attrName>
-                            </p:attrNameLst>
-                          </p:cBhvr>
-                          <p:to>
-                            <p:strVal val="visible"/>
-                          </p:to>
-                        </p:set>
-                        <p:animEffect transition="in" filter="fade">
-                          <p:cBhvr>
-                            <p:cTn id="102" dur="500"/>
-                            <p:tgtEl>
-                              <p:spTgt spid="275"/>
-                            </p:tgtEl>
-                          </p:cBhvr>
-                        </p:animEffect>
-                      </p:childTnLst>
-                    </p:cTn>
-                  </p:par>
-                  <p:par>
-                    <p:cTn id="9" presetID="10" presetClass="entr" presetSubtype="0" fill="hold" nodeType="afterPrev">
-                      <p:stCondLst>
-                        <p:cond delay="900"/>
-                      </p:stCondLst>
-                      <p:childTnLst>
-                        <p:set>
-                          <p:cBhvr>
-                            <p:cTn id="10" dur="1" fill="hold">
-                              <p:stCondLst>
-                                <p:cond delay="0"/>
-                              </p:stCondLst>
-                            </p:cTn>
-                            <p:tgtEl>
-                              <p:spTgt spid="276"/>
-                            </p:tgtEl>
-                            <p:attrNameLst>
-                              <p:attrName>style.visibility</p:attrName>
-                            </p:attrNameLst>
-                          </p:cBhvr>
-                          <p:to>
-                            <p:strVal val="visible"/>
-                          </p:to>
-                        </p:set>
-                        <p:animEffect transition="in" filter="fade">
-                          <p:cBhvr>
-                            <p:cTn id="103" dur="500"/>
-                            <p:tgtEl>
-                              <p:spTgt spid="276"/>
-                            </p:tgtEl>
-                          </p:cBhvr>
-                        </p:animEffect>
-                      </p:childTnLst>
-                    </p:cTn>
-                  </p:par>
-                </p:childTnLst>
-              </p:cTn>
-              <p:prevCondLst>
-                <p:cond evt="onPrev" delay="0">
-                  <p:tgtEl>
-                    <p:sldTgt/>
-                  </p:tgtEl>
-                </p:cond>
-              </p:prevCondLst>
-              <p:nextCondLst>
-                <p:cond evt="onNext" delay="0">
-                  <p:tgtEl>
-                    <p:sldTgt/>
-                  </p:tgtEl>
-                </p:cond>
-              </p:nextCondLst>
-            </p:seq>
-          </p:childTnLst>
-        </p:cTn>
-      </p:par>
-    </p:tnLst>
-  </p:timing>
 </p:sld>
 </file>
 
@@ -12030,106 +11620,6 @@
   <p:transition spd="med" advClick="1">
     <p:fade/>
   </p:transition>
-  <p:timing>
-    <p:tnLst>
-      <p:par>
-        <p:cTn id="1" dur="indefinite" restart="never" nodeType="tmRoot">
-          <p:childTnLst>
-            <p:seq concurrent="1" nextAc="seek">
-              <p:cTn id="2" dur="indefinite" nodeType="mainSeq">
-                <p:childTnLst>
-                  <p:par>
-                    <p:cTn id="3" presetID="10" presetClass="entr" presetSubtype="0" fill="hold" nodeType="afterPrev">
-                      <p:stCondLst>
-                        <p:cond delay="0"/>
-                      </p:stCondLst>
-                      <p:childTnLst>
-                        <p:set>
-                          <p:cBhvr>
-                            <p:cTn id="4" dur="1" fill="hold">
-                              <p:stCondLst>
-                                <p:cond delay="0"/>
-                              </p:stCondLst>
-                            </p:cTn>
-                            <p:tgtEl>
-                              <p:spTgt spid="281"/>
-                            </p:tgtEl>
-                            <p:attrNameLst>
-                              <p:attrName>style.visibility</p:attrName>
-                            </p:attrNameLst>
-                          </p:cBhvr>
-                          <p:to>
-                            <p:strVal val="visible"/>
-                          </p:to>
-                        </p:set>
-                        <p:animEffect transition="in" filter="fade">
-                          <p:cBhvr>
-                            <p:cTn id="100" dur="500"/>
-                            <p:tgtEl>
-                              <p:spTgt spid="281"/>
-                            </p:tgtEl>
-                          </p:cBhvr>
-                        </p:animEffect>
-                      </p:childTnLst>
-                    </p:cTn>
-                  </p:par>
-                  <p:par>
-                    <p:cTn id="5" presetID="10" presetClass="entr" presetSubtype="0" fill="hold" nodeType="afterPrev">
-                      <p:stCondLst>
-                        <p:cond delay="300"/>
-                      </p:stCondLst>
-                      <p:childTnLst>
-                        <p:set>
-                          <p:cBhvr>
-                            <p:cTn id="6" dur="1" fill="hold">
-                              <p:stCondLst>
-                                <p:cond delay="0"/>
-                              </p:stCondLst>
-                            </p:cTn>
-                            <p:tgtEl>
-                              <p:spTgt spid="282"/>
-                            </p:tgtEl>
-                            <p:attrNameLst>
-                              <p:attrName>style.visibility</p:attrName>
-                            </p:attrNameLst>
-                          </p:cBhvr>
-                          <p:to>
-                            <p:strVal val="visible"/>
-                          </p:to>
-                        </p:set>
-                        <p:animEffect transition="in" filter="fade">
-                          <p:cBhvr>
-                            <p:cTn id="101" dur="500"/>
-                            <p:tgtEl>
-                              <p:spTgt spid="282"/>
-                            </p:tgtEl>
-                          </p:cBhvr>
-                        </p:animEffect>
-                      </p:childTnLst>
-                    </p:cTn>
-                  </p:par>
-                </p:childTnLst>
-              </p:cTn>
-              <p:prevCondLst>
-                <p:cond evt="onPrev" delay="0">
-                  <p:tgtEl>
-                    <p:sldTgt/>
-                  </p:tgtEl>
-                </p:cond>
-              </p:prevCondLst>
-              <p:nextCondLst>
-                <p:cond evt="onNext" delay="0">
-                  <p:tgtEl>
-                    <p:sldTgt/>
-                  </p:tgtEl>
-                </p:cond>
-              </p:nextCondLst>
-            </p:seq>
-          </p:childTnLst>
-        </p:cTn>
-      </p:par>
-    </p:tnLst>
-  </p:timing>
 </p:sld>
 </file>
 
@@ -13042,246 +12532,6 @@
   <p:transition spd="med" advClick="1">
     <p:fade/>
   </p:transition>
-  <p:timing>
-    <p:tnLst>
-      <p:par>
-        <p:cTn id="1" dur="indefinite" restart="never" nodeType="tmRoot">
-          <p:childTnLst>
-            <p:seq concurrent="1" nextAc="seek">
-              <p:cTn id="2" dur="indefinite" nodeType="mainSeq">
-                <p:childTnLst>
-                  <p:par>
-                    <p:cTn id="3" presetID="10" presetClass="entr" presetSubtype="0" fill="hold" nodeType="afterPrev">
-                      <p:stCondLst>
-                        <p:cond delay="0"/>
-                      </p:stCondLst>
-                      <p:childTnLst>
-                        <p:set>
-                          <p:cBhvr>
-                            <p:cTn id="4" dur="1" fill="hold">
-                              <p:stCondLst>
-                                <p:cond delay="0"/>
-                              </p:stCondLst>
-                            </p:cTn>
-                            <p:tgtEl>
-                              <p:spTgt spid="287"/>
-                            </p:tgtEl>
-                            <p:attrNameLst>
-                              <p:attrName>style.visibility</p:attrName>
-                            </p:attrNameLst>
-                          </p:cBhvr>
-                          <p:to>
-                            <p:strVal val="visible"/>
-                          </p:to>
-                        </p:set>
-                        <p:animEffect transition="in" filter="fade">
-                          <p:cBhvr>
-                            <p:cTn id="100" dur="500"/>
-                            <p:tgtEl>
-                              <p:spTgt spid="287"/>
-                            </p:tgtEl>
-                          </p:cBhvr>
-                        </p:animEffect>
-                      </p:childTnLst>
-                    </p:cTn>
-                  </p:par>
-                  <p:par>
-                    <p:cTn id="5" presetID="10" presetClass="entr" presetSubtype="0" fill="hold" nodeType="afterPrev">
-                      <p:stCondLst>
-                        <p:cond delay="300"/>
-                      </p:stCondLst>
-                      <p:childTnLst>
-                        <p:set>
-                          <p:cBhvr>
-                            <p:cTn id="6" dur="1" fill="hold">
-                              <p:stCondLst>
-                                <p:cond delay="0"/>
-                              </p:stCondLst>
-                            </p:cTn>
-                            <p:tgtEl>
-                              <p:spTgt spid="288"/>
-                            </p:tgtEl>
-                            <p:attrNameLst>
-                              <p:attrName>style.visibility</p:attrName>
-                            </p:attrNameLst>
-                          </p:cBhvr>
-                          <p:to>
-                            <p:strVal val="visible"/>
-                          </p:to>
-                        </p:set>
-                        <p:animEffect transition="in" filter="fade">
-                          <p:cBhvr>
-                            <p:cTn id="101" dur="500"/>
-                            <p:tgtEl>
-                              <p:spTgt spid="288"/>
-                            </p:tgtEl>
-                          </p:cBhvr>
-                        </p:animEffect>
-                      </p:childTnLst>
-                    </p:cTn>
-                  </p:par>
-                  <p:par>
-                    <p:cTn id="7" presetID="10" presetClass="entr" presetSubtype="0" fill="hold" nodeType="afterPrev">
-                      <p:stCondLst>
-                        <p:cond delay="600"/>
-                      </p:stCondLst>
-                      <p:childTnLst>
-                        <p:set>
-                          <p:cBhvr>
-                            <p:cTn id="8" dur="1" fill="hold">
-                              <p:stCondLst>
-                                <p:cond delay="0"/>
-                              </p:stCondLst>
-                            </p:cTn>
-                            <p:tgtEl>
-                              <p:spTgt spid="289"/>
-                            </p:tgtEl>
-                            <p:attrNameLst>
-                              <p:attrName>style.visibility</p:attrName>
-                            </p:attrNameLst>
-                          </p:cBhvr>
-                          <p:to>
-                            <p:strVal val="visible"/>
-                          </p:to>
-                        </p:set>
-                        <p:animEffect transition="in" filter="fade">
-                          <p:cBhvr>
-                            <p:cTn id="102" dur="500"/>
-                            <p:tgtEl>
-                              <p:spTgt spid="289"/>
-                            </p:tgtEl>
-                          </p:cBhvr>
-                        </p:animEffect>
-                      </p:childTnLst>
-                    </p:cTn>
-                  </p:par>
-                  <p:par>
-                    <p:cTn id="9" presetID="10" presetClass="entr" presetSubtype="0" fill="hold" nodeType="afterPrev">
-                      <p:stCondLst>
-                        <p:cond delay="900"/>
-                      </p:stCondLst>
-                      <p:childTnLst>
-                        <p:set>
-                          <p:cBhvr>
-                            <p:cTn id="10" dur="1" fill="hold">
-                              <p:stCondLst>
-                                <p:cond delay="0"/>
-                              </p:stCondLst>
-                            </p:cTn>
-                            <p:tgtEl>
-                              <p:spTgt spid="290"/>
-                            </p:tgtEl>
-                            <p:attrNameLst>
-                              <p:attrName>style.visibility</p:attrName>
-                            </p:attrNameLst>
-                          </p:cBhvr>
-                          <p:to>
-                            <p:strVal val="visible"/>
-                          </p:to>
-                        </p:set>
-                        <p:animEffect transition="in" filter="fade">
-                          <p:cBhvr>
-                            <p:cTn id="103" dur="500"/>
-                            <p:tgtEl>
-                              <p:spTgt spid="290"/>
-                            </p:tgtEl>
-                          </p:cBhvr>
-                        </p:animEffect>
-                      </p:childTnLst>
-                    </p:cTn>
-                  </p:par>
-                  <p:par>
-                    <p:cTn id="11" presetID="10" presetClass="entr" presetSubtype="0" fill="hold" nodeType="afterPrev">
-                      <p:stCondLst>
-                        <p:cond delay="1200"/>
-                      </p:stCondLst>
-                      <p:childTnLst>
-                        <p:set>
-                          <p:cBhvr>
-                            <p:cTn id="12" dur="1" fill="hold">
-                              <p:stCondLst>
-                                <p:cond delay="0"/>
-                              </p:stCondLst>
-                            </p:cTn>
-                            <p:tgtEl>
-                              <p:spTgt spid="291"/>
-                            </p:tgtEl>
-                            <p:attrNameLst>
-                              <p:attrName>style.visibility</p:attrName>
-                            </p:attrNameLst>
-                          </p:cBhvr>
-                          <p:to>
-                            <p:strVal val="visible"/>
-                          </p:to>
-                        </p:set>
-                        <p:animEffect transition="in" filter="fade">
-                          <p:cBhvr>
-                            <p:cTn id="104" dur="500"/>
-                            <p:tgtEl>
-                              <p:spTgt spid="291"/>
-                            </p:tgtEl>
-                          </p:cBhvr>
-                        </p:animEffect>
-                      </p:childTnLst>
-                    </p:cTn>
-                  </p:par>
-                  <p:par>
-                    <p:cTn id="13" presetID="10" presetClass="entr" presetSubtype="0" fill="hold" nodeType="afterPrev">
-                      <p:stCondLst>
-                        <p:cond delay="1500"/>
-                      </p:stCondLst>
-                      <p:childTnLst>
-                        <p:set>
-                          <p:cBhvr>
-                            <p:cTn id="14" dur="1" fill="hold">
-                              <p:stCondLst>
-                                <p:cond delay="0"/>
-                              </p:stCondLst>
-                            </p:cTn>
-                            <p:tgtEl>
-                              <p:spTgt spid="292"/>
-                            </p:tgtEl>
-                            <p:attrNameLst>
-                              <p:attrName>style.visibility</p:attrName>
-                            </p:attrNameLst>
-                          </p:cBhvr>
-                          <p:to>
-                            <p:strVal val="visible"/>
-                          </p:to>
-                        </p:set>
-                        <p:animEffect transition="in" filter="fade">
-                          <p:cBhvr>
-                            <p:cTn id="105" dur="500"/>
-                            <p:tgtEl>
-                              <p:spTgt spid="292"/>
-                            </p:tgtEl>
-                          </p:cBhvr>
-                        </p:animEffect>
-                      </p:childTnLst>
-                    </p:cTn>
-                  </p:par>
-                </p:childTnLst>
-              </p:cTn>
-              <p:prevCondLst>
-                <p:cond evt="onPrev" delay="0">
-                  <p:tgtEl>
-                    <p:sldTgt/>
-                  </p:tgtEl>
-                </p:cond>
-              </p:prevCondLst>
-              <p:nextCondLst>
-                <p:cond evt="onNext" delay="0">
-                  <p:tgtEl>
-                    <p:sldTgt/>
-                  </p:tgtEl>
-                </p:cond>
-              </p:nextCondLst>
-            </p:seq>
-          </p:childTnLst>
-        </p:cTn>
-      </p:par>
-    </p:tnLst>
-  </p:timing>
 </p:sld>
 </file>
 
@@ -14717,141 +13967,6 @@
   <p:transition spd="med" advClick="1">
     <p:fade/>
   </p:transition>
-  <p:timing>
-    <p:tnLst>
-      <p:par>
-        <p:cTn id="1" dur="indefinite" restart="never" nodeType="tmRoot">
-          <p:childTnLst>
-            <p:seq concurrent="1" nextAc="seek">
-              <p:cTn id="2" dur="indefinite" nodeType="mainSeq">
-                <p:childTnLst>
-                  <p:par>
-                    <p:cTn id="3" presetID="10" presetClass="entr" presetSubtype="0" fill="hold" nodeType="afterPrev">
-                      <p:stCondLst>
-                        <p:cond delay="0"/>
-                      </p:stCondLst>
-                      <p:childTnLst>
-                        <p:set>
-                          <p:cBhvr>
-                            <p:cTn id="4" dur="1" fill="hold">
-                              <p:stCondLst>
-                                <p:cond delay="0"/>
-                              </p:stCondLst>
-                            </p:cTn>
-                            <p:tgtEl>
-                              <p:spTgt spid="308"/>
-                            </p:tgtEl>
-                            <p:attrNameLst>
-                              <p:attrName>style.visibility</p:attrName>
-                            </p:attrNameLst>
-                          </p:cBhvr>
-                          <p:to>
-                            <p:strVal val="visible"/>
-                          </p:to>
-                        </p:set>
-                        <p:animEffect transition="in" filter="fade">
-                          <p:cBhvr>
-                            <p:cTn id="100" dur="500"/>
-                            <p:tgtEl>
-                              <p:spTgt spid="308"/>
-                            </p:tgtEl>
-                          </p:cBhvr>
-                        </p:animEffect>
-                      </p:childTnLst>
-                    </p:cTn>
-                  </p:par>
-                  <p:par>
-                    <p:cTn id="5" presetID="10" presetClass="entr" presetSubtype="0" fill="hold" nodeType="afterPrev">
-                      <p:stCondLst>
-                        <p:cond delay="300"/>
-                      </p:stCondLst>
-                      <p:childTnLst>
-                        <p:set>
-                          <p:cBhvr>
-                            <p:cTn id="6" dur="1" fill="hold">
-                              <p:stCondLst>
-                                <p:cond delay="0"/>
-                              </p:stCondLst>
-                            </p:cTn>
-                            <p:tgtEl>
-                              <p:spTgt spid="309"/>
-                            </p:tgtEl>
-                            <p:attrNameLst>
-                              <p:attrName>style.visibility</p:attrName>
-                            </p:attrNameLst>
-                          </p:cBhvr>
-                          <p:to>
-                            <p:strVal val="visible"/>
-                          </p:to>
-                        </p:set>
-                        <p:animEffect transition="in" filter="fade">
-                          <p:cBhvr>
-                            <p:cTn id="101" dur="500"/>
-                            <p:tgtEl>
-                              <p:spTgt spid="309"/>
-                            </p:tgtEl>
-                          </p:cBhvr>
-                        </p:animEffect>
-                      </p:childTnLst>
-                    </p:cTn>
-                  </p:par>
-                  <p:par>
-                    <p:cTn id="7" presetID="10" presetClass="entr" presetSubtype="0" fill="hold" nodeType="afterPrev">
-                      <p:stCondLst>
-                        <p:cond delay="600"/>
-                      </p:stCondLst>
-                      <p:childTnLst>
-                        <p:set>
-                          <p:cBhvr>
-                            <p:cTn id="8" dur="1" fill="hold">
-                              <p:stCondLst>
-                                <p:cond delay="0"/>
-                              </p:stCondLst>
-                            </p:cTn>
-                            <p:tgtEl>
-                              <p:spTgt spid="310"/>
-                            </p:tgtEl>
-                            <p:attrNameLst>
-                              <p:attrName>style.visibility</p:attrName>
-                            </p:attrNameLst>
-                          </p:cBhvr>
-                          <p:to>
-                            <p:strVal val="visible"/>
-                          </p:to>
-                        </p:set>
-                        <p:animEffect transition="in" filter="fade">
-                          <p:cBhvr>
-                            <p:cTn id="102" dur="500"/>
-                            <p:tgtEl>
-                              <p:spTgt spid="310"/>
-                            </p:tgtEl>
-                          </p:cBhvr>
-                        </p:animEffect>
-                      </p:childTnLst>
-                    </p:cTn>
-                  </p:par>
-                </p:childTnLst>
-              </p:cTn>
-              <p:prevCondLst>
-                <p:cond evt="onPrev" delay="0">
-                  <p:tgtEl>
-                    <p:sldTgt/>
-                  </p:tgtEl>
-                </p:cond>
-              </p:prevCondLst>
-              <p:nextCondLst>
-                <p:cond evt="onNext" delay="0">
-                  <p:tgtEl>
-                    <p:sldTgt/>
-                  </p:tgtEl>
-                </p:cond>
-              </p:nextCondLst>
-            </p:seq>
-          </p:childTnLst>
-        </p:cTn>
-      </p:par>
-    </p:tnLst>
-  </p:timing>
 </p:sld>
 </file>
 
@@ -30893,246 +30008,6 @@
   <p:transition spd="med" advClick="1">
     <p:fade/>
   </p:transition>
-  <p:timing>
-    <p:tnLst>
-      <p:par>
-        <p:cTn id="1" dur="indefinite" restart="never" nodeType="tmRoot">
-          <p:childTnLst>
-            <p:seq concurrent="1" nextAc="seek">
-              <p:cTn id="2" dur="indefinite" nodeType="mainSeq">
-                <p:childTnLst>
-                  <p:par>
-                    <p:cTn id="3" presetID="10" presetClass="entr" presetSubtype="0" fill="hold" nodeType="afterPrev">
-                      <p:stCondLst>
-                        <p:cond delay="0"/>
-                      </p:stCondLst>
-                      <p:childTnLst>
-                        <p:set>
-                          <p:cBhvr>
-                            <p:cTn id="4" dur="1" fill="hold">
-                              <p:stCondLst>
-                                <p:cond delay="0"/>
-                              </p:stCondLst>
-                            </p:cTn>
-                            <p:tgtEl>
-                              <p:spTgt spid="315"/>
-                            </p:tgtEl>
-                            <p:attrNameLst>
-                              <p:attrName>style.visibility</p:attrName>
-                            </p:attrNameLst>
-                          </p:cBhvr>
-                          <p:to>
-                            <p:strVal val="visible"/>
-                          </p:to>
-                        </p:set>
-                        <p:animEffect transition="in" filter="fade">
-                          <p:cBhvr>
-                            <p:cTn id="100" dur="500"/>
-                            <p:tgtEl>
-                              <p:spTgt spid="315"/>
-                            </p:tgtEl>
-                          </p:cBhvr>
-                        </p:animEffect>
-                      </p:childTnLst>
-                    </p:cTn>
-                  </p:par>
-                  <p:par>
-                    <p:cTn id="5" presetID="10" presetClass="entr" presetSubtype="0" fill="hold" nodeType="afterPrev">
-                      <p:stCondLst>
-                        <p:cond delay="300"/>
-                      </p:stCondLst>
-                      <p:childTnLst>
-                        <p:set>
-                          <p:cBhvr>
-                            <p:cTn id="6" dur="1" fill="hold">
-                              <p:stCondLst>
-                                <p:cond delay="0"/>
-                              </p:stCondLst>
-                            </p:cTn>
-                            <p:tgtEl>
-                              <p:spTgt spid="316"/>
-                            </p:tgtEl>
-                            <p:attrNameLst>
-                              <p:attrName>style.visibility</p:attrName>
-                            </p:attrNameLst>
-                          </p:cBhvr>
-                          <p:to>
-                            <p:strVal val="visible"/>
-                          </p:to>
-                        </p:set>
-                        <p:animEffect transition="in" filter="fade">
-                          <p:cBhvr>
-                            <p:cTn id="101" dur="500"/>
-                            <p:tgtEl>
-                              <p:spTgt spid="316"/>
-                            </p:tgtEl>
-                          </p:cBhvr>
-                        </p:animEffect>
-                      </p:childTnLst>
-                    </p:cTn>
-                  </p:par>
-                  <p:par>
-                    <p:cTn id="7" presetID="10" presetClass="entr" presetSubtype="0" fill="hold" nodeType="afterPrev">
-                      <p:stCondLst>
-                        <p:cond delay="600"/>
-                      </p:stCondLst>
-                      <p:childTnLst>
-                        <p:set>
-                          <p:cBhvr>
-                            <p:cTn id="8" dur="1" fill="hold">
-                              <p:stCondLst>
-                                <p:cond delay="0"/>
-                              </p:stCondLst>
-                            </p:cTn>
-                            <p:tgtEl>
-                              <p:spTgt spid="317"/>
-                            </p:tgtEl>
-                            <p:attrNameLst>
-                              <p:attrName>style.visibility</p:attrName>
-                            </p:attrNameLst>
-                          </p:cBhvr>
-                          <p:to>
-                            <p:strVal val="visible"/>
-                          </p:to>
-                        </p:set>
-                        <p:animEffect transition="in" filter="fade">
-                          <p:cBhvr>
-                            <p:cTn id="102" dur="500"/>
-                            <p:tgtEl>
-                              <p:spTgt spid="317"/>
-                            </p:tgtEl>
-                          </p:cBhvr>
-                        </p:animEffect>
-                      </p:childTnLst>
-                    </p:cTn>
-                  </p:par>
-                  <p:par>
-                    <p:cTn id="9" presetID="10" presetClass="entr" presetSubtype="0" fill="hold" nodeType="afterPrev">
-                      <p:stCondLst>
-                        <p:cond delay="900"/>
-                      </p:stCondLst>
-                      <p:childTnLst>
-                        <p:set>
-                          <p:cBhvr>
-                            <p:cTn id="10" dur="1" fill="hold">
-                              <p:stCondLst>
-                                <p:cond delay="0"/>
-                              </p:stCondLst>
-                            </p:cTn>
-                            <p:tgtEl>
-                              <p:spTgt spid="318"/>
-                            </p:tgtEl>
-                            <p:attrNameLst>
-                              <p:attrName>style.visibility</p:attrName>
-                            </p:attrNameLst>
-                          </p:cBhvr>
-                          <p:to>
-                            <p:strVal val="visible"/>
-                          </p:to>
-                        </p:set>
-                        <p:animEffect transition="in" filter="fade">
-                          <p:cBhvr>
-                            <p:cTn id="103" dur="500"/>
-                            <p:tgtEl>
-                              <p:spTgt spid="318"/>
-                            </p:tgtEl>
-                          </p:cBhvr>
-                        </p:animEffect>
-                      </p:childTnLst>
-                    </p:cTn>
-                  </p:par>
-                  <p:par>
-                    <p:cTn id="11" presetID="10" presetClass="entr" presetSubtype="0" fill="hold" nodeType="afterPrev">
-                      <p:stCondLst>
-                        <p:cond delay="1200"/>
-                      </p:stCondLst>
-                      <p:childTnLst>
-                        <p:set>
-                          <p:cBhvr>
-                            <p:cTn id="12" dur="1" fill="hold">
-                              <p:stCondLst>
-                                <p:cond delay="0"/>
-                              </p:stCondLst>
-                            </p:cTn>
-                            <p:tgtEl>
-                              <p:spTgt spid="319"/>
-                            </p:tgtEl>
-                            <p:attrNameLst>
-                              <p:attrName>style.visibility</p:attrName>
-                            </p:attrNameLst>
-                          </p:cBhvr>
-                          <p:to>
-                            <p:strVal val="visible"/>
-                          </p:to>
-                        </p:set>
-                        <p:animEffect transition="in" filter="fade">
-                          <p:cBhvr>
-                            <p:cTn id="104" dur="500"/>
-                            <p:tgtEl>
-                              <p:spTgt spid="319"/>
-                            </p:tgtEl>
-                          </p:cBhvr>
-                        </p:animEffect>
-                      </p:childTnLst>
-                    </p:cTn>
-                  </p:par>
-                  <p:par>
-                    <p:cTn id="13" presetID="10" presetClass="entr" presetSubtype="0" fill="hold" nodeType="afterPrev">
-                      <p:stCondLst>
-                        <p:cond delay="1500"/>
-                      </p:stCondLst>
-                      <p:childTnLst>
-                        <p:set>
-                          <p:cBhvr>
-                            <p:cTn id="14" dur="1" fill="hold">
-                              <p:stCondLst>
-                                <p:cond delay="0"/>
-                              </p:stCondLst>
-                            </p:cTn>
-                            <p:tgtEl>
-                              <p:spTgt spid="320"/>
-                            </p:tgtEl>
-                            <p:attrNameLst>
-                              <p:attrName>style.visibility</p:attrName>
-                            </p:attrNameLst>
-                          </p:cBhvr>
-                          <p:to>
-                            <p:strVal val="visible"/>
-                          </p:to>
-                        </p:set>
-                        <p:animEffect transition="in" filter="fade">
-                          <p:cBhvr>
-                            <p:cTn id="105" dur="500"/>
-                            <p:tgtEl>
-                              <p:spTgt spid="320"/>
-                            </p:tgtEl>
-                          </p:cBhvr>
-                        </p:animEffect>
-                      </p:childTnLst>
-                    </p:cTn>
-                  </p:par>
-                </p:childTnLst>
-              </p:cTn>
-              <p:prevCondLst>
-                <p:cond evt="onPrev" delay="0">
-                  <p:tgtEl>
-                    <p:sldTgt/>
-                  </p:tgtEl>
-                </p:cond>
-              </p:prevCondLst>
-              <p:nextCondLst>
-                <p:cond evt="onNext" delay="0">
-                  <p:tgtEl>
-                    <p:sldTgt/>
-                  </p:tgtEl>
-                </p:cond>
-              </p:nextCondLst>
-            </p:seq>
-          </p:childTnLst>
-        </p:cTn>
-      </p:par>
-    </p:tnLst>
-  </p:timing>
 </p:sld>
 </file>
 
@@ -31314,141 +30189,6 @@
   <p:transition spd="med" advClick="1">
     <p:fade/>
   </p:transition>
-  <p:timing>
-    <p:tnLst>
-      <p:par>
-        <p:cTn id="1" dur="indefinite" restart="never" nodeType="tmRoot">
-          <p:childTnLst>
-            <p:seq concurrent="1" nextAc="seek">
-              <p:cTn id="2" dur="indefinite" nodeType="mainSeq">
-                <p:childTnLst>
-                  <p:par>
-                    <p:cTn id="3" presetID="10" presetClass="entr" presetSubtype="0" fill="hold" nodeType="afterPrev">
-                      <p:stCondLst>
-                        <p:cond delay="0"/>
-                      </p:stCondLst>
-                      <p:childTnLst>
-                        <p:set>
-                          <p:cBhvr>
-                            <p:cTn id="4" dur="1" fill="hold">
-                              <p:stCondLst>
-                                <p:cond delay="0"/>
-                              </p:stCondLst>
-                            </p:cTn>
-                            <p:tgtEl>
-                              <p:spTgt spid="342"/>
-                            </p:tgtEl>
-                            <p:attrNameLst>
-                              <p:attrName>style.visibility</p:attrName>
-                            </p:attrNameLst>
-                          </p:cBhvr>
-                          <p:to>
-                            <p:strVal val="visible"/>
-                          </p:to>
-                        </p:set>
-                        <p:animEffect transition="in" filter="fade">
-                          <p:cBhvr>
-                            <p:cTn id="100" dur="500"/>
-                            <p:tgtEl>
-                              <p:spTgt spid="342"/>
-                            </p:tgtEl>
-                          </p:cBhvr>
-                        </p:animEffect>
-                      </p:childTnLst>
-                    </p:cTn>
-                  </p:par>
-                  <p:par>
-                    <p:cTn id="5" presetID="10" presetClass="entr" presetSubtype="0" fill="hold" nodeType="afterPrev">
-                      <p:stCondLst>
-                        <p:cond delay="300"/>
-                      </p:stCondLst>
-                      <p:childTnLst>
-                        <p:set>
-                          <p:cBhvr>
-                            <p:cTn id="6" dur="1" fill="hold">
-                              <p:stCondLst>
-                                <p:cond delay="0"/>
-                              </p:stCondLst>
-                            </p:cTn>
-                            <p:tgtEl>
-                              <p:spTgt spid="343"/>
-                            </p:tgtEl>
-                            <p:attrNameLst>
-                              <p:attrName>style.visibility</p:attrName>
-                            </p:attrNameLst>
-                          </p:cBhvr>
-                          <p:to>
-                            <p:strVal val="visible"/>
-                          </p:to>
-                        </p:set>
-                        <p:animEffect transition="in" filter="fade">
-                          <p:cBhvr>
-                            <p:cTn id="101" dur="500"/>
-                            <p:tgtEl>
-                              <p:spTgt spid="343"/>
-                            </p:tgtEl>
-                          </p:cBhvr>
-                        </p:animEffect>
-                      </p:childTnLst>
-                    </p:cTn>
-                  </p:par>
-                  <p:par>
-                    <p:cTn id="7" presetID="10" presetClass="entr" presetSubtype="0" fill="hold" nodeType="afterPrev">
-                      <p:stCondLst>
-                        <p:cond delay="600"/>
-                      </p:stCondLst>
-                      <p:childTnLst>
-                        <p:set>
-                          <p:cBhvr>
-                            <p:cTn id="8" dur="1" fill="hold">
-                              <p:stCondLst>
-                                <p:cond delay="0"/>
-                              </p:stCondLst>
-                            </p:cTn>
-                            <p:tgtEl>
-                              <p:spTgt spid="344"/>
-                            </p:tgtEl>
-                            <p:attrNameLst>
-                              <p:attrName>style.visibility</p:attrName>
-                            </p:attrNameLst>
-                          </p:cBhvr>
-                          <p:to>
-                            <p:strVal val="visible"/>
-                          </p:to>
-                        </p:set>
-                        <p:animEffect transition="in" filter="fade">
-                          <p:cBhvr>
-                            <p:cTn id="102" dur="500"/>
-                            <p:tgtEl>
-                              <p:spTgt spid="344"/>
-                            </p:tgtEl>
-                          </p:cBhvr>
-                        </p:animEffect>
-                      </p:childTnLst>
-                    </p:cTn>
-                  </p:par>
-                </p:childTnLst>
-              </p:cTn>
-              <p:prevCondLst>
-                <p:cond evt="onPrev" delay="0">
-                  <p:tgtEl>
-                    <p:sldTgt/>
-                  </p:tgtEl>
-                </p:cond>
-              </p:prevCondLst>
-              <p:nextCondLst>
-                <p:cond evt="onNext" delay="0">
-                  <p:tgtEl>
-                    <p:sldTgt/>
-                  </p:tgtEl>
-                </p:cond>
-              </p:nextCondLst>
-            </p:seq>
-          </p:childTnLst>
-        </p:cTn>
-      </p:par>
-    </p:tnLst>
-  </p:timing>
 </p:sld>
 </file>
 
@@ -33588,246 +32328,6 @@
   <p:transition spd="med" advClick="1">
     <p:fade/>
   </p:transition>
-  <p:timing>
-    <p:tnLst>
-      <p:par>
-        <p:cTn id="1" dur="indefinite" restart="never" nodeType="tmRoot">
-          <p:childTnLst>
-            <p:seq concurrent="1" nextAc="seek">
-              <p:cTn id="2" dur="indefinite" nodeType="mainSeq">
-                <p:childTnLst>
-                  <p:par>
-                    <p:cTn id="3" presetID="10" presetClass="entr" presetSubtype="0" fill="hold" nodeType="afterPrev">
-                      <p:stCondLst>
-                        <p:cond delay="0"/>
-                      </p:stCondLst>
-                      <p:childTnLst>
-                        <p:set>
-                          <p:cBhvr>
-                            <p:cTn id="4" dur="1" fill="hold">
-                              <p:stCondLst>
-                                <p:cond delay="0"/>
-                              </p:stCondLst>
-                            </p:cTn>
-                            <p:tgtEl>
-                              <p:spTgt spid="349"/>
-                            </p:tgtEl>
-                            <p:attrNameLst>
-                              <p:attrName>style.visibility</p:attrName>
-                            </p:attrNameLst>
-                          </p:cBhvr>
-                          <p:to>
-                            <p:strVal val="visible"/>
-                          </p:to>
-                        </p:set>
-                        <p:animEffect transition="in" filter="fade">
-                          <p:cBhvr>
-                            <p:cTn id="100" dur="500"/>
-                            <p:tgtEl>
-                              <p:spTgt spid="349"/>
-                            </p:tgtEl>
-                          </p:cBhvr>
-                        </p:animEffect>
-                      </p:childTnLst>
-                    </p:cTn>
-                  </p:par>
-                  <p:par>
-                    <p:cTn id="5" presetID="10" presetClass="entr" presetSubtype="0" fill="hold" nodeType="afterPrev">
-                      <p:stCondLst>
-                        <p:cond delay="300"/>
-                      </p:stCondLst>
-                      <p:childTnLst>
-                        <p:set>
-                          <p:cBhvr>
-                            <p:cTn id="6" dur="1" fill="hold">
-                              <p:stCondLst>
-                                <p:cond delay="0"/>
-                              </p:stCondLst>
-                            </p:cTn>
-                            <p:tgtEl>
-                              <p:spTgt spid="350"/>
-                            </p:tgtEl>
-                            <p:attrNameLst>
-                              <p:attrName>style.visibility</p:attrName>
-                            </p:attrNameLst>
-                          </p:cBhvr>
-                          <p:to>
-                            <p:strVal val="visible"/>
-                          </p:to>
-                        </p:set>
-                        <p:animEffect transition="in" filter="fade">
-                          <p:cBhvr>
-                            <p:cTn id="101" dur="500"/>
-                            <p:tgtEl>
-                              <p:spTgt spid="350"/>
-                            </p:tgtEl>
-                          </p:cBhvr>
-                        </p:animEffect>
-                      </p:childTnLst>
-                    </p:cTn>
-                  </p:par>
-                  <p:par>
-                    <p:cTn id="7" presetID="10" presetClass="entr" presetSubtype="0" fill="hold" nodeType="afterPrev">
-                      <p:stCondLst>
-                        <p:cond delay="600"/>
-                      </p:stCondLst>
-                      <p:childTnLst>
-                        <p:set>
-                          <p:cBhvr>
-                            <p:cTn id="8" dur="1" fill="hold">
-                              <p:stCondLst>
-                                <p:cond delay="0"/>
-                              </p:stCondLst>
-                            </p:cTn>
-                            <p:tgtEl>
-                              <p:spTgt spid="351"/>
-                            </p:tgtEl>
-                            <p:attrNameLst>
-                              <p:attrName>style.visibility</p:attrName>
-                            </p:attrNameLst>
-                          </p:cBhvr>
-                          <p:to>
-                            <p:strVal val="visible"/>
-                          </p:to>
-                        </p:set>
-                        <p:animEffect transition="in" filter="fade">
-                          <p:cBhvr>
-                            <p:cTn id="102" dur="500"/>
-                            <p:tgtEl>
-                              <p:spTgt spid="351"/>
-                            </p:tgtEl>
-                          </p:cBhvr>
-                        </p:animEffect>
-                      </p:childTnLst>
-                    </p:cTn>
-                  </p:par>
-                  <p:par>
-                    <p:cTn id="9" presetID="10" presetClass="entr" presetSubtype="0" fill="hold" nodeType="afterPrev">
-                      <p:stCondLst>
-                        <p:cond delay="900"/>
-                      </p:stCondLst>
-                      <p:childTnLst>
-                        <p:set>
-                          <p:cBhvr>
-                            <p:cTn id="10" dur="1" fill="hold">
-                              <p:stCondLst>
-                                <p:cond delay="0"/>
-                              </p:stCondLst>
-                            </p:cTn>
-                            <p:tgtEl>
-                              <p:spTgt spid="352"/>
-                            </p:tgtEl>
-                            <p:attrNameLst>
-                              <p:attrName>style.visibility</p:attrName>
-                            </p:attrNameLst>
-                          </p:cBhvr>
-                          <p:to>
-                            <p:strVal val="visible"/>
-                          </p:to>
-                        </p:set>
-                        <p:animEffect transition="in" filter="fade">
-                          <p:cBhvr>
-                            <p:cTn id="103" dur="500"/>
-                            <p:tgtEl>
-                              <p:spTgt spid="352"/>
-                            </p:tgtEl>
-                          </p:cBhvr>
-                        </p:animEffect>
-                      </p:childTnLst>
-                    </p:cTn>
-                  </p:par>
-                  <p:par>
-                    <p:cTn id="11" presetID="10" presetClass="entr" presetSubtype="0" fill="hold" nodeType="afterPrev">
-                      <p:stCondLst>
-                        <p:cond delay="1200"/>
-                      </p:stCondLst>
-                      <p:childTnLst>
-                        <p:set>
-                          <p:cBhvr>
-                            <p:cTn id="12" dur="1" fill="hold">
-                              <p:stCondLst>
-                                <p:cond delay="0"/>
-                              </p:stCondLst>
-                            </p:cTn>
-                            <p:tgtEl>
-                              <p:spTgt spid="353"/>
-                            </p:tgtEl>
-                            <p:attrNameLst>
-                              <p:attrName>style.visibility</p:attrName>
-                            </p:attrNameLst>
-                          </p:cBhvr>
-                          <p:to>
-                            <p:strVal val="visible"/>
-                          </p:to>
-                        </p:set>
-                        <p:animEffect transition="in" filter="fade">
-                          <p:cBhvr>
-                            <p:cTn id="104" dur="500"/>
-                            <p:tgtEl>
-                              <p:spTgt spid="353"/>
-                            </p:tgtEl>
-                          </p:cBhvr>
-                        </p:animEffect>
-                      </p:childTnLst>
-                    </p:cTn>
-                  </p:par>
-                  <p:par>
-                    <p:cTn id="13" presetID="10" presetClass="entr" presetSubtype="0" fill="hold" nodeType="afterPrev">
-                      <p:stCondLst>
-                        <p:cond delay="1500"/>
-                      </p:stCondLst>
-                      <p:childTnLst>
-                        <p:set>
-                          <p:cBhvr>
-                            <p:cTn id="14" dur="1" fill="hold">
-                              <p:stCondLst>
-                                <p:cond delay="0"/>
-                              </p:stCondLst>
-                            </p:cTn>
-                            <p:tgtEl>
-                              <p:spTgt spid="354"/>
-                            </p:tgtEl>
-                            <p:attrNameLst>
-                              <p:attrName>style.visibility</p:attrName>
-                            </p:attrNameLst>
-                          </p:cBhvr>
-                          <p:to>
-                            <p:strVal val="visible"/>
-                          </p:to>
-                        </p:set>
-                        <p:animEffect transition="in" filter="fade">
-                          <p:cBhvr>
-                            <p:cTn id="105" dur="500"/>
-                            <p:tgtEl>
-                              <p:spTgt spid="354"/>
-                            </p:tgtEl>
-                          </p:cBhvr>
-                        </p:animEffect>
-                      </p:childTnLst>
-                    </p:cTn>
-                  </p:par>
-                </p:childTnLst>
-              </p:cTn>
-              <p:prevCondLst>
-                <p:cond evt="onPrev" delay="0">
-                  <p:tgtEl>
-                    <p:sldTgt/>
-                  </p:tgtEl>
-                </p:cond>
-              </p:prevCondLst>
-              <p:nextCondLst>
-                <p:cond evt="onNext" delay="0">
-                  <p:tgtEl>
-                    <p:sldTgt/>
-                  </p:tgtEl>
-                </p:cond>
-              </p:nextCondLst>
-            </p:seq>
-          </p:childTnLst>
-        </p:cTn>
-      </p:par>
-    </p:tnLst>
-  </p:timing>
 </p:sld>
 </file>
 
@@ -34345,246 +32845,6 @@
   <p:transition spd="med" advClick="1">
     <p:wipe dir="l"/>
   </p:transition>
-  <p:timing>
-    <p:tnLst>
-      <p:par>
-        <p:cTn id="1" dur="indefinite" restart="never" nodeType="tmRoot">
-          <p:childTnLst>
-            <p:seq concurrent="1" nextAc="seek">
-              <p:cTn id="2" dur="indefinite" nodeType="mainSeq">
-                <p:childTnLst>
-                  <p:par>
-                    <p:cTn id="3" presetID="10" presetClass="entr" presetSubtype="0" fill="hold" nodeType="afterPrev">
-                      <p:stCondLst>
-                        <p:cond delay="0"/>
-                      </p:stCondLst>
-                      <p:childTnLst>
-                        <p:set>
-                          <p:cBhvr>
-                            <p:cTn id="4" dur="1" fill="hold">
-                              <p:stCondLst>
-                                <p:cond delay="0"/>
-                              </p:stCondLst>
-                            </p:cTn>
-                            <p:tgtEl>
-                              <p:spTgt spid="381"/>
-                            </p:tgtEl>
-                            <p:attrNameLst>
-                              <p:attrName>style.visibility</p:attrName>
-                            </p:attrNameLst>
-                          </p:cBhvr>
-                          <p:to>
-                            <p:strVal val="visible"/>
-                          </p:to>
-                        </p:set>
-                        <p:animEffect transition="in" filter="fade">
-                          <p:cBhvr>
-                            <p:cTn id="100" dur="500"/>
-                            <p:tgtEl>
-                              <p:spTgt spid="381"/>
-                            </p:tgtEl>
-                          </p:cBhvr>
-                        </p:animEffect>
-                      </p:childTnLst>
-                    </p:cTn>
-                  </p:par>
-                  <p:par>
-                    <p:cTn id="5" presetID="10" presetClass="entr" presetSubtype="0" fill="hold" nodeType="afterPrev">
-                      <p:stCondLst>
-                        <p:cond delay="300"/>
-                      </p:stCondLst>
-                      <p:childTnLst>
-                        <p:set>
-                          <p:cBhvr>
-                            <p:cTn id="6" dur="1" fill="hold">
-                              <p:stCondLst>
-                                <p:cond delay="0"/>
-                              </p:stCondLst>
-                            </p:cTn>
-                            <p:tgtEl>
-                              <p:spTgt spid="382"/>
-                            </p:tgtEl>
-                            <p:attrNameLst>
-                              <p:attrName>style.visibility</p:attrName>
-                            </p:attrNameLst>
-                          </p:cBhvr>
-                          <p:to>
-                            <p:strVal val="visible"/>
-                          </p:to>
-                        </p:set>
-                        <p:animEffect transition="in" filter="fade">
-                          <p:cBhvr>
-                            <p:cTn id="101" dur="500"/>
-                            <p:tgtEl>
-                              <p:spTgt spid="382"/>
-                            </p:tgtEl>
-                          </p:cBhvr>
-                        </p:animEffect>
-                      </p:childTnLst>
-                    </p:cTn>
-                  </p:par>
-                  <p:par>
-                    <p:cTn id="7" presetID="10" presetClass="entr" presetSubtype="0" fill="hold" nodeType="afterPrev">
-                      <p:stCondLst>
-                        <p:cond delay="600"/>
-                      </p:stCondLst>
-                      <p:childTnLst>
-                        <p:set>
-                          <p:cBhvr>
-                            <p:cTn id="8" dur="1" fill="hold">
-                              <p:stCondLst>
-                                <p:cond delay="0"/>
-                              </p:stCondLst>
-                            </p:cTn>
-                            <p:tgtEl>
-                              <p:spTgt spid="383"/>
-                            </p:tgtEl>
-                            <p:attrNameLst>
-                              <p:attrName>style.visibility</p:attrName>
-                            </p:attrNameLst>
-                          </p:cBhvr>
-                          <p:to>
-                            <p:strVal val="visible"/>
-                          </p:to>
-                        </p:set>
-                        <p:animEffect transition="in" filter="fade">
-                          <p:cBhvr>
-                            <p:cTn id="102" dur="500"/>
-                            <p:tgtEl>
-                              <p:spTgt spid="383"/>
-                            </p:tgtEl>
-                          </p:cBhvr>
-                        </p:animEffect>
-                      </p:childTnLst>
-                    </p:cTn>
-                  </p:par>
-                  <p:par>
-                    <p:cTn id="9" presetID="10" presetClass="entr" presetSubtype="0" fill="hold" nodeType="afterPrev">
-                      <p:stCondLst>
-                        <p:cond delay="900"/>
-                      </p:stCondLst>
-                      <p:childTnLst>
-                        <p:set>
-                          <p:cBhvr>
-                            <p:cTn id="10" dur="1" fill="hold">
-                              <p:stCondLst>
-                                <p:cond delay="0"/>
-                              </p:stCondLst>
-                            </p:cTn>
-                            <p:tgtEl>
-                              <p:spTgt spid="384"/>
-                            </p:tgtEl>
-                            <p:attrNameLst>
-                              <p:attrName>style.visibility</p:attrName>
-                            </p:attrNameLst>
-                          </p:cBhvr>
-                          <p:to>
-                            <p:strVal val="visible"/>
-                          </p:to>
-                        </p:set>
-                        <p:animEffect transition="in" filter="fade">
-                          <p:cBhvr>
-                            <p:cTn id="103" dur="500"/>
-                            <p:tgtEl>
-                              <p:spTgt spid="384"/>
-                            </p:tgtEl>
-                          </p:cBhvr>
-                        </p:animEffect>
-                      </p:childTnLst>
-                    </p:cTn>
-                  </p:par>
-                  <p:par>
-                    <p:cTn id="11" presetID="10" presetClass="entr" presetSubtype="0" fill="hold" nodeType="afterPrev">
-                      <p:stCondLst>
-                        <p:cond delay="1200"/>
-                      </p:stCondLst>
-                      <p:childTnLst>
-                        <p:set>
-                          <p:cBhvr>
-                            <p:cTn id="12" dur="1" fill="hold">
-                              <p:stCondLst>
-                                <p:cond delay="0"/>
-                              </p:stCondLst>
-                            </p:cTn>
-                            <p:tgtEl>
-                              <p:spTgt spid="385"/>
-                            </p:tgtEl>
-                            <p:attrNameLst>
-                              <p:attrName>style.visibility</p:attrName>
-                            </p:attrNameLst>
-                          </p:cBhvr>
-                          <p:to>
-                            <p:strVal val="visible"/>
-                          </p:to>
-                        </p:set>
-                        <p:animEffect transition="in" filter="fade">
-                          <p:cBhvr>
-                            <p:cTn id="104" dur="500"/>
-                            <p:tgtEl>
-                              <p:spTgt spid="385"/>
-                            </p:tgtEl>
-                          </p:cBhvr>
-                        </p:animEffect>
-                      </p:childTnLst>
-                    </p:cTn>
-                  </p:par>
-                  <p:par>
-                    <p:cTn id="13" presetID="10" presetClass="entr" presetSubtype="0" fill="hold" nodeType="afterPrev">
-                      <p:stCondLst>
-                        <p:cond delay="1500"/>
-                      </p:stCondLst>
-                      <p:childTnLst>
-                        <p:set>
-                          <p:cBhvr>
-                            <p:cTn id="14" dur="1" fill="hold">
-                              <p:stCondLst>
-                                <p:cond delay="0"/>
-                              </p:stCondLst>
-                            </p:cTn>
-                            <p:tgtEl>
-                              <p:spTgt spid="386"/>
-                            </p:tgtEl>
-                            <p:attrNameLst>
-                              <p:attrName>style.visibility</p:attrName>
-                            </p:attrNameLst>
-                          </p:cBhvr>
-                          <p:to>
-                            <p:strVal val="visible"/>
-                          </p:to>
-                        </p:set>
-                        <p:animEffect transition="in" filter="fade">
-                          <p:cBhvr>
-                            <p:cTn id="105" dur="500"/>
-                            <p:tgtEl>
-                              <p:spTgt spid="386"/>
-                            </p:tgtEl>
-                          </p:cBhvr>
-                        </p:animEffect>
-                      </p:childTnLst>
-                    </p:cTn>
-                  </p:par>
-                </p:childTnLst>
-              </p:cTn>
-              <p:prevCondLst>
-                <p:cond evt="onPrev" delay="0">
-                  <p:tgtEl>
-                    <p:sldTgt/>
-                  </p:tgtEl>
-                </p:cond>
-              </p:prevCondLst>
-              <p:nextCondLst>
-                <p:cond evt="onNext" delay="0">
-                  <p:tgtEl>
-                    <p:sldTgt/>
-                  </p:tgtEl>
-                </p:cond>
-              </p:nextCondLst>
-            </p:seq>
-          </p:childTnLst>
-        </p:cTn>
-      </p:par>
-    </p:tnLst>
-  </p:timing>
 </p:sld>
 </file>
 
@@ -35069,246 +33329,6 @@
   <p:transition spd="med" advClick="1">
     <p:wipe dir="l"/>
   </p:transition>
-  <p:timing>
-    <p:tnLst>
-      <p:par>
-        <p:cTn id="1" dur="indefinite" restart="never" nodeType="tmRoot">
-          <p:childTnLst>
-            <p:seq concurrent="1" nextAc="seek">
-              <p:cTn id="2" dur="indefinite" nodeType="mainSeq">
-                <p:childTnLst>
-                  <p:par>
-                    <p:cTn id="3" presetID="10" presetClass="entr" presetSubtype="0" fill="hold" nodeType="afterPrev">
-                      <p:stCondLst>
-                        <p:cond delay="0"/>
-                      </p:stCondLst>
-                      <p:childTnLst>
-                        <p:set>
-                          <p:cBhvr>
-                            <p:cTn id="4" dur="1" fill="hold">
-                              <p:stCondLst>
-                                <p:cond delay="0"/>
-                              </p:stCondLst>
-                            </p:cTn>
-                            <p:tgtEl>
-                              <p:spTgt spid="393"/>
-                            </p:tgtEl>
-                            <p:attrNameLst>
-                              <p:attrName>style.visibility</p:attrName>
-                            </p:attrNameLst>
-                          </p:cBhvr>
-                          <p:to>
-                            <p:strVal val="visible"/>
-                          </p:to>
-                        </p:set>
-                        <p:animEffect transition="in" filter="fade">
-                          <p:cBhvr>
-                            <p:cTn id="100" dur="500"/>
-                            <p:tgtEl>
-                              <p:spTgt spid="393"/>
-                            </p:tgtEl>
-                          </p:cBhvr>
-                        </p:animEffect>
-                      </p:childTnLst>
-                    </p:cTn>
-                  </p:par>
-                  <p:par>
-                    <p:cTn id="5" presetID="10" presetClass="entr" presetSubtype="0" fill="hold" nodeType="afterPrev">
-                      <p:stCondLst>
-                        <p:cond delay="300"/>
-                      </p:stCondLst>
-                      <p:childTnLst>
-                        <p:set>
-                          <p:cBhvr>
-                            <p:cTn id="6" dur="1" fill="hold">
-                              <p:stCondLst>
-                                <p:cond delay="0"/>
-                              </p:stCondLst>
-                            </p:cTn>
-                            <p:tgtEl>
-                              <p:spTgt spid="394"/>
-                            </p:tgtEl>
-                            <p:attrNameLst>
-                              <p:attrName>style.visibility</p:attrName>
-                            </p:attrNameLst>
-                          </p:cBhvr>
-                          <p:to>
-                            <p:strVal val="visible"/>
-                          </p:to>
-                        </p:set>
-                        <p:animEffect transition="in" filter="fade">
-                          <p:cBhvr>
-                            <p:cTn id="101" dur="500"/>
-                            <p:tgtEl>
-                              <p:spTgt spid="394"/>
-                            </p:tgtEl>
-                          </p:cBhvr>
-                        </p:animEffect>
-                      </p:childTnLst>
-                    </p:cTn>
-                  </p:par>
-                  <p:par>
-                    <p:cTn id="7" presetID="10" presetClass="entr" presetSubtype="0" fill="hold" nodeType="afterPrev">
-                      <p:stCondLst>
-                        <p:cond delay="600"/>
-                      </p:stCondLst>
-                      <p:childTnLst>
-                        <p:set>
-                          <p:cBhvr>
-                            <p:cTn id="8" dur="1" fill="hold">
-                              <p:stCondLst>
-                                <p:cond delay="0"/>
-                              </p:stCondLst>
-                            </p:cTn>
-                            <p:tgtEl>
-                              <p:spTgt spid="395"/>
-                            </p:tgtEl>
-                            <p:attrNameLst>
-                              <p:attrName>style.visibility</p:attrName>
-                            </p:attrNameLst>
-                          </p:cBhvr>
-                          <p:to>
-                            <p:strVal val="visible"/>
-                          </p:to>
-                        </p:set>
-                        <p:animEffect transition="in" filter="fade">
-                          <p:cBhvr>
-                            <p:cTn id="102" dur="500"/>
-                            <p:tgtEl>
-                              <p:spTgt spid="395"/>
-                            </p:tgtEl>
-                          </p:cBhvr>
-                        </p:animEffect>
-                      </p:childTnLst>
-                    </p:cTn>
-                  </p:par>
-                  <p:par>
-                    <p:cTn id="9" presetID="10" presetClass="entr" presetSubtype="0" fill="hold" nodeType="afterPrev">
-                      <p:stCondLst>
-                        <p:cond delay="900"/>
-                      </p:stCondLst>
-                      <p:childTnLst>
-                        <p:set>
-                          <p:cBhvr>
-                            <p:cTn id="10" dur="1" fill="hold">
-                              <p:stCondLst>
-                                <p:cond delay="0"/>
-                              </p:stCondLst>
-                            </p:cTn>
-                            <p:tgtEl>
-                              <p:spTgt spid="396"/>
-                            </p:tgtEl>
-                            <p:attrNameLst>
-                              <p:attrName>style.visibility</p:attrName>
-                            </p:attrNameLst>
-                          </p:cBhvr>
-                          <p:to>
-                            <p:strVal val="visible"/>
-                          </p:to>
-                        </p:set>
-                        <p:animEffect transition="in" filter="fade">
-                          <p:cBhvr>
-                            <p:cTn id="103" dur="500"/>
-                            <p:tgtEl>
-                              <p:spTgt spid="396"/>
-                            </p:tgtEl>
-                          </p:cBhvr>
-                        </p:animEffect>
-                      </p:childTnLst>
-                    </p:cTn>
-                  </p:par>
-                  <p:par>
-                    <p:cTn id="11" presetID="10" presetClass="entr" presetSubtype="0" fill="hold" nodeType="afterPrev">
-                      <p:stCondLst>
-                        <p:cond delay="1200"/>
-                      </p:stCondLst>
-                      <p:childTnLst>
-                        <p:set>
-                          <p:cBhvr>
-                            <p:cTn id="12" dur="1" fill="hold">
-                              <p:stCondLst>
-                                <p:cond delay="0"/>
-                              </p:stCondLst>
-                            </p:cTn>
-                            <p:tgtEl>
-                              <p:spTgt spid="397"/>
-                            </p:tgtEl>
-                            <p:attrNameLst>
-                              <p:attrName>style.visibility</p:attrName>
-                            </p:attrNameLst>
-                          </p:cBhvr>
-                          <p:to>
-                            <p:strVal val="visible"/>
-                          </p:to>
-                        </p:set>
-                        <p:animEffect transition="in" filter="fade">
-                          <p:cBhvr>
-                            <p:cTn id="104" dur="500"/>
-                            <p:tgtEl>
-                              <p:spTgt spid="397"/>
-                            </p:tgtEl>
-                          </p:cBhvr>
-                        </p:animEffect>
-                      </p:childTnLst>
-                    </p:cTn>
-                  </p:par>
-                  <p:par>
-                    <p:cTn id="13" presetID="10" presetClass="entr" presetSubtype="0" fill="hold" nodeType="afterPrev">
-                      <p:stCondLst>
-                        <p:cond delay="1500"/>
-                      </p:stCondLst>
-                      <p:childTnLst>
-                        <p:set>
-                          <p:cBhvr>
-                            <p:cTn id="14" dur="1" fill="hold">
-                              <p:stCondLst>
-                                <p:cond delay="0"/>
-                              </p:stCondLst>
-                            </p:cTn>
-                            <p:tgtEl>
-                              <p:spTgt spid="398"/>
-                            </p:tgtEl>
-                            <p:attrNameLst>
-                              <p:attrName>style.visibility</p:attrName>
-                            </p:attrNameLst>
-                          </p:cBhvr>
-                          <p:to>
-                            <p:strVal val="visible"/>
-                          </p:to>
-                        </p:set>
-                        <p:animEffect transition="in" filter="fade">
-                          <p:cBhvr>
-                            <p:cTn id="105" dur="500"/>
-                            <p:tgtEl>
-                              <p:spTgt spid="398"/>
-                            </p:tgtEl>
-                          </p:cBhvr>
-                        </p:animEffect>
-                      </p:childTnLst>
-                    </p:cTn>
-                  </p:par>
-                </p:childTnLst>
-              </p:cTn>
-              <p:prevCondLst>
-                <p:cond evt="onPrev" delay="0">
-                  <p:tgtEl>
-                    <p:sldTgt/>
-                  </p:tgtEl>
-                </p:cond>
-              </p:prevCondLst>
-              <p:nextCondLst>
-                <p:cond evt="onNext" delay="0">
-                  <p:tgtEl>
-                    <p:sldTgt/>
-                  </p:tgtEl>
-                </p:cond>
-              </p:nextCondLst>
-            </p:seq>
-          </p:childTnLst>
-        </p:cTn>
-      </p:par>
-    </p:tnLst>
-  </p:timing>
 </p:sld>
 </file>
 
@@ -36232,246 +34252,6 @@
   <p:transition spd="med" advClick="1">
     <p:fade/>
   </p:transition>
-  <p:timing>
-    <p:tnLst>
-      <p:par>
-        <p:cTn id="1" dur="indefinite" restart="never" nodeType="tmRoot">
-          <p:childTnLst>
-            <p:seq concurrent="1" nextAc="seek">
-              <p:cTn id="2" dur="indefinite" nodeType="mainSeq">
-                <p:childTnLst>
-                  <p:par>
-                    <p:cTn id="3" presetID="10" presetClass="entr" presetSubtype="0" fill="hold" nodeType="afterPrev">
-                      <p:stCondLst>
-                        <p:cond delay="0"/>
-                      </p:stCondLst>
-                      <p:childTnLst>
-                        <p:set>
-                          <p:cBhvr>
-                            <p:cTn id="4" dur="1" fill="hold">
-                              <p:stCondLst>
-                                <p:cond delay="0"/>
-                              </p:stCondLst>
-                            </p:cTn>
-                            <p:tgtEl>
-                              <p:spTgt spid="405"/>
-                            </p:tgtEl>
-                            <p:attrNameLst>
-                              <p:attrName>style.visibility</p:attrName>
-                            </p:attrNameLst>
-                          </p:cBhvr>
-                          <p:to>
-                            <p:strVal val="visible"/>
-                          </p:to>
-                        </p:set>
-                        <p:animEffect transition="in" filter="fade">
-                          <p:cBhvr>
-                            <p:cTn id="100" dur="500"/>
-                            <p:tgtEl>
-                              <p:spTgt spid="405"/>
-                            </p:tgtEl>
-                          </p:cBhvr>
-                        </p:animEffect>
-                      </p:childTnLst>
-                    </p:cTn>
-                  </p:par>
-                  <p:par>
-                    <p:cTn id="5" presetID="10" presetClass="entr" presetSubtype="0" fill="hold" nodeType="afterPrev">
-                      <p:stCondLst>
-                        <p:cond delay="300"/>
-                      </p:stCondLst>
-                      <p:childTnLst>
-                        <p:set>
-                          <p:cBhvr>
-                            <p:cTn id="6" dur="1" fill="hold">
-                              <p:stCondLst>
-                                <p:cond delay="0"/>
-                              </p:stCondLst>
-                            </p:cTn>
-                            <p:tgtEl>
-                              <p:spTgt spid="406"/>
-                            </p:tgtEl>
-                            <p:attrNameLst>
-                              <p:attrName>style.visibility</p:attrName>
-                            </p:attrNameLst>
-                          </p:cBhvr>
-                          <p:to>
-                            <p:strVal val="visible"/>
-                          </p:to>
-                        </p:set>
-                        <p:animEffect transition="in" filter="fade">
-                          <p:cBhvr>
-                            <p:cTn id="101" dur="500"/>
-                            <p:tgtEl>
-                              <p:spTgt spid="406"/>
-                            </p:tgtEl>
-                          </p:cBhvr>
-                        </p:animEffect>
-                      </p:childTnLst>
-                    </p:cTn>
-                  </p:par>
-                  <p:par>
-                    <p:cTn id="7" presetID="10" presetClass="entr" presetSubtype="0" fill="hold" nodeType="afterPrev">
-                      <p:stCondLst>
-                        <p:cond delay="600"/>
-                      </p:stCondLst>
-                      <p:childTnLst>
-                        <p:set>
-                          <p:cBhvr>
-                            <p:cTn id="8" dur="1" fill="hold">
-                              <p:stCondLst>
-                                <p:cond delay="0"/>
-                              </p:stCondLst>
-                            </p:cTn>
-                            <p:tgtEl>
-                              <p:spTgt spid="407"/>
-                            </p:tgtEl>
-                            <p:attrNameLst>
-                              <p:attrName>style.visibility</p:attrName>
-                            </p:attrNameLst>
-                          </p:cBhvr>
-                          <p:to>
-                            <p:strVal val="visible"/>
-                          </p:to>
-                        </p:set>
-                        <p:animEffect transition="in" filter="fade">
-                          <p:cBhvr>
-                            <p:cTn id="102" dur="500"/>
-                            <p:tgtEl>
-                              <p:spTgt spid="407"/>
-                            </p:tgtEl>
-                          </p:cBhvr>
-                        </p:animEffect>
-                      </p:childTnLst>
-                    </p:cTn>
-                  </p:par>
-                  <p:par>
-                    <p:cTn id="9" presetID="10" presetClass="entr" presetSubtype="0" fill="hold" nodeType="afterPrev">
-                      <p:stCondLst>
-                        <p:cond delay="900"/>
-                      </p:stCondLst>
-                      <p:childTnLst>
-                        <p:set>
-                          <p:cBhvr>
-                            <p:cTn id="10" dur="1" fill="hold">
-                              <p:stCondLst>
-                                <p:cond delay="0"/>
-                              </p:stCondLst>
-                            </p:cTn>
-                            <p:tgtEl>
-                              <p:spTgt spid="408"/>
-                            </p:tgtEl>
-                            <p:attrNameLst>
-                              <p:attrName>style.visibility</p:attrName>
-                            </p:attrNameLst>
-                          </p:cBhvr>
-                          <p:to>
-                            <p:strVal val="visible"/>
-                          </p:to>
-                        </p:set>
-                        <p:animEffect transition="in" filter="fade">
-                          <p:cBhvr>
-                            <p:cTn id="103" dur="500"/>
-                            <p:tgtEl>
-                              <p:spTgt spid="408"/>
-                            </p:tgtEl>
-                          </p:cBhvr>
-                        </p:animEffect>
-                      </p:childTnLst>
-                    </p:cTn>
-                  </p:par>
-                  <p:par>
-                    <p:cTn id="11" presetID="10" presetClass="entr" presetSubtype="0" fill="hold" nodeType="afterPrev">
-                      <p:stCondLst>
-                        <p:cond delay="1200"/>
-                      </p:stCondLst>
-                      <p:childTnLst>
-                        <p:set>
-                          <p:cBhvr>
-                            <p:cTn id="12" dur="1" fill="hold">
-                              <p:stCondLst>
-                                <p:cond delay="0"/>
-                              </p:stCondLst>
-                            </p:cTn>
-                            <p:tgtEl>
-                              <p:spTgt spid="409"/>
-                            </p:tgtEl>
-                            <p:attrNameLst>
-                              <p:attrName>style.visibility</p:attrName>
-                            </p:attrNameLst>
-                          </p:cBhvr>
-                          <p:to>
-                            <p:strVal val="visible"/>
-                          </p:to>
-                        </p:set>
-                        <p:animEffect transition="in" filter="fade">
-                          <p:cBhvr>
-                            <p:cTn id="104" dur="500"/>
-                            <p:tgtEl>
-                              <p:spTgt spid="409"/>
-                            </p:tgtEl>
-                          </p:cBhvr>
-                        </p:animEffect>
-                      </p:childTnLst>
-                    </p:cTn>
-                  </p:par>
-                  <p:par>
-                    <p:cTn id="13" presetID="10" presetClass="entr" presetSubtype="0" fill="hold" nodeType="afterPrev">
-                      <p:stCondLst>
-                        <p:cond delay="1500"/>
-                      </p:stCondLst>
-                      <p:childTnLst>
-                        <p:set>
-                          <p:cBhvr>
-                            <p:cTn id="14" dur="1" fill="hold">
-                              <p:stCondLst>
-                                <p:cond delay="0"/>
-                              </p:stCondLst>
-                            </p:cTn>
-                            <p:tgtEl>
-                              <p:spTgt spid="410"/>
-                            </p:tgtEl>
-                            <p:attrNameLst>
-                              <p:attrName>style.visibility</p:attrName>
-                            </p:attrNameLst>
-                          </p:cBhvr>
-                          <p:to>
-                            <p:strVal val="visible"/>
-                          </p:to>
-                        </p:set>
-                        <p:animEffect transition="in" filter="fade">
-                          <p:cBhvr>
-                            <p:cTn id="105" dur="500"/>
-                            <p:tgtEl>
-                              <p:spTgt spid="410"/>
-                            </p:tgtEl>
-                          </p:cBhvr>
-                        </p:animEffect>
-                      </p:childTnLst>
-                    </p:cTn>
-                  </p:par>
-                </p:childTnLst>
-              </p:cTn>
-              <p:prevCondLst>
-                <p:cond evt="onPrev" delay="0">
-                  <p:tgtEl>
-                    <p:sldTgt/>
-                  </p:tgtEl>
-                </p:cond>
-              </p:prevCondLst>
-              <p:nextCondLst>
-                <p:cond evt="onNext" delay="0">
-                  <p:tgtEl>
-                    <p:sldTgt/>
-                  </p:tgtEl>
-                </p:cond>
-              </p:nextCondLst>
-            </p:seq>
-          </p:childTnLst>
-        </p:cTn>
-      </p:par>
-    </p:tnLst>
-  </p:timing>
 </p:sld>
 </file>
 
@@ -36930,211 +34710,6 @@
   <p:transition spd="med" advClick="1">
     <p:fade/>
   </p:transition>
-  <p:timing>
-    <p:tnLst>
-      <p:par>
-        <p:cTn id="1" dur="indefinite" restart="never" nodeType="tmRoot">
-          <p:childTnLst>
-            <p:seq concurrent="1" nextAc="seek">
-              <p:cTn id="2" dur="indefinite" nodeType="mainSeq">
-                <p:childTnLst>
-                  <p:par>
-                    <p:cTn id="3" presetID="10" presetClass="entr" presetSubtype="0" fill="hold" nodeType="afterPrev">
-                      <p:stCondLst>
-                        <p:cond delay="0"/>
-                      </p:stCondLst>
-                      <p:childTnLst>
-                        <p:set>
-                          <p:cBhvr>
-                            <p:cTn id="4" dur="1" fill="hold">
-                              <p:stCondLst>
-                                <p:cond delay="0"/>
-                              </p:stCondLst>
-                            </p:cTn>
-                            <p:tgtEl>
-                              <p:spTgt spid="106"/>
-                            </p:tgtEl>
-                            <p:attrNameLst>
-                              <p:attrName>style.visibility</p:attrName>
-                            </p:attrNameLst>
-                          </p:cBhvr>
-                          <p:to>
-                            <p:strVal val="visible"/>
-                          </p:to>
-                        </p:set>
-                        <p:animEffect transition="in" filter="fade">
-                          <p:cBhvr>
-                            <p:cTn id="100" dur="500"/>
-                            <p:tgtEl>
-                              <p:spTgt spid="106"/>
-                            </p:tgtEl>
-                          </p:cBhvr>
-                        </p:animEffect>
-                      </p:childTnLst>
-                    </p:cTn>
-                  </p:par>
-                  <p:par>
-                    <p:cTn id="5" presetID="10" presetClass="entr" presetSubtype="0" fill="hold" nodeType="afterPrev">
-                      <p:stCondLst>
-                        <p:cond delay="300"/>
-                      </p:stCondLst>
-                      <p:childTnLst>
-                        <p:set>
-                          <p:cBhvr>
-                            <p:cTn id="6" dur="1" fill="hold">
-                              <p:stCondLst>
-                                <p:cond delay="0"/>
-                              </p:stCondLst>
-                            </p:cTn>
-                            <p:tgtEl>
-                              <p:spTgt spid="107"/>
-                            </p:tgtEl>
-                            <p:attrNameLst>
-                              <p:attrName>style.visibility</p:attrName>
-                            </p:attrNameLst>
-                          </p:cBhvr>
-                          <p:to>
-                            <p:strVal val="visible"/>
-                          </p:to>
-                        </p:set>
-                        <p:animEffect transition="in" filter="fade">
-                          <p:cBhvr>
-                            <p:cTn id="101" dur="500"/>
-                            <p:tgtEl>
-                              <p:spTgt spid="107"/>
-                            </p:tgtEl>
-                          </p:cBhvr>
-                        </p:animEffect>
-                      </p:childTnLst>
-                    </p:cTn>
-                  </p:par>
-                  <p:par>
-                    <p:cTn id="7" presetID="10" presetClass="entr" presetSubtype="0" fill="hold" nodeType="afterPrev">
-                      <p:stCondLst>
-                        <p:cond delay="600"/>
-                      </p:stCondLst>
-                      <p:childTnLst>
-                        <p:set>
-                          <p:cBhvr>
-                            <p:cTn id="8" dur="1" fill="hold">
-                              <p:stCondLst>
-                                <p:cond delay="0"/>
-                              </p:stCondLst>
-                            </p:cTn>
-                            <p:tgtEl>
-                              <p:spTgt spid="108"/>
-                            </p:tgtEl>
-                            <p:attrNameLst>
-                              <p:attrName>style.visibility</p:attrName>
-                            </p:attrNameLst>
-                          </p:cBhvr>
-                          <p:to>
-                            <p:strVal val="visible"/>
-                          </p:to>
-                        </p:set>
-                        <p:animEffect transition="in" filter="fade">
-                          <p:cBhvr>
-                            <p:cTn id="102" dur="500"/>
-                            <p:tgtEl>
-                              <p:spTgt spid="108"/>
-                            </p:tgtEl>
-                          </p:cBhvr>
-                        </p:animEffect>
-                      </p:childTnLst>
-                    </p:cTn>
-                  </p:par>
-                  <p:par>
-                    <p:cTn id="9" presetID="10" presetClass="entr" presetSubtype="0" fill="hold" nodeType="afterPrev">
-                      <p:stCondLst>
-                        <p:cond delay="900"/>
-                      </p:stCondLst>
-                      <p:childTnLst>
-                        <p:set>
-                          <p:cBhvr>
-                            <p:cTn id="10" dur="1" fill="hold">
-                              <p:stCondLst>
-                                <p:cond delay="0"/>
-                              </p:stCondLst>
-                            </p:cTn>
-                            <p:tgtEl>
-                              <p:spTgt spid="109"/>
-                            </p:tgtEl>
-                            <p:attrNameLst>
-                              <p:attrName>style.visibility</p:attrName>
-                            </p:attrNameLst>
-                          </p:cBhvr>
-                          <p:to>
-                            <p:strVal val="visible"/>
-                          </p:to>
-                        </p:set>
-                        <p:animEffect transition="in" filter="fade">
-                          <p:cBhvr>
-                            <p:cTn id="103" dur="500"/>
-                            <p:tgtEl>
-                              <p:spTgt spid="109"/>
-                            </p:tgtEl>
-                          </p:cBhvr>
-                        </p:animEffect>
-                      </p:childTnLst>
-                    </p:cTn>
-                  </p:par>
-                  <p:par>
-                    <p:cTn id="11" presetID="10" presetClass="entr" presetSubtype="0" fill="hold" nodeType="afterPrev">
-                      <p:stCondLst>
-                        <p:cond delay="1200"/>
-                      </p:stCondLst>
-                      <p:childTnLst>
-                        <p:set>
-                          <p:cBhvr>
-                            <p:cTn id="12" dur="1" fill="hold">
-                              <p:stCondLst>
-                                <p:cond delay="0"/>
-                              </p:stCondLst>
-                            </p:cTn>
-                            <p:tgtEl>
-                              <p:spTgt spid="110"/>
-                            </p:tgtEl>
-                            <p:attrNameLst>
-                              <p:attrName>style.visibility</p:attrName>
-                            </p:attrNameLst>
-                          </p:cBhvr>
-                          <p:to>
-                            <p:strVal val="visible"/>
-                          </p:to>
-                        </p:set>
-                        <p:animEffect transition="in" filter="fade">
-                          <p:cBhvr>
-                            <p:cTn id="104" dur="500"/>
-                            <p:tgtEl>
-                              <p:spTgt spid="110"/>
-                            </p:tgtEl>
-                          </p:cBhvr>
-                        </p:animEffect>
-                      </p:childTnLst>
-                    </p:cTn>
-                  </p:par>
-                </p:childTnLst>
-              </p:cTn>
-              <p:prevCondLst>
-                <p:cond evt="onPrev" delay="0">
-                  <p:tgtEl>
-                    <p:sldTgt/>
-                  </p:tgtEl>
-                </p:cond>
-              </p:prevCondLst>
-              <p:nextCondLst>
-                <p:cond evt="onNext" delay="0">
-                  <p:tgtEl>
-                    <p:sldTgt/>
-                  </p:tgtEl>
-                </p:cond>
-              </p:nextCondLst>
-            </p:seq>
-          </p:childTnLst>
-        </p:cTn>
-      </p:par>
-    </p:tnLst>
-  </p:timing>
 </p:sld>
 </file>
 
@@ -38103,246 +35678,6 @@
   <p:transition spd="med" advClick="1">
     <p:wipe dir="l"/>
   </p:transition>
-  <p:timing>
-    <p:tnLst>
-      <p:par>
-        <p:cTn id="1" dur="indefinite" restart="never" nodeType="tmRoot">
-          <p:childTnLst>
-            <p:seq concurrent="1" nextAc="seek">
-              <p:cTn id="2" dur="indefinite" nodeType="mainSeq">
-                <p:childTnLst>
-                  <p:par>
-                    <p:cTn id="3" presetID="10" presetClass="entr" presetSubtype="0" fill="hold" nodeType="afterPrev">
-                      <p:stCondLst>
-                        <p:cond delay="0"/>
-                      </p:stCondLst>
-                      <p:childTnLst>
-                        <p:set>
-                          <p:cBhvr>
-                            <p:cTn id="4" dur="1" fill="hold">
-                              <p:stCondLst>
-                                <p:cond delay="0"/>
-                              </p:stCondLst>
-                            </p:cTn>
-                            <p:tgtEl>
-                              <p:spTgt spid="429"/>
-                            </p:tgtEl>
-                            <p:attrNameLst>
-                              <p:attrName>style.visibility</p:attrName>
-                            </p:attrNameLst>
-                          </p:cBhvr>
-                          <p:to>
-                            <p:strVal val="visible"/>
-                          </p:to>
-                        </p:set>
-                        <p:animEffect transition="in" filter="fade">
-                          <p:cBhvr>
-                            <p:cTn id="100" dur="500"/>
-                            <p:tgtEl>
-                              <p:spTgt spid="429"/>
-                            </p:tgtEl>
-                          </p:cBhvr>
-                        </p:animEffect>
-                      </p:childTnLst>
-                    </p:cTn>
-                  </p:par>
-                  <p:par>
-                    <p:cTn id="5" presetID="10" presetClass="entr" presetSubtype="0" fill="hold" nodeType="afterPrev">
-                      <p:stCondLst>
-                        <p:cond delay="300"/>
-                      </p:stCondLst>
-                      <p:childTnLst>
-                        <p:set>
-                          <p:cBhvr>
-                            <p:cTn id="6" dur="1" fill="hold">
-                              <p:stCondLst>
-                                <p:cond delay="0"/>
-                              </p:stCondLst>
-                            </p:cTn>
-                            <p:tgtEl>
-                              <p:spTgt spid="430"/>
-                            </p:tgtEl>
-                            <p:attrNameLst>
-                              <p:attrName>style.visibility</p:attrName>
-                            </p:attrNameLst>
-                          </p:cBhvr>
-                          <p:to>
-                            <p:strVal val="visible"/>
-                          </p:to>
-                        </p:set>
-                        <p:animEffect transition="in" filter="fade">
-                          <p:cBhvr>
-                            <p:cTn id="101" dur="500"/>
-                            <p:tgtEl>
-                              <p:spTgt spid="430"/>
-                            </p:tgtEl>
-                          </p:cBhvr>
-                        </p:animEffect>
-                      </p:childTnLst>
-                    </p:cTn>
-                  </p:par>
-                  <p:par>
-                    <p:cTn id="7" presetID="10" presetClass="entr" presetSubtype="0" fill="hold" nodeType="afterPrev">
-                      <p:stCondLst>
-                        <p:cond delay="600"/>
-                      </p:stCondLst>
-                      <p:childTnLst>
-                        <p:set>
-                          <p:cBhvr>
-                            <p:cTn id="8" dur="1" fill="hold">
-                              <p:stCondLst>
-                                <p:cond delay="0"/>
-                              </p:stCondLst>
-                            </p:cTn>
-                            <p:tgtEl>
-                              <p:spTgt spid="431"/>
-                            </p:tgtEl>
-                            <p:attrNameLst>
-                              <p:attrName>style.visibility</p:attrName>
-                            </p:attrNameLst>
-                          </p:cBhvr>
-                          <p:to>
-                            <p:strVal val="visible"/>
-                          </p:to>
-                        </p:set>
-                        <p:animEffect transition="in" filter="fade">
-                          <p:cBhvr>
-                            <p:cTn id="102" dur="500"/>
-                            <p:tgtEl>
-                              <p:spTgt spid="431"/>
-                            </p:tgtEl>
-                          </p:cBhvr>
-                        </p:animEffect>
-                      </p:childTnLst>
-                    </p:cTn>
-                  </p:par>
-                  <p:par>
-                    <p:cTn id="9" presetID="10" presetClass="entr" presetSubtype="0" fill="hold" nodeType="afterPrev">
-                      <p:stCondLst>
-                        <p:cond delay="900"/>
-                      </p:stCondLst>
-                      <p:childTnLst>
-                        <p:set>
-                          <p:cBhvr>
-                            <p:cTn id="10" dur="1" fill="hold">
-                              <p:stCondLst>
-                                <p:cond delay="0"/>
-                              </p:stCondLst>
-                            </p:cTn>
-                            <p:tgtEl>
-                              <p:spTgt spid="432"/>
-                            </p:tgtEl>
-                            <p:attrNameLst>
-                              <p:attrName>style.visibility</p:attrName>
-                            </p:attrNameLst>
-                          </p:cBhvr>
-                          <p:to>
-                            <p:strVal val="visible"/>
-                          </p:to>
-                        </p:set>
-                        <p:animEffect transition="in" filter="fade">
-                          <p:cBhvr>
-                            <p:cTn id="103" dur="500"/>
-                            <p:tgtEl>
-                              <p:spTgt spid="432"/>
-                            </p:tgtEl>
-                          </p:cBhvr>
-                        </p:animEffect>
-                      </p:childTnLst>
-                    </p:cTn>
-                  </p:par>
-                  <p:par>
-                    <p:cTn id="11" presetID="10" presetClass="entr" presetSubtype="0" fill="hold" nodeType="afterPrev">
-                      <p:stCondLst>
-                        <p:cond delay="1200"/>
-                      </p:stCondLst>
-                      <p:childTnLst>
-                        <p:set>
-                          <p:cBhvr>
-                            <p:cTn id="12" dur="1" fill="hold">
-                              <p:stCondLst>
-                                <p:cond delay="0"/>
-                              </p:stCondLst>
-                            </p:cTn>
-                            <p:tgtEl>
-                              <p:spTgt spid="433"/>
-                            </p:tgtEl>
-                            <p:attrNameLst>
-                              <p:attrName>style.visibility</p:attrName>
-                            </p:attrNameLst>
-                          </p:cBhvr>
-                          <p:to>
-                            <p:strVal val="visible"/>
-                          </p:to>
-                        </p:set>
-                        <p:animEffect transition="in" filter="fade">
-                          <p:cBhvr>
-                            <p:cTn id="104" dur="500"/>
-                            <p:tgtEl>
-                              <p:spTgt spid="433"/>
-                            </p:tgtEl>
-                          </p:cBhvr>
-                        </p:animEffect>
-                      </p:childTnLst>
-                    </p:cTn>
-                  </p:par>
-                  <p:par>
-                    <p:cTn id="13" presetID="10" presetClass="entr" presetSubtype="0" fill="hold" nodeType="afterPrev">
-                      <p:stCondLst>
-                        <p:cond delay="1500"/>
-                      </p:stCondLst>
-                      <p:childTnLst>
-                        <p:set>
-                          <p:cBhvr>
-                            <p:cTn id="14" dur="1" fill="hold">
-                              <p:stCondLst>
-                                <p:cond delay="0"/>
-                              </p:stCondLst>
-                            </p:cTn>
-                            <p:tgtEl>
-                              <p:spTgt spid="434"/>
-                            </p:tgtEl>
-                            <p:attrNameLst>
-                              <p:attrName>style.visibility</p:attrName>
-                            </p:attrNameLst>
-                          </p:cBhvr>
-                          <p:to>
-                            <p:strVal val="visible"/>
-                          </p:to>
-                        </p:set>
-                        <p:animEffect transition="in" filter="fade">
-                          <p:cBhvr>
-                            <p:cTn id="105" dur="500"/>
-                            <p:tgtEl>
-                              <p:spTgt spid="434"/>
-                            </p:tgtEl>
-                          </p:cBhvr>
-                        </p:animEffect>
-                      </p:childTnLst>
-                    </p:cTn>
-                  </p:par>
-                </p:childTnLst>
-              </p:cTn>
-              <p:prevCondLst>
-                <p:cond evt="onPrev" delay="0">
-                  <p:tgtEl>
-                    <p:sldTgt/>
-                  </p:tgtEl>
-                </p:cond>
-              </p:prevCondLst>
-              <p:nextCondLst>
-                <p:cond evt="onNext" delay="0">
-                  <p:tgtEl>
-                    <p:sldTgt/>
-                  </p:tgtEl>
-                </p:cond>
-              </p:nextCondLst>
-            </p:seq>
-          </p:childTnLst>
-        </p:cTn>
-      </p:par>
-    </p:tnLst>
-  </p:timing>
 </p:sld>
 </file>
 
@@ -39306,246 +36641,6 @@
   <p:transition spd="med" advClick="1">
     <p:wipe dir="l"/>
   </p:transition>
-  <p:timing>
-    <p:tnLst>
-      <p:par>
-        <p:cTn id="1" dur="indefinite" restart="never" nodeType="tmRoot">
-          <p:childTnLst>
-            <p:seq concurrent="1" nextAc="seek">
-              <p:cTn id="2" dur="indefinite" nodeType="mainSeq">
-                <p:childTnLst>
-                  <p:par>
-                    <p:cTn id="3" presetID="10" presetClass="entr" presetSubtype="0" fill="hold" nodeType="afterPrev">
-                      <p:stCondLst>
-                        <p:cond delay="0"/>
-                      </p:stCondLst>
-                      <p:childTnLst>
-                        <p:set>
-                          <p:cBhvr>
-                            <p:cTn id="4" dur="1" fill="hold">
-                              <p:stCondLst>
-                                <p:cond delay="0"/>
-                              </p:stCondLst>
-                            </p:cTn>
-                            <p:tgtEl>
-                              <p:spTgt spid="442"/>
-                            </p:tgtEl>
-                            <p:attrNameLst>
-                              <p:attrName>style.visibility</p:attrName>
-                            </p:attrNameLst>
-                          </p:cBhvr>
-                          <p:to>
-                            <p:strVal val="visible"/>
-                          </p:to>
-                        </p:set>
-                        <p:animEffect transition="in" filter="fade">
-                          <p:cBhvr>
-                            <p:cTn id="100" dur="500"/>
-                            <p:tgtEl>
-                              <p:spTgt spid="442"/>
-                            </p:tgtEl>
-                          </p:cBhvr>
-                        </p:animEffect>
-                      </p:childTnLst>
-                    </p:cTn>
-                  </p:par>
-                  <p:par>
-                    <p:cTn id="5" presetID="10" presetClass="entr" presetSubtype="0" fill="hold" nodeType="afterPrev">
-                      <p:stCondLst>
-                        <p:cond delay="300"/>
-                      </p:stCondLst>
-                      <p:childTnLst>
-                        <p:set>
-                          <p:cBhvr>
-                            <p:cTn id="6" dur="1" fill="hold">
-                              <p:stCondLst>
-                                <p:cond delay="0"/>
-                              </p:stCondLst>
-                            </p:cTn>
-                            <p:tgtEl>
-                              <p:spTgt spid="443"/>
-                            </p:tgtEl>
-                            <p:attrNameLst>
-                              <p:attrName>style.visibility</p:attrName>
-                            </p:attrNameLst>
-                          </p:cBhvr>
-                          <p:to>
-                            <p:strVal val="visible"/>
-                          </p:to>
-                        </p:set>
-                        <p:animEffect transition="in" filter="fade">
-                          <p:cBhvr>
-                            <p:cTn id="101" dur="500"/>
-                            <p:tgtEl>
-                              <p:spTgt spid="443"/>
-                            </p:tgtEl>
-                          </p:cBhvr>
-                        </p:animEffect>
-                      </p:childTnLst>
-                    </p:cTn>
-                  </p:par>
-                  <p:par>
-                    <p:cTn id="7" presetID="10" presetClass="entr" presetSubtype="0" fill="hold" nodeType="afterPrev">
-                      <p:stCondLst>
-                        <p:cond delay="600"/>
-                      </p:stCondLst>
-                      <p:childTnLst>
-                        <p:set>
-                          <p:cBhvr>
-                            <p:cTn id="8" dur="1" fill="hold">
-                              <p:stCondLst>
-                                <p:cond delay="0"/>
-                              </p:stCondLst>
-                            </p:cTn>
-                            <p:tgtEl>
-                              <p:spTgt spid="444"/>
-                            </p:tgtEl>
-                            <p:attrNameLst>
-                              <p:attrName>style.visibility</p:attrName>
-                            </p:attrNameLst>
-                          </p:cBhvr>
-                          <p:to>
-                            <p:strVal val="visible"/>
-                          </p:to>
-                        </p:set>
-                        <p:animEffect transition="in" filter="fade">
-                          <p:cBhvr>
-                            <p:cTn id="102" dur="500"/>
-                            <p:tgtEl>
-                              <p:spTgt spid="444"/>
-                            </p:tgtEl>
-                          </p:cBhvr>
-                        </p:animEffect>
-                      </p:childTnLst>
-                    </p:cTn>
-                  </p:par>
-                  <p:par>
-                    <p:cTn id="9" presetID="10" presetClass="entr" presetSubtype="0" fill="hold" nodeType="afterPrev">
-                      <p:stCondLst>
-                        <p:cond delay="900"/>
-                      </p:stCondLst>
-                      <p:childTnLst>
-                        <p:set>
-                          <p:cBhvr>
-                            <p:cTn id="10" dur="1" fill="hold">
-                              <p:stCondLst>
-                                <p:cond delay="0"/>
-                              </p:stCondLst>
-                            </p:cTn>
-                            <p:tgtEl>
-                              <p:spTgt spid="445"/>
-                            </p:tgtEl>
-                            <p:attrNameLst>
-                              <p:attrName>style.visibility</p:attrName>
-                            </p:attrNameLst>
-                          </p:cBhvr>
-                          <p:to>
-                            <p:strVal val="visible"/>
-                          </p:to>
-                        </p:set>
-                        <p:animEffect transition="in" filter="fade">
-                          <p:cBhvr>
-                            <p:cTn id="103" dur="500"/>
-                            <p:tgtEl>
-                              <p:spTgt spid="445"/>
-                            </p:tgtEl>
-                          </p:cBhvr>
-                        </p:animEffect>
-                      </p:childTnLst>
-                    </p:cTn>
-                  </p:par>
-                  <p:par>
-                    <p:cTn id="11" presetID="10" presetClass="entr" presetSubtype="0" fill="hold" nodeType="afterPrev">
-                      <p:stCondLst>
-                        <p:cond delay="1200"/>
-                      </p:stCondLst>
-                      <p:childTnLst>
-                        <p:set>
-                          <p:cBhvr>
-                            <p:cTn id="12" dur="1" fill="hold">
-                              <p:stCondLst>
-                                <p:cond delay="0"/>
-                              </p:stCondLst>
-                            </p:cTn>
-                            <p:tgtEl>
-                              <p:spTgt spid="446"/>
-                            </p:tgtEl>
-                            <p:attrNameLst>
-                              <p:attrName>style.visibility</p:attrName>
-                            </p:attrNameLst>
-                          </p:cBhvr>
-                          <p:to>
-                            <p:strVal val="visible"/>
-                          </p:to>
-                        </p:set>
-                        <p:animEffect transition="in" filter="fade">
-                          <p:cBhvr>
-                            <p:cTn id="104" dur="500"/>
-                            <p:tgtEl>
-                              <p:spTgt spid="446"/>
-                            </p:tgtEl>
-                          </p:cBhvr>
-                        </p:animEffect>
-                      </p:childTnLst>
-                    </p:cTn>
-                  </p:par>
-                  <p:par>
-                    <p:cTn id="13" presetID="10" presetClass="entr" presetSubtype="0" fill="hold" nodeType="afterPrev">
-                      <p:stCondLst>
-                        <p:cond delay="1500"/>
-                      </p:stCondLst>
-                      <p:childTnLst>
-                        <p:set>
-                          <p:cBhvr>
-                            <p:cTn id="14" dur="1" fill="hold">
-                              <p:stCondLst>
-                                <p:cond delay="0"/>
-                              </p:stCondLst>
-                            </p:cTn>
-                            <p:tgtEl>
-                              <p:spTgt spid="447"/>
-                            </p:tgtEl>
-                            <p:attrNameLst>
-                              <p:attrName>style.visibility</p:attrName>
-                            </p:attrNameLst>
-                          </p:cBhvr>
-                          <p:to>
-                            <p:strVal val="visible"/>
-                          </p:to>
-                        </p:set>
-                        <p:animEffect transition="in" filter="fade">
-                          <p:cBhvr>
-                            <p:cTn id="105" dur="500"/>
-                            <p:tgtEl>
-                              <p:spTgt spid="447"/>
-                            </p:tgtEl>
-                          </p:cBhvr>
-                        </p:animEffect>
-                      </p:childTnLst>
-                    </p:cTn>
-                  </p:par>
-                </p:childTnLst>
-              </p:cTn>
-              <p:prevCondLst>
-                <p:cond evt="onPrev" delay="0">
-                  <p:tgtEl>
-                    <p:sldTgt/>
-                  </p:tgtEl>
-                </p:cond>
-              </p:prevCondLst>
-              <p:nextCondLst>
-                <p:cond evt="onNext" delay="0">
-                  <p:tgtEl>
-                    <p:sldTgt/>
-                  </p:tgtEl>
-                </p:cond>
-              </p:nextCondLst>
-            </p:seq>
-          </p:childTnLst>
-        </p:cTn>
-      </p:par>
-    </p:tnLst>
-  </p:timing>
 </p:sld>
 </file>
 
@@ -40100,246 +37195,6 @@
   <p:transition spd="med" advClick="1">
     <p:wipe dir="l"/>
   </p:transition>
-  <p:timing>
-    <p:tnLst>
-      <p:par>
-        <p:cTn id="1" dur="indefinite" restart="never" nodeType="tmRoot">
-          <p:childTnLst>
-            <p:seq concurrent="1" nextAc="seek">
-              <p:cTn id="2" dur="indefinite" nodeType="mainSeq">
-                <p:childTnLst>
-                  <p:par>
-                    <p:cTn id="3" presetID="10" presetClass="entr" presetSubtype="0" fill="hold" nodeType="afterPrev">
-                      <p:stCondLst>
-                        <p:cond delay="0"/>
-                      </p:stCondLst>
-                      <p:childTnLst>
-                        <p:set>
-                          <p:cBhvr>
-                            <p:cTn id="4" dur="1" fill="hold">
-                              <p:stCondLst>
-                                <p:cond delay="0"/>
-                              </p:stCondLst>
-                            </p:cTn>
-                            <p:tgtEl>
-                              <p:spTgt spid="455"/>
-                            </p:tgtEl>
-                            <p:attrNameLst>
-                              <p:attrName>style.visibility</p:attrName>
-                            </p:attrNameLst>
-                          </p:cBhvr>
-                          <p:to>
-                            <p:strVal val="visible"/>
-                          </p:to>
-                        </p:set>
-                        <p:animEffect transition="in" filter="fade">
-                          <p:cBhvr>
-                            <p:cTn id="100" dur="500"/>
-                            <p:tgtEl>
-                              <p:spTgt spid="455"/>
-                            </p:tgtEl>
-                          </p:cBhvr>
-                        </p:animEffect>
-                      </p:childTnLst>
-                    </p:cTn>
-                  </p:par>
-                  <p:par>
-                    <p:cTn id="5" presetID="10" presetClass="entr" presetSubtype="0" fill="hold" nodeType="afterPrev">
-                      <p:stCondLst>
-                        <p:cond delay="300"/>
-                      </p:stCondLst>
-                      <p:childTnLst>
-                        <p:set>
-                          <p:cBhvr>
-                            <p:cTn id="6" dur="1" fill="hold">
-                              <p:stCondLst>
-                                <p:cond delay="0"/>
-                              </p:stCondLst>
-                            </p:cTn>
-                            <p:tgtEl>
-                              <p:spTgt spid="456"/>
-                            </p:tgtEl>
-                            <p:attrNameLst>
-                              <p:attrName>style.visibility</p:attrName>
-                            </p:attrNameLst>
-                          </p:cBhvr>
-                          <p:to>
-                            <p:strVal val="visible"/>
-                          </p:to>
-                        </p:set>
-                        <p:animEffect transition="in" filter="fade">
-                          <p:cBhvr>
-                            <p:cTn id="101" dur="500"/>
-                            <p:tgtEl>
-                              <p:spTgt spid="456"/>
-                            </p:tgtEl>
-                          </p:cBhvr>
-                        </p:animEffect>
-                      </p:childTnLst>
-                    </p:cTn>
-                  </p:par>
-                  <p:par>
-                    <p:cTn id="7" presetID="10" presetClass="entr" presetSubtype="0" fill="hold" nodeType="afterPrev">
-                      <p:stCondLst>
-                        <p:cond delay="600"/>
-                      </p:stCondLst>
-                      <p:childTnLst>
-                        <p:set>
-                          <p:cBhvr>
-                            <p:cTn id="8" dur="1" fill="hold">
-                              <p:stCondLst>
-                                <p:cond delay="0"/>
-                              </p:stCondLst>
-                            </p:cTn>
-                            <p:tgtEl>
-                              <p:spTgt spid="457"/>
-                            </p:tgtEl>
-                            <p:attrNameLst>
-                              <p:attrName>style.visibility</p:attrName>
-                            </p:attrNameLst>
-                          </p:cBhvr>
-                          <p:to>
-                            <p:strVal val="visible"/>
-                          </p:to>
-                        </p:set>
-                        <p:animEffect transition="in" filter="fade">
-                          <p:cBhvr>
-                            <p:cTn id="102" dur="500"/>
-                            <p:tgtEl>
-                              <p:spTgt spid="457"/>
-                            </p:tgtEl>
-                          </p:cBhvr>
-                        </p:animEffect>
-                      </p:childTnLst>
-                    </p:cTn>
-                  </p:par>
-                  <p:par>
-                    <p:cTn id="9" presetID="10" presetClass="entr" presetSubtype="0" fill="hold" nodeType="afterPrev">
-                      <p:stCondLst>
-                        <p:cond delay="900"/>
-                      </p:stCondLst>
-                      <p:childTnLst>
-                        <p:set>
-                          <p:cBhvr>
-                            <p:cTn id="10" dur="1" fill="hold">
-                              <p:stCondLst>
-                                <p:cond delay="0"/>
-                              </p:stCondLst>
-                            </p:cTn>
-                            <p:tgtEl>
-                              <p:spTgt spid="458"/>
-                            </p:tgtEl>
-                            <p:attrNameLst>
-                              <p:attrName>style.visibility</p:attrName>
-                            </p:attrNameLst>
-                          </p:cBhvr>
-                          <p:to>
-                            <p:strVal val="visible"/>
-                          </p:to>
-                        </p:set>
-                        <p:animEffect transition="in" filter="fade">
-                          <p:cBhvr>
-                            <p:cTn id="103" dur="500"/>
-                            <p:tgtEl>
-                              <p:spTgt spid="458"/>
-                            </p:tgtEl>
-                          </p:cBhvr>
-                        </p:animEffect>
-                      </p:childTnLst>
-                    </p:cTn>
-                  </p:par>
-                  <p:par>
-                    <p:cTn id="11" presetID="10" presetClass="entr" presetSubtype="0" fill="hold" nodeType="afterPrev">
-                      <p:stCondLst>
-                        <p:cond delay="1200"/>
-                      </p:stCondLst>
-                      <p:childTnLst>
-                        <p:set>
-                          <p:cBhvr>
-                            <p:cTn id="12" dur="1" fill="hold">
-                              <p:stCondLst>
-                                <p:cond delay="0"/>
-                              </p:stCondLst>
-                            </p:cTn>
-                            <p:tgtEl>
-                              <p:spTgt spid="459"/>
-                            </p:tgtEl>
-                            <p:attrNameLst>
-                              <p:attrName>style.visibility</p:attrName>
-                            </p:attrNameLst>
-                          </p:cBhvr>
-                          <p:to>
-                            <p:strVal val="visible"/>
-                          </p:to>
-                        </p:set>
-                        <p:animEffect transition="in" filter="fade">
-                          <p:cBhvr>
-                            <p:cTn id="104" dur="500"/>
-                            <p:tgtEl>
-                              <p:spTgt spid="459"/>
-                            </p:tgtEl>
-                          </p:cBhvr>
-                        </p:animEffect>
-                      </p:childTnLst>
-                    </p:cTn>
-                  </p:par>
-                  <p:par>
-                    <p:cTn id="13" presetID="10" presetClass="entr" presetSubtype="0" fill="hold" nodeType="afterPrev">
-                      <p:stCondLst>
-                        <p:cond delay="1500"/>
-                      </p:stCondLst>
-                      <p:childTnLst>
-                        <p:set>
-                          <p:cBhvr>
-                            <p:cTn id="14" dur="1" fill="hold">
-                              <p:stCondLst>
-                                <p:cond delay="0"/>
-                              </p:stCondLst>
-                            </p:cTn>
-                            <p:tgtEl>
-                              <p:spTgt spid="460"/>
-                            </p:tgtEl>
-                            <p:attrNameLst>
-                              <p:attrName>style.visibility</p:attrName>
-                            </p:attrNameLst>
-                          </p:cBhvr>
-                          <p:to>
-                            <p:strVal val="visible"/>
-                          </p:to>
-                        </p:set>
-                        <p:animEffect transition="in" filter="fade">
-                          <p:cBhvr>
-                            <p:cTn id="105" dur="500"/>
-                            <p:tgtEl>
-                              <p:spTgt spid="460"/>
-                            </p:tgtEl>
-                          </p:cBhvr>
-                        </p:animEffect>
-                      </p:childTnLst>
-                    </p:cTn>
-                  </p:par>
-                </p:childTnLst>
-              </p:cTn>
-              <p:prevCondLst>
-                <p:cond evt="onPrev" delay="0">
-                  <p:tgtEl>
-                    <p:sldTgt/>
-                  </p:tgtEl>
-                </p:cond>
-              </p:prevCondLst>
-              <p:nextCondLst>
-                <p:cond evt="onNext" delay="0">
-                  <p:tgtEl>
-                    <p:sldTgt/>
-                  </p:tgtEl>
-                </p:cond>
-              </p:nextCondLst>
-            </p:seq>
-          </p:childTnLst>
-        </p:cTn>
-      </p:par>
-    </p:tnLst>
-  </p:timing>
 </p:sld>
 </file>
 
@@ -40535,176 +37390,6 @@
   <p:transition spd="med" advClick="1">
     <p:fade/>
   </p:transition>
-  <p:timing>
-    <p:tnLst>
-      <p:par>
-        <p:cTn id="1" dur="indefinite" restart="never" nodeType="tmRoot">
-          <p:childTnLst>
-            <p:seq concurrent="1" nextAc="seek">
-              <p:cTn id="2" dur="indefinite" nodeType="mainSeq">
-                <p:childTnLst>
-                  <p:par>
-                    <p:cTn id="3" presetID="10" presetClass="entr" presetSubtype="0" fill="hold" nodeType="afterPrev">
-                      <p:stCondLst>
-                        <p:cond delay="0"/>
-                      </p:stCondLst>
-                      <p:childTnLst>
-                        <p:set>
-                          <p:cBhvr>
-                            <p:cTn id="4" dur="1" fill="hold">
-                              <p:stCondLst>
-                                <p:cond delay="0"/>
-                              </p:stCondLst>
-                            </p:cTn>
-                            <p:tgtEl>
-                              <p:spTgt spid="468"/>
-                            </p:tgtEl>
-                            <p:attrNameLst>
-                              <p:attrName>style.visibility</p:attrName>
-                            </p:attrNameLst>
-                          </p:cBhvr>
-                          <p:to>
-                            <p:strVal val="visible"/>
-                          </p:to>
-                        </p:set>
-                        <p:animEffect transition="in" filter="fade">
-                          <p:cBhvr>
-                            <p:cTn id="100" dur="500"/>
-                            <p:tgtEl>
-                              <p:spTgt spid="468"/>
-                            </p:tgtEl>
-                          </p:cBhvr>
-                        </p:animEffect>
-                      </p:childTnLst>
-                    </p:cTn>
-                  </p:par>
-                  <p:par>
-                    <p:cTn id="5" presetID="10" presetClass="entr" presetSubtype="0" fill="hold" nodeType="afterPrev">
-                      <p:stCondLst>
-                        <p:cond delay="300"/>
-                      </p:stCondLst>
-                      <p:childTnLst>
-                        <p:set>
-                          <p:cBhvr>
-                            <p:cTn id="6" dur="1" fill="hold">
-                              <p:stCondLst>
-                                <p:cond delay="0"/>
-                              </p:stCondLst>
-                            </p:cTn>
-                            <p:tgtEl>
-                              <p:spTgt spid="469"/>
-                            </p:tgtEl>
-                            <p:attrNameLst>
-                              <p:attrName>style.visibility</p:attrName>
-                            </p:attrNameLst>
-                          </p:cBhvr>
-                          <p:to>
-                            <p:strVal val="visible"/>
-                          </p:to>
-                        </p:set>
-                        <p:animEffect transition="in" filter="fade">
-                          <p:cBhvr>
-                            <p:cTn id="101" dur="500"/>
-                            <p:tgtEl>
-                              <p:spTgt spid="469"/>
-                            </p:tgtEl>
-                          </p:cBhvr>
-                        </p:animEffect>
-                      </p:childTnLst>
-                    </p:cTn>
-                  </p:par>
-                  <p:par>
-                    <p:cTn id="7" presetID="10" presetClass="entr" presetSubtype="0" fill="hold" nodeType="afterPrev">
-                      <p:stCondLst>
-                        <p:cond delay="600"/>
-                      </p:stCondLst>
-                      <p:childTnLst>
-                        <p:set>
-                          <p:cBhvr>
-                            <p:cTn id="8" dur="1" fill="hold">
-                              <p:stCondLst>
-                                <p:cond delay="0"/>
-                              </p:stCondLst>
-                            </p:cTn>
-                            <p:tgtEl>
-                              <p:spTgt spid="470"/>
-                            </p:tgtEl>
-                            <p:attrNameLst>
-                              <p:attrName>style.visibility</p:attrName>
-                            </p:attrNameLst>
-                          </p:cBhvr>
-                          <p:to>
-                            <p:strVal val="visible"/>
-                          </p:to>
-                        </p:set>
-                        <p:animEffect transition="in" filter="fade">
-                          <p:cBhvr>
-                            <p:cTn id="102" dur="500"/>
-                            <p:tgtEl>
-                              <p:spTgt spid="470"/>
-                            </p:tgtEl>
-                          </p:cBhvr>
-                        </p:animEffect>
-                      </p:childTnLst>
-                    </p:cTn>
-                  </p:par>
-                  <p:par>
-                    <p:cTn id="9" presetID="10" presetClass="entr" presetSubtype="0" fill="hold" nodeType="afterPrev">
-                      <p:stCondLst>
-                        <p:cond delay="900"/>
-                      </p:stCondLst>
-                      <p:childTnLst>
-                        <p:set>
-                          <p:cBhvr>
-                            <p:cTn id="10" dur="1" fill="hold">
-                              <p:stCondLst>
-                                <p:cond delay="0"/>
-                              </p:stCondLst>
-                            </p:cTn>
-                            <p:tgtEl>
-                              <p:spTgt spid="471"/>
-                            </p:tgtEl>
-                            <p:attrNameLst>
-                              <p:attrName>style.visibility</p:attrName>
-                            </p:attrNameLst>
-                          </p:cBhvr>
-                          <p:to>
-                            <p:strVal val="visible"/>
-                          </p:to>
-                        </p:set>
-                        <p:animEffect transition="in" filter="fade">
-                          <p:cBhvr>
-                            <p:cTn id="103" dur="500"/>
-                            <p:tgtEl>
-                              <p:spTgt spid="471"/>
-                            </p:tgtEl>
-                          </p:cBhvr>
-                        </p:animEffect>
-                      </p:childTnLst>
-                    </p:cTn>
-                  </p:par>
-                </p:childTnLst>
-              </p:cTn>
-              <p:prevCondLst>
-                <p:cond evt="onPrev" delay="0">
-                  <p:tgtEl>
-                    <p:sldTgt/>
-                  </p:tgtEl>
-                </p:cond>
-              </p:prevCondLst>
-              <p:nextCondLst>
-                <p:cond evt="onNext" delay="0">
-                  <p:tgtEl>
-                    <p:sldTgt/>
-                  </p:tgtEl>
-                </p:cond>
-              </p:nextCondLst>
-            </p:seq>
-          </p:childTnLst>
-        </p:cTn>
-      </p:par>
-    </p:tnLst>
-  </p:timing>
 </p:sld>
 </file>
 
@@ -40985,211 +37670,6 @@
   <p:transition spd="med" advClick="1">
     <p:fade/>
   </p:transition>
-  <p:timing>
-    <p:tnLst>
-      <p:par>
-        <p:cTn id="1" dur="indefinite" restart="never" nodeType="tmRoot">
-          <p:childTnLst>
-            <p:seq concurrent="1" nextAc="seek">
-              <p:cTn id="2" dur="indefinite" nodeType="mainSeq">
-                <p:childTnLst>
-                  <p:par>
-                    <p:cTn id="3" presetID="10" presetClass="entr" presetSubtype="0" fill="hold" nodeType="afterPrev">
-                      <p:stCondLst>
-                        <p:cond delay="0"/>
-                      </p:stCondLst>
-                      <p:childTnLst>
-                        <p:set>
-                          <p:cBhvr>
-                            <p:cTn id="4" dur="1" fill="hold">
-                              <p:stCondLst>
-                                <p:cond delay="0"/>
-                              </p:stCondLst>
-                            </p:cTn>
-                            <p:tgtEl>
-                              <p:spTgt spid="115"/>
-                            </p:tgtEl>
-                            <p:attrNameLst>
-                              <p:attrName>style.visibility</p:attrName>
-                            </p:attrNameLst>
-                          </p:cBhvr>
-                          <p:to>
-                            <p:strVal val="visible"/>
-                          </p:to>
-                        </p:set>
-                        <p:animEffect transition="in" filter="fade">
-                          <p:cBhvr>
-                            <p:cTn id="100" dur="500"/>
-                            <p:tgtEl>
-                              <p:spTgt spid="115"/>
-                            </p:tgtEl>
-                          </p:cBhvr>
-                        </p:animEffect>
-                      </p:childTnLst>
-                    </p:cTn>
-                  </p:par>
-                  <p:par>
-                    <p:cTn id="5" presetID="10" presetClass="entr" presetSubtype="0" fill="hold" nodeType="afterPrev">
-                      <p:stCondLst>
-                        <p:cond delay="300"/>
-                      </p:stCondLst>
-                      <p:childTnLst>
-                        <p:set>
-                          <p:cBhvr>
-                            <p:cTn id="6" dur="1" fill="hold">
-                              <p:stCondLst>
-                                <p:cond delay="0"/>
-                              </p:stCondLst>
-                            </p:cTn>
-                            <p:tgtEl>
-                              <p:spTgt spid="116"/>
-                            </p:tgtEl>
-                            <p:attrNameLst>
-                              <p:attrName>style.visibility</p:attrName>
-                            </p:attrNameLst>
-                          </p:cBhvr>
-                          <p:to>
-                            <p:strVal val="visible"/>
-                          </p:to>
-                        </p:set>
-                        <p:animEffect transition="in" filter="fade">
-                          <p:cBhvr>
-                            <p:cTn id="101" dur="500"/>
-                            <p:tgtEl>
-                              <p:spTgt spid="116"/>
-                            </p:tgtEl>
-                          </p:cBhvr>
-                        </p:animEffect>
-                      </p:childTnLst>
-                    </p:cTn>
-                  </p:par>
-                  <p:par>
-                    <p:cTn id="7" presetID="10" presetClass="entr" presetSubtype="0" fill="hold" nodeType="afterPrev">
-                      <p:stCondLst>
-                        <p:cond delay="600"/>
-                      </p:stCondLst>
-                      <p:childTnLst>
-                        <p:set>
-                          <p:cBhvr>
-                            <p:cTn id="8" dur="1" fill="hold">
-                              <p:stCondLst>
-                                <p:cond delay="0"/>
-                              </p:stCondLst>
-                            </p:cTn>
-                            <p:tgtEl>
-                              <p:spTgt spid="117"/>
-                            </p:tgtEl>
-                            <p:attrNameLst>
-                              <p:attrName>style.visibility</p:attrName>
-                            </p:attrNameLst>
-                          </p:cBhvr>
-                          <p:to>
-                            <p:strVal val="visible"/>
-                          </p:to>
-                        </p:set>
-                        <p:animEffect transition="in" filter="fade">
-                          <p:cBhvr>
-                            <p:cTn id="102" dur="500"/>
-                            <p:tgtEl>
-                              <p:spTgt spid="117"/>
-                            </p:tgtEl>
-                          </p:cBhvr>
-                        </p:animEffect>
-                      </p:childTnLst>
-                    </p:cTn>
-                  </p:par>
-                  <p:par>
-                    <p:cTn id="9" presetID="10" presetClass="entr" presetSubtype="0" fill="hold" nodeType="afterPrev">
-                      <p:stCondLst>
-                        <p:cond delay="900"/>
-                      </p:stCondLst>
-                      <p:childTnLst>
-                        <p:set>
-                          <p:cBhvr>
-                            <p:cTn id="10" dur="1" fill="hold">
-                              <p:stCondLst>
-                                <p:cond delay="0"/>
-                              </p:stCondLst>
-                            </p:cTn>
-                            <p:tgtEl>
-                              <p:spTgt spid="118"/>
-                            </p:tgtEl>
-                            <p:attrNameLst>
-                              <p:attrName>style.visibility</p:attrName>
-                            </p:attrNameLst>
-                          </p:cBhvr>
-                          <p:to>
-                            <p:strVal val="visible"/>
-                          </p:to>
-                        </p:set>
-                        <p:animEffect transition="in" filter="fade">
-                          <p:cBhvr>
-                            <p:cTn id="103" dur="500"/>
-                            <p:tgtEl>
-                              <p:spTgt spid="118"/>
-                            </p:tgtEl>
-                          </p:cBhvr>
-                        </p:animEffect>
-                      </p:childTnLst>
-                    </p:cTn>
-                  </p:par>
-                  <p:par>
-                    <p:cTn id="11" presetID="10" presetClass="entr" presetSubtype="0" fill="hold" nodeType="afterPrev">
-                      <p:stCondLst>
-                        <p:cond delay="1200"/>
-                      </p:stCondLst>
-                      <p:childTnLst>
-                        <p:set>
-                          <p:cBhvr>
-                            <p:cTn id="12" dur="1" fill="hold">
-                              <p:stCondLst>
-                                <p:cond delay="0"/>
-                              </p:stCondLst>
-                            </p:cTn>
-                            <p:tgtEl>
-                              <p:spTgt spid="3"/>
-                            </p:tgtEl>
-                            <p:attrNameLst>
-                              <p:attrName>style.visibility</p:attrName>
-                            </p:attrNameLst>
-                          </p:cBhvr>
-                          <p:to>
-                            <p:strVal val="visible"/>
-                          </p:to>
-                        </p:set>
-                        <p:animEffect transition="in" filter="fade">
-                          <p:cBhvr>
-                            <p:cTn id="104" dur="500"/>
-                            <p:tgtEl>
-                              <p:spTgt spid="3"/>
-                            </p:tgtEl>
-                          </p:cBhvr>
-                        </p:animEffect>
-                      </p:childTnLst>
-                    </p:cTn>
-                  </p:par>
-                </p:childTnLst>
-              </p:cTn>
-              <p:prevCondLst>
-                <p:cond evt="onPrev" delay="0">
-                  <p:tgtEl>
-                    <p:sldTgt/>
-                  </p:tgtEl>
-                </p:cond>
-              </p:prevCondLst>
-              <p:nextCondLst>
-                <p:cond evt="onNext" delay="0">
-                  <p:tgtEl>
-                    <p:sldTgt/>
-                  </p:tgtEl>
-                </p:cond>
-              </p:nextCondLst>
-            </p:seq>
-          </p:childTnLst>
-        </p:cTn>
-      </p:par>
-    </p:tnLst>
-  </p:timing>
 </p:sld>
 </file>
 
@@ -43581,246 +40061,6 @@
   <p:transition spd="med" advClick="1">
     <p:push dir="l"/>
   </p:transition>
-  <p:timing>
-    <p:tnLst>
-      <p:par>
-        <p:cTn id="1" dur="indefinite" restart="never" nodeType="tmRoot">
-          <p:childTnLst>
-            <p:seq concurrent="1" nextAc="seek">
-              <p:cTn id="2" dur="indefinite" nodeType="mainSeq">
-                <p:childTnLst>
-                  <p:par>
-                    <p:cTn id="3" presetID="10" presetClass="entr" presetSubtype="0" fill="hold" nodeType="afterPrev">
-                      <p:stCondLst>
-                        <p:cond delay="0"/>
-                      </p:stCondLst>
-                      <p:childTnLst>
-                        <p:set>
-                          <p:cBhvr>
-                            <p:cTn id="4" dur="1" fill="hold">
-                              <p:stCondLst>
-                                <p:cond delay="0"/>
-                              </p:stCondLst>
-                            </p:cTn>
-                            <p:tgtEl>
-                              <p:spTgt spid="123"/>
-                            </p:tgtEl>
-                            <p:attrNameLst>
-                              <p:attrName>style.visibility</p:attrName>
-                            </p:attrNameLst>
-                          </p:cBhvr>
-                          <p:to>
-                            <p:strVal val="visible"/>
-                          </p:to>
-                        </p:set>
-                        <p:animEffect transition="in" filter="fade">
-                          <p:cBhvr>
-                            <p:cTn id="100" dur="500"/>
-                            <p:tgtEl>
-                              <p:spTgt spid="123"/>
-                            </p:tgtEl>
-                          </p:cBhvr>
-                        </p:animEffect>
-                      </p:childTnLst>
-                    </p:cTn>
-                  </p:par>
-                  <p:par>
-                    <p:cTn id="5" presetID="10" presetClass="entr" presetSubtype="0" fill="hold" nodeType="afterPrev">
-                      <p:stCondLst>
-                        <p:cond delay="300"/>
-                      </p:stCondLst>
-                      <p:childTnLst>
-                        <p:set>
-                          <p:cBhvr>
-                            <p:cTn id="6" dur="1" fill="hold">
-                              <p:stCondLst>
-                                <p:cond delay="0"/>
-                              </p:stCondLst>
-                            </p:cTn>
-                            <p:tgtEl>
-                              <p:spTgt spid="124"/>
-                            </p:tgtEl>
-                            <p:attrNameLst>
-                              <p:attrName>style.visibility</p:attrName>
-                            </p:attrNameLst>
-                          </p:cBhvr>
-                          <p:to>
-                            <p:strVal val="visible"/>
-                          </p:to>
-                        </p:set>
-                        <p:animEffect transition="in" filter="fade">
-                          <p:cBhvr>
-                            <p:cTn id="101" dur="500"/>
-                            <p:tgtEl>
-                              <p:spTgt spid="124"/>
-                            </p:tgtEl>
-                          </p:cBhvr>
-                        </p:animEffect>
-                      </p:childTnLst>
-                    </p:cTn>
-                  </p:par>
-                  <p:par>
-                    <p:cTn id="7" presetID="10" presetClass="entr" presetSubtype="0" fill="hold" nodeType="afterPrev">
-                      <p:stCondLst>
-                        <p:cond delay="600"/>
-                      </p:stCondLst>
-                      <p:childTnLst>
-                        <p:set>
-                          <p:cBhvr>
-                            <p:cTn id="8" dur="1" fill="hold">
-                              <p:stCondLst>
-                                <p:cond delay="0"/>
-                              </p:stCondLst>
-                            </p:cTn>
-                            <p:tgtEl>
-                              <p:spTgt spid="58"/>
-                            </p:tgtEl>
-                            <p:attrNameLst>
-                              <p:attrName>style.visibility</p:attrName>
-                            </p:attrNameLst>
-                          </p:cBhvr>
-                          <p:to>
-                            <p:strVal val="visible"/>
-                          </p:to>
-                        </p:set>
-                        <p:animEffect transition="in" filter="fade">
-                          <p:cBhvr>
-                            <p:cTn id="102" dur="500"/>
-                            <p:tgtEl>
-                              <p:spTgt spid="58"/>
-                            </p:tgtEl>
-                          </p:cBhvr>
-                        </p:animEffect>
-                      </p:childTnLst>
-                    </p:cTn>
-                  </p:par>
-                  <p:par>
-                    <p:cTn id="9" presetID="10" presetClass="entr" presetSubtype="0" fill="hold" nodeType="afterPrev">
-                      <p:stCondLst>
-                        <p:cond delay="900"/>
-                      </p:stCondLst>
-                      <p:childTnLst>
-                        <p:set>
-                          <p:cBhvr>
-                            <p:cTn id="10" dur="1" fill="hold">
-                              <p:stCondLst>
-                                <p:cond delay="0"/>
-                              </p:stCondLst>
-                            </p:cTn>
-                            <p:tgtEl>
-                              <p:spTgt spid="59"/>
-                            </p:tgtEl>
-                            <p:attrNameLst>
-                              <p:attrName>style.visibility</p:attrName>
-                            </p:attrNameLst>
-                          </p:cBhvr>
-                          <p:to>
-                            <p:strVal val="visible"/>
-                          </p:to>
-                        </p:set>
-                        <p:animEffect transition="in" filter="fade">
-                          <p:cBhvr>
-                            <p:cTn id="103" dur="500"/>
-                            <p:tgtEl>
-                              <p:spTgt spid="59"/>
-                            </p:tgtEl>
-                          </p:cBhvr>
-                        </p:animEffect>
-                      </p:childTnLst>
-                    </p:cTn>
-                  </p:par>
-                  <p:par>
-                    <p:cTn id="11" presetID="10" presetClass="entr" presetSubtype="0" fill="hold" nodeType="afterPrev">
-                      <p:stCondLst>
-                        <p:cond delay="1200"/>
-                      </p:stCondLst>
-                      <p:childTnLst>
-                        <p:set>
-                          <p:cBhvr>
-                            <p:cTn id="12" dur="1" fill="hold">
-                              <p:stCondLst>
-                                <p:cond delay="0"/>
-                              </p:stCondLst>
-                            </p:cTn>
-                            <p:tgtEl>
-                              <p:spTgt spid="60"/>
-                            </p:tgtEl>
-                            <p:attrNameLst>
-                              <p:attrName>style.visibility</p:attrName>
-                            </p:attrNameLst>
-                          </p:cBhvr>
-                          <p:to>
-                            <p:strVal val="visible"/>
-                          </p:to>
-                        </p:set>
-                        <p:animEffect transition="in" filter="fade">
-                          <p:cBhvr>
-                            <p:cTn id="104" dur="500"/>
-                            <p:tgtEl>
-                              <p:spTgt spid="60"/>
-                            </p:tgtEl>
-                          </p:cBhvr>
-                        </p:animEffect>
-                      </p:childTnLst>
-                    </p:cTn>
-                  </p:par>
-                  <p:par>
-                    <p:cTn id="13" presetID="10" presetClass="entr" presetSubtype="0" fill="hold" nodeType="afterPrev">
-                      <p:stCondLst>
-                        <p:cond delay="1500"/>
-                      </p:stCondLst>
-                      <p:childTnLst>
-                        <p:set>
-                          <p:cBhvr>
-                            <p:cTn id="14" dur="1" fill="hold">
-                              <p:stCondLst>
-                                <p:cond delay="0"/>
-                              </p:stCondLst>
-                            </p:cTn>
-                            <p:tgtEl>
-                              <p:spTgt spid="61"/>
-                            </p:tgtEl>
-                            <p:attrNameLst>
-                              <p:attrName>style.visibility</p:attrName>
-                            </p:attrNameLst>
-                          </p:cBhvr>
-                          <p:to>
-                            <p:strVal val="visible"/>
-                          </p:to>
-                        </p:set>
-                        <p:animEffect transition="in" filter="fade">
-                          <p:cBhvr>
-                            <p:cTn id="105" dur="500"/>
-                            <p:tgtEl>
-                              <p:spTgt spid="61"/>
-                            </p:tgtEl>
-                          </p:cBhvr>
-                        </p:animEffect>
-                      </p:childTnLst>
-                    </p:cTn>
-                  </p:par>
-                </p:childTnLst>
-              </p:cTn>
-              <p:prevCondLst>
-                <p:cond evt="onPrev" delay="0">
-                  <p:tgtEl>
-                    <p:sldTgt/>
-                  </p:tgtEl>
-                </p:cond>
-              </p:prevCondLst>
-              <p:nextCondLst>
-                <p:cond evt="onNext" delay="0">
-                  <p:tgtEl>
-                    <p:sldTgt/>
-                  </p:tgtEl>
-                </p:cond>
-              </p:nextCondLst>
-            </p:seq>
-          </p:childTnLst>
-        </p:cTn>
-      </p:par>
-    </p:tnLst>
-  </p:timing>
 </p:sld>
 </file>
 
@@ -43933,106 +40173,6 @@
   <p:transition spd="med" advClick="1">
     <p:fade/>
   </p:transition>
-  <p:timing>
-    <p:tnLst>
-      <p:par>
-        <p:cTn id="1" dur="indefinite" restart="never" nodeType="tmRoot">
-          <p:childTnLst>
-            <p:seq concurrent="1" nextAc="seek">
-              <p:cTn id="2" dur="indefinite" nodeType="mainSeq">
-                <p:childTnLst>
-                  <p:par>
-                    <p:cTn id="3" presetID="10" presetClass="entr" presetSubtype="0" fill="hold" nodeType="afterPrev">
-                      <p:stCondLst>
-                        <p:cond delay="0"/>
-                      </p:stCondLst>
-                      <p:childTnLst>
-                        <p:set>
-                          <p:cBhvr>
-                            <p:cTn id="4" dur="1" fill="hold">
-                              <p:stCondLst>
-                                <p:cond delay="0"/>
-                              </p:stCondLst>
-                            </p:cTn>
-                            <p:tgtEl>
-                              <p:spTgt spid="156"/>
-                            </p:tgtEl>
-                            <p:attrNameLst>
-                              <p:attrName>style.visibility</p:attrName>
-                            </p:attrNameLst>
-                          </p:cBhvr>
-                          <p:to>
-                            <p:strVal val="visible"/>
-                          </p:to>
-                        </p:set>
-                        <p:animEffect transition="in" filter="fade">
-                          <p:cBhvr>
-                            <p:cTn id="100" dur="500"/>
-                            <p:tgtEl>
-                              <p:spTgt spid="156"/>
-                            </p:tgtEl>
-                          </p:cBhvr>
-                        </p:animEffect>
-                      </p:childTnLst>
-                    </p:cTn>
-                  </p:par>
-                  <p:par>
-                    <p:cTn id="5" presetID="10" presetClass="entr" presetSubtype="0" fill="hold" nodeType="afterPrev">
-                      <p:stCondLst>
-                        <p:cond delay="300"/>
-                      </p:stCondLst>
-                      <p:childTnLst>
-                        <p:set>
-                          <p:cBhvr>
-                            <p:cTn id="6" dur="1" fill="hold">
-                              <p:stCondLst>
-                                <p:cond delay="0"/>
-                              </p:stCondLst>
-                            </p:cTn>
-                            <p:tgtEl>
-                              <p:spTgt spid="157"/>
-                            </p:tgtEl>
-                            <p:attrNameLst>
-                              <p:attrName>style.visibility</p:attrName>
-                            </p:attrNameLst>
-                          </p:cBhvr>
-                          <p:to>
-                            <p:strVal val="visible"/>
-                          </p:to>
-                        </p:set>
-                        <p:animEffect transition="in" filter="fade">
-                          <p:cBhvr>
-                            <p:cTn id="101" dur="500"/>
-                            <p:tgtEl>
-                              <p:spTgt spid="157"/>
-                            </p:tgtEl>
-                          </p:cBhvr>
-                        </p:animEffect>
-                      </p:childTnLst>
-                    </p:cTn>
-                  </p:par>
-                </p:childTnLst>
-              </p:cTn>
-              <p:prevCondLst>
-                <p:cond evt="onPrev" delay="0">
-                  <p:tgtEl>
-                    <p:sldTgt/>
-                  </p:tgtEl>
-                </p:cond>
-              </p:prevCondLst>
-              <p:nextCondLst>
-                <p:cond evt="onNext" delay="0">
-                  <p:tgtEl>
-                    <p:sldTgt/>
-                  </p:tgtEl>
-                </p:cond>
-              </p:nextCondLst>
-            </p:seq>
-          </p:childTnLst>
-        </p:cTn>
-      </p:par>
-    </p:tnLst>
-  </p:timing>
 </p:sld>
 </file>
 
@@ -46506,246 +42646,6 @@
   <p:transition spd="med" advClick="1">
     <p:fade/>
   </p:transition>
-  <p:timing>
-    <p:tnLst>
-      <p:par>
-        <p:cTn id="1" dur="indefinite" restart="never" nodeType="tmRoot">
-          <p:childTnLst>
-            <p:seq concurrent="1" nextAc="seek">
-              <p:cTn id="2" dur="indefinite" nodeType="mainSeq">
-                <p:childTnLst>
-                  <p:par>
-                    <p:cTn id="3" presetID="10" presetClass="entr" presetSubtype="0" fill="hold" nodeType="afterPrev">
-                      <p:stCondLst>
-                        <p:cond delay="0"/>
-                      </p:stCondLst>
-                      <p:childTnLst>
-                        <p:set>
-                          <p:cBhvr>
-                            <p:cTn id="4" dur="1" fill="hold">
-                              <p:stCondLst>
-                                <p:cond delay="0"/>
-                              </p:stCondLst>
-                            </p:cTn>
-                            <p:tgtEl>
-                              <p:spTgt spid="162"/>
-                            </p:tgtEl>
-                            <p:attrNameLst>
-                              <p:attrName>style.visibility</p:attrName>
-                            </p:attrNameLst>
-                          </p:cBhvr>
-                          <p:to>
-                            <p:strVal val="visible"/>
-                          </p:to>
-                        </p:set>
-                        <p:animEffect transition="in" filter="fade">
-                          <p:cBhvr>
-                            <p:cTn id="100" dur="500"/>
-                            <p:tgtEl>
-                              <p:spTgt spid="162"/>
-                            </p:tgtEl>
-                          </p:cBhvr>
-                        </p:animEffect>
-                      </p:childTnLst>
-                    </p:cTn>
-                  </p:par>
-                  <p:par>
-                    <p:cTn id="5" presetID="10" presetClass="entr" presetSubtype="0" fill="hold" nodeType="afterPrev">
-                      <p:stCondLst>
-                        <p:cond delay="300"/>
-                      </p:stCondLst>
-                      <p:childTnLst>
-                        <p:set>
-                          <p:cBhvr>
-                            <p:cTn id="6" dur="1" fill="hold">
-                              <p:stCondLst>
-                                <p:cond delay="0"/>
-                              </p:stCondLst>
-                            </p:cTn>
-                            <p:tgtEl>
-                              <p:spTgt spid="163"/>
-                            </p:tgtEl>
-                            <p:attrNameLst>
-                              <p:attrName>style.visibility</p:attrName>
-                            </p:attrNameLst>
-                          </p:cBhvr>
-                          <p:to>
-                            <p:strVal val="visible"/>
-                          </p:to>
-                        </p:set>
-                        <p:animEffect transition="in" filter="fade">
-                          <p:cBhvr>
-                            <p:cTn id="101" dur="500"/>
-                            <p:tgtEl>
-                              <p:spTgt spid="163"/>
-                            </p:tgtEl>
-                          </p:cBhvr>
-                        </p:animEffect>
-                      </p:childTnLst>
-                    </p:cTn>
-                  </p:par>
-                  <p:par>
-                    <p:cTn id="7" presetID="10" presetClass="entr" presetSubtype="0" fill="hold" nodeType="afterPrev">
-                      <p:stCondLst>
-                        <p:cond delay="600"/>
-                      </p:stCondLst>
-                      <p:childTnLst>
-                        <p:set>
-                          <p:cBhvr>
-                            <p:cTn id="8" dur="1" fill="hold">
-                              <p:stCondLst>
-                                <p:cond delay="0"/>
-                              </p:stCondLst>
-                            </p:cTn>
-                            <p:tgtEl>
-                              <p:spTgt spid="164"/>
-                            </p:tgtEl>
-                            <p:attrNameLst>
-                              <p:attrName>style.visibility</p:attrName>
-                            </p:attrNameLst>
-                          </p:cBhvr>
-                          <p:to>
-                            <p:strVal val="visible"/>
-                          </p:to>
-                        </p:set>
-                        <p:animEffect transition="in" filter="fade">
-                          <p:cBhvr>
-                            <p:cTn id="102" dur="500"/>
-                            <p:tgtEl>
-                              <p:spTgt spid="164"/>
-                            </p:tgtEl>
-                          </p:cBhvr>
-                        </p:animEffect>
-                      </p:childTnLst>
-                    </p:cTn>
-                  </p:par>
-                  <p:par>
-                    <p:cTn id="9" presetID="10" presetClass="entr" presetSubtype="0" fill="hold" nodeType="afterPrev">
-                      <p:stCondLst>
-                        <p:cond delay="900"/>
-                      </p:stCondLst>
-                      <p:childTnLst>
-                        <p:set>
-                          <p:cBhvr>
-                            <p:cTn id="10" dur="1" fill="hold">
-                              <p:stCondLst>
-                                <p:cond delay="0"/>
-                              </p:stCondLst>
-                            </p:cTn>
-                            <p:tgtEl>
-                              <p:spTgt spid="57"/>
-                            </p:tgtEl>
-                            <p:attrNameLst>
-                              <p:attrName>style.visibility</p:attrName>
-                            </p:attrNameLst>
-                          </p:cBhvr>
-                          <p:to>
-                            <p:strVal val="visible"/>
-                          </p:to>
-                        </p:set>
-                        <p:animEffect transition="in" filter="fade">
-                          <p:cBhvr>
-                            <p:cTn id="103" dur="500"/>
-                            <p:tgtEl>
-                              <p:spTgt spid="57"/>
-                            </p:tgtEl>
-                          </p:cBhvr>
-                        </p:animEffect>
-                      </p:childTnLst>
-                    </p:cTn>
-                  </p:par>
-                  <p:par>
-                    <p:cTn id="11" presetID="10" presetClass="entr" presetSubtype="0" fill="hold" nodeType="afterPrev">
-                      <p:stCondLst>
-                        <p:cond delay="1200"/>
-                      </p:stCondLst>
-                      <p:childTnLst>
-                        <p:set>
-                          <p:cBhvr>
-                            <p:cTn id="12" dur="1" fill="hold">
-                              <p:stCondLst>
-                                <p:cond delay="0"/>
-                              </p:stCondLst>
-                            </p:cTn>
-                            <p:tgtEl>
-                              <p:spTgt spid="58"/>
-                            </p:tgtEl>
-                            <p:attrNameLst>
-                              <p:attrName>style.visibility</p:attrName>
-                            </p:attrNameLst>
-                          </p:cBhvr>
-                          <p:to>
-                            <p:strVal val="visible"/>
-                          </p:to>
-                        </p:set>
-                        <p:animEffect transition="in" filter="fade">
-                          <p:cBhvr>
-                            <p:cTn id="104" dur="500"/>
-                            <p:tgtEl>
-                              <p:spTgt spid="58"/>
-                            </p:tgtEl>
-                          </p:cBhvr>
-                        </p:animEffect>
-                      </p:childTnLst>
-                    </p:cTn>
-                  </p:par>
-                  <p:par>
-                    <p:cTn id="13" presetID="10" presetClass="entr" presetSubtype="0" fill="hold" nodeType="afterPrev">
-                      <p:stCondLst>
-                        <p:cond delay="1500"/>
-                      </p:stCondLst>
-                      <p:childTnLst>
-                        <p:set>
-                          <p:cBhvr>
-                            <p:cTn id="14" dur="1" fill="hold">
-                              <p:stCondLst>
-                                <p:cond delay="0"/>
-                              </p:stCondLst>
-                            </p:cTn>
-                            <p:tgtEl>
-                              <p:spTgt spid="59"/>
-                            </p:tgtEl>
-                            <p:attrNameLst>
-                              <p:attrName>style.visibility</p:attrName>
-                            </p:attrNameLst>
-                          </p:cBhvr>
-                          <p:to>
-                            <p:strVal val="visible"/>
-                          </p:to>
-                        </p:set>
-                        <p:animEffect transition="in" filter="fade">
-                          <p:cBhvr>
-                            <p:cTn id="105" dur="500"/>
-                            <p:tgtEl>
-                              <p:spTgt spid="59"/>
-                            </p:tgtEl>
-                          </p:cBhvr>
-                        </p:animEffect>
-                      </p:childTnLst>
-                    </p:cTn>
-                  </p:par>
-                </p:childTnLst>
-              </p:cTn>
-              <p:prevCondLst>
-                <p:cond evt="onPrev" delay="0">
-                  <p:tgtEl>
-                    <p:sldTgt/>
-                  </p:tgtEl>
-                </p:cond>
-              </p:prevCondLst>
-              <p:nextCondLst>
-                <p:cond evt="onNext" delay="0">
-                  <p:tgtEl>
-                    <p:sldTgt/>
-                  </p:tgtEl>
-                </p:cond>
-              </p:nextCondLst>
-            </p:seq>
-          </p:childTnLst>
-        </p:cTn>
-      </p:par>
-    </p:tnLst>
-  </p:timing>
 </p:sld>
 </file>
 
@@ -49276,246 +45176,6 @@
   <p:transition spd="med" advClick="1">
     <p:push dir="l"/>
   </p:transition>
-  <p:timing>
-    <p:tnLst>
-      <p:par>
-        <p:cTn id="1" dur="indefinite" restart="never" nodeType="tmRoot">
-          <p:childTnLst>
-            <p:seq concurrent="1" nextAc="seek">
-              <p:cTn id="2" dur="indefinite" nodeType="mainSeq">
-                <p:childTnLst>
-                  <p:par>
-                    <p:cTn id="3" presetID="10" presetClass="entr" presetSubtype="0" fill="hold" nodeType="afterPrev">
-                      <p:stCondLst>
-                        <p:cond delay="0"/>
-                      </p:stCondLst>
-                      <p:childTnLst>
-                        <p:set>
-                          <p:cBhvr>
-                            <p:cTn id="4" dur="1" fill="hold">
-                              <p:stCondLst>
-                                <p:cond delay="0"/>
-                              </p:stCondLst>
-                            </p:cTn>
-                            <p:tgtEl>
-                              <p:spTgt spid="195"/>
-                            </p:tgtEl>
-                            <p:attrNameLst>
-                              <p:attrName>style.visibility</p:attrName>
-                            </p:attrNameLst>
-                          </p:cBhvr>
-                          <p:to>
-                            <p:strVal val="visible"/>
-                          </p:to>
-                        </p:set>
-                        <p:animEffect transition="in" filter="fade">
-                          <p:cBhvr>
-                            <p:cTn id="100" dur="500"/>
-                            <p:tgtEl>
-                              <p:spTgt spid="195"/>
-                            </p:tgtEl>
-                          </p:cBhvr>
-                        </p:animEffect>
-                      </p:childTnLst>
-                    </p:cTn>
-                  </p:par>
-                  <p:par>
-                    <p:cTn id="5" presetID="10" presetClass="entr" presetSubtype="0" fill="hold" nodeType="afterPrev">
-                      <p:stCondLst>
-                        <p:cond delay="300"/>
-                      </p:stCondLst>
-                      <p:childTnLst>
-                        <p:set>
-                          <p:cBhvr>
-                            <p:cTn id="6" dur="1" fill="hold">
-                              <p:stCondLst>
-                                <p:cond delay="0"/>
-                              </p:stCondLst>
-                            </p:cTn>
-                            <p:tgtEl>
-                              <p:spTgt spid="224"/>
-                            </p:tgtEl>
-                            <p:attrNameLst>
-                              <p:attrName>style.visibility</p:attrName>
-                            </p:attrNameLst>
-                          </p:cBhvr>
-                          <p:to>
-                            <p:strVal val="visible"/>
-                          </p:to>
-                        </p:set>
-                        <p:animEffect transition="in" filter="fade">
-                          <p:cBhvr>
-                            <p:cTn id="101" dur="500"/>
-                            <p:tgtEl>
-                              <p:spTgt spid="224"/>
-                            </p:tgtEl>
-                          </p:cBhvr>
-                        </p:animEffect>
-                      </p:childTnLst>
-                    </p:cTn>
-                  </p:par>
-                  <p:par>
-                    <p:cTn id="7" presetID="10" presetClass="entr" presetSubtype="0" fill="hold" nodeType="afterPrev">
-                      <p:stCondLst>
-                        <p:cond delay="600"/>
-                      </p:stCondLst>
-                      <p:childTnLst>
-                        <p:set>
-                          <p:cBhvr>
-                            <p:cTn id="8" dur="1" fill="hold">
-                              <p:stCondLst>
-                                <p:cond delay="0"/>
-                              </p:stCondLst>
-                            </p:cTn>
-                            <p:tgtEl>
-                              <p:spTgt spid="225"/>
-                            </p:tgtEl>
-                            <p:attrNameLst>
-                              <p:attrName>style.visibility</p:attrName>
-                            </p:attrNameLst>
-                          </p:cBhvr>
-                          <p:to>
-                            <p:strVal val="visible"/>
-                          </p:to>
-                        </p:set>
-                        <p:animEffect transition="in" filter="fade">
-                          <p:cBhvr>
-                            <p:cTn id="102" dur="500"/>
-                            <p:tgtEl>
-                              <p:spTgt spid="225"/>
-                            </p:tgtEl>
-                          </p:cBhvr>
-                        </p:animEffect>
-                      </p:childTnLst>
-                    </p:cTn>
-                  </p:par>
-                  <p:par>
-                    <p:cTn id="9" presetID="10" presetClass="entr" presetSubtype="0" fill="hold" nodeType="afterPrev">
-                      <p:stCondLst>
-                        <p:cond delay="900"/>
-                      </p:stCondLst>
-                      <p:childTnLst>
-                        <p:set>
-                          <p:cBhvr>
-                            <p:cTn id="10" dur="1" fill="hold">
-                              <p:stCondLst>
-                                <p:cond delay="0"/>
-                              </p:stCondLst>
-                            </p:cTn>
-                            <p:tgtEl>
-                              <p:spTgt spid="61"/>
-                            </p:tgtEl>
-                            <p:attrNameLst>
-                              <p:attrName>style.visibility</p:attrName>
-                            </p:attrNameLst>
-                          </p:cBhvr>
-                          <p:to>
-                            <p:strVal val="visible"/>
-                          </p:to>
-                        </p:set>
-                        <p:animEffect transition="in" filter="fade">
-                          <p:cBhvr>
-                            <p:cTn id="103" dur="500"/>
-                            <p:tgtEl>
-                              <p:spTgt spid="61"/>
-                            </p:tgtEl>
-                          </p:cBhvr>
-                        </p:animEffect>
-                      </p:childTnLst>
-                    </p:cTn>
-                  </p:par>
-                  <p:par>
-                    <p:cTn id="11" presetID="10" presetClass="entr" presetSubtype="0" fill="hold" nodeType="afterPrev">
-                      <p:stCondLst>
-                        <p:cond delay="1200"/>
-                      </p:stCondLst>
-                      <p:childTnLst>
-                        <p:set>
-                          <p:cBhvr>
-                            <p:cTn id="12" dur="1" fill="hold">
-                              <p:stCondLst>
-                                <p:cond delay="0"/>
-                              </p:stCondLst>
-                            </p:cTn>
-                            <p:tgtEl>
-                              <p:spTgt spid="62"/>
-                            </p:tgtEl>
-                            <p:attrNameLst>
-                              <p:attrName>style.visibility</p:attrName>
-                            </p:attrNameLst>
-                          </p:cBhvr>
-                          <p:to>
-                            <p:strVal val="visible"/>
-                          </p:to>
-                        </p:set>
-                        <p:animEffect transition="in" filter="fade">
-                          <p:cBhvr>
-                            <p:cTn id="104" dur="500"/>
-                            <p:tgtEl>
-                              <p:spTgt spid="62"/>
-                            </p:tgtEl>
-                          </p:cBhvr>
-                        </p:animEffect>
-                      </p:childTnLst>
-                    </p:cTn>
-                  </p:par>
-                  <p:par>
-                    <p:cTn id="13" presetID="10" presetClass="entr" presetSubtype="0" fill="hold" nodeType="afterPrev">
-                      <p:stCondLst>
-                        <p:cond delay="1500"/>
-                      </p:stCondLst>
-                      <p:childTnLst>
-                        <p:set>
-                          <p:cBhvr>
-                            <p:cTn id="14" dur="1" fill="hold">
-                              <p:stCondLst>
-                                <p:cond delay="0"/>
-                              </p:stCondLst>
-                            </p:cTn>
-                            <p:tgtEl>
-                              <p:spTgt spid="63"/>
-                            </p:tgtEl>
-                            <p:attrNameLst>
-                              <p:attrName>style.visibility</p:attrName>
-                            </p:attrNameLst>
-                          </p:cBhvr>
-                          <p:to>
-                            <p:strVal val="visible"/>
-                          </p:to>
-                        </p:set>
-                        <p:animEffect transition="in" filter="fade">
-                          <p:cBhvr>
-                            <p:cTn id="105" dur="500"/>
-                            <p:tgtEl>
-                              <p:spTgt spid="63"/>
-                            </p:tgtEl>
-                          </p:cBhvr>
-                        </p:animEffect>
-                      </p:childTnLst>
-                    </p:cTn>
-                  </p:par>
-                </p:childTnLst>
-              </p:cTn>
-              <p:prevCondLst>
-                <p:cond evt="onPrev" delay="0">
-                  <p:tgtEl>
-                    <p:sldTgt/>
-                  </p:tgtEl>
-                </p:cond>
-              </p:prevCondLst>
-              <p:nextCondLst>
-                <p:cond evt="onNext" delay="0">
-                  <p:tgtEl>
-                    <p:sldTgt/>
-                  </p:tgtEl>
-                </p:cond>
-              </p:nextCondLst>
-            </p:seq>
-          </p:childTnLst>
-        </p:cTn>
-      </p:par>
-    </p:tnLst>
-  </p:timing>
 </p:sld>
 </file>
 
@@ -51995,246 +47655,6 @@
   <p:transition spd="med" advClick="1">
     <p:fade/>
   </p:transition>
-  <p:timing>
-    <p:tnLst>
-      <p:par>
-        <p:cTn id="1" dur="indefinite" restart="never" nodeType="tmRoot">
-          <p:childTnLst>
-            <p:seq concurrent="1" nextAc="seek">
-              <p:cTn id="2" dur="indefinite" nodeType="mainSeq">
-                <p:childTnLst>
-                  <p:par>
-                    <p:cTn id="3" presetID="10" presetClass="entr" presetSubtype="0" fill="hold" nodeType="afterPrev">
-                      <p:stCondLst>
-                        <p:cond delay="0"/>
-                      </p:stCondLst>
-                      <p:childTnLst>
-                        <p:set>
-                          <p:cBhvr>
-                            <p:cTn id="4" dur="1" fill="hold">
-                              <p:stCondLst>
-                                <p:cond delay="0"/>
-                              </p:stCondLst>
-                            </p:cTn>
-                            <p:tgtEl>
-                              <p:spTgt spid="230"/>
-                            </p:tgtEl>
-                            <p:attrNameLst>
-                              <p:attrName>style.visibility</p:attrName>
-                            </p:attrNameLst>
-                          </p:cBhvr>
-                          <p:to>
-                            <p:strVal val="visible"/>
-                          </p:to>
-                        </p:set>
-                        <p:animEffect transition="in" filter="fade">
-                          <p:cBhvr>
-                            <p:cTn id="100" dur="500"/>
-                            <p:tgtEl>
-                              <p:spTgt spid="230"/>
-                            </p:tgtEl>
-                          </p:cBhvr>
-                        </p:animEffect>
-                      </p:childTnLst>
-                    </p:cTn>
-                  </p:par>
-                  <p:par>
-                    <p:cTn id="5" presetID="10" presetClass="entr" presetSubtype="0" fill="hold" nodeType="afterPrev">
-                      <p:stCondLst>
-                        <p:cond delay="300"/>
-                      </p:stCondLst>
-                      <p:childTnLst>
-                        <p:set>
-                          <p:cBhvr>
-                            <p:cTn id="6" dur="1" fill="hold">
-                              <p:stCondLst>
-                                <p:cond delay="0"/>
-                              </p:stCondLst>
-                            </p:cTn>
-                            <p:tgtEl>
-                              <p:spTgt spid="231"/>
-                            </p:tgtEl>
-                            <p:attrNameLst>
-                              <p:attrName>style.visibility</p:attrName>
-                            </p:attrNameLst>
-                          </p:cBhvr>
-                          <p:to>
-                            <p:strVal val="visible"/>
-                          </p:to>
-                        </p:set>
-                        <p:animEffect transition="in" filter="fade">
-                          <p:cBhvr>
-                            <p:cTn id="101" dur="500"/>
-                            <p:tgtEl>
-                              <p:spTgt spid="231"/>
-                            </p:tgtEl>
-                          </p:cBhvr>
-                        </p:animEffect>
-                      </p:childTnLst>
-                    </p:cTn>
-                  </p:par>
-                  <p:par>
-                    <p:cTn id="7" presetID="10" presetClass="entr" presetSubtype="0" fill="hold" nodeType="afterPrev">
-                      <p:stCondLst>
-                        <p:cond delay="600"/>
-                      </p:stCondLst>
-                      <p:childTnLst>
-                        <p:set>
-                          <p:cBhvr>
-                            <p:cTn id="8" dur="1" fill="hold">
-                              <p:stCondLst>
-                                <p:cond delay="0"/>
-                              </p:stCondLst>
-                            </p:cTn>
-                            <p:tgtEl>
-                              <p:spTgt spid="232"/>
-                            </p:tgtEl>
-                            <p:attrNameLst>
-                              <p:attrName>style.visibility</p:attrName>
-                            </p:attrNameLst>
-                          </p:cBhvr>
-                          <p:to>
-                            <p:strVal val="visible"/>
-                          </p:to>
-                        </p:set>
-                        <p:animEffect transition="in" filter="fade">
-                          <p:cBhvr>
-                            <p:cTn id="102" dur="500"/>
-                            <p:tgtEl>
-                              <p:spTgt spid="232"/>
-                            </p:tgtEl>
-                          </p:cBhvr>
-                        </p:animEffect>
-                      </p:childTnLst>
-                    </p:cTn>
-                  </p:par>
-                  <p:par>
-                    <p:cTn id="9" presetID="10" presetClass="entr" presetSubtype="0" fill="hold" nodeType="afterPrev">
-                      <p:stCondLst>
-                        <p:cond delay="900"/>
-                      </p:stCondLst>
-                      <p:childTnLst>
-                        <p:set>
-                          <p:cBhvr>
-                            <p:cTn id="10" dur="1" fill="hold">
-                              <p:stCondLst>
-                                <p:cond delay="0"/>
-                              </p:stCondLst>
-                            </p:cTn>
-                            <p:tgtEl>
-                              <p:spTgt spid="233"/>
-                            </p:tgtEl>
-                            <p:attrNameLst>
-                              <p:attrName>style.visibility</p:attrName>
-                            </p:attrNameLst>
-                          </p:cBhvr>
-                          <p:to>
-                            <p:strVal val="visible"/>
-                          </p:to>
-                        </p:set>
-                        <p:animEffect transition="in" filter="fade">
-                          <p:cBhvr>
-                            <p:cTn id="103" dur="500"/>
-                            <p:tgtEl>
-                              <p:spTgt spid="233"/>
-                            </p:tgtEl>
-                          </p:cBhvr>
-                        </p:animEffect>
-                      </p:childTnLst>
-                    </p:cTn>
-                  </p:par>
-                  <p:par>
-                    <p:cTn id="11" presetID="10" presetClass="entr" presetSubtype="0" fill="hold" nodeType="afterPrev">
-                      <p:stCondLst>
-                        <p:cond delay="1200"/>
-                      </p:stCondLst>
-                      <p:childTnLst>
-                        <p:set>
-                          <p:cBhvr>
-                            <p:cTn id="12" dur="1" fill="hold">
-                              <p:stCondLst>
-                                <p:cond delay="0"/>
-                              </p:stCondLst>
-                            </p:cTn>
-                            <p:tgtEl>
-                              <p:spTgt spid="32"/>
-                            </p:tgtEl>
-                            <p:attrNameLst>
-                              <p:attrName>style.visibility</p:attrName>
-                            </p:attrNameLst>
-                          </p:cBhvr>
-                          <p:to>
-                            <p:strVal val="visible"/>
-                          </p:to>
-                        </p:set>
-                        <p:animEffect transition="in" filter="fade">
-                          <p:cBhvr>
-                            <p:cTn id="104" dur="500"/>
-                            <p:tgtEl>
-                              <p:spTgt spid="32"/>
-                            </p:tgtEl>
-                          </p:cBhvr>
-                        </p:animEffect>
-                      </p:childTnLst>
-                    </p:cTn>
-                  </p:par>
-                  <p:par>
-                    <p:cTn id="13" presetID="10" presetClass="entr" presetSubtype="0" fill="hold" nodeType="afterPrev">
-                      <p:stCondLst>
-                        <p:cond delay="1500"/>
-                      </p:stCondLst>
-                      <p:childTnLst>
-                        <p:set>
-                          <p:cBhvr>
-                            <p:cTn id="14" dur="1" fill="hold">
-                              <p:stCondLst>
-                                <p:cond delay="0"/>
-                              </p:stCondLst>
-                            </p:cTn>
-                            <p:tgtEl>
-                              <p:spTgt spid="33"/>
-                            </p:tgtEl>
-                            <p:attrNameLst>
-                              <p:attrName>style.visibility</p:attrName>
-                            </p:attrNameLst>
-                          </p:cBhvr>
-                          <p:to>
-                            <p:strVal val="visible"/>
-                          </p:to>
-                        </p:set>
-                        <p:animEffect transition="in" filter="fade">
-                          <p:cBhvr>
-                            <p:cTn id="105" dur="500"/>
-                            <p:tgtEl>
-                              <p:spTgt spid="33"/>
-                            </p:tgtEl>
-                          </p:cBhvr>
-                        </p:animEffect>
-                      </p:childTnLst>
-                    </p:cTn>
-                  </p:par>
-                </p:childTnLst>
-              </p:cTn>
-              <p:prevCondLst>
-                <p:cond evt="onPrev" delay="0">
-                  <p:tgtEl>
-                    <p:sldTgt/>
-                  </p:tgtEl>
-                </p:cond>
-              </p:prevCondLst>
-              <p:nextCondLst>
-                <p:cond evt="onNext" delay="0">
-                  <p:tgtEl>
-                    <p:sldTgt/>
-                  </p:tgtEl>
-                </p:cond>
-              </p:nextCondLst>
-            </p:seq>
-          </p:childTnLst>
-        </p:cTn>
-      </p:par>
-    </p:tnLst>
-  </p:timing>
 </p:sld>
 </file>
 
@@ -52533,211 +47953,6 @@
   <p:transition spd="med" advClick="1">
     <p:fade/>
   </p:transition>
-  <p:timing>
-    <p:tnLst>
-      <p:par>
-        <p:cTn id="1" dur="indefinite" restart="never" nodeType="tmRoot">
-          <p:childTnLst>
-            <p:seq concurrent="1" nextAc="seek">
-              <p:cTn id="2" dur="indefinite" nodeType="mainSeq">
-                <p:childTnLst>
-                  <p:par>
-                    <p:cTn id="3" presetID="10" presetClass="entr" presetSubtype="0" fill="hold" nodeType="afterPrev">
-                      <p:stCondLst>
-                        <p:cond delay="0"/>
-                      </p:stCondLst>
-                      <p:childTnLst>
-                        <p:set>
-                          <p:cBhvr>
-                            <p:cTn id="4" dur="1" fill="hold">
-                              <p:stCondLst>
-                                <p:cond delay="0"/>
-                              </p:stCondLst>
-                            </p:cTn>
-                            <p:tgtEl>
-                              <p:spTgt spid="264"/>
-                            </p:tgtEl>
-                            <p:attrNameLst>
-                              <p:attrName>style.visibility</p:attrName>
-                            </p:attrNameLst>
-                          </p:cBhvr>
-                          <p:to>
-                            <p:strVal val="visible"/>
-                          </p:to>
-                        </p:set>
-                        <p:animEffect transition="in" filter="fade">
-                          <p:cBhvr>
-                            <p:cTn id="100" dur="500"/>
-                            <p:tgtEl>
-                              <p:spTgt spid="264"/>
-                            </p:tgtEl>
-                          </p:cBhvr>
-                        </p:animEffect>
-                      </p:childTnLst>
-                    </p:cTn>
-                  </p:par>
-                  <p:par>
-                    <p:cTn id="5" presetID="10" presetClass="entr" presetSubtype="0" fill="hold" nodeType="afterPrev">
-                      <p:stCondLst>
-                        <p:cond delay="300"/>
-                      </p:stCondLst>
-                      <p:childTnLst>
-                        <p:set>
-                          <p:cBhvr>
-                            <p:cTn id="6" dur="1" fill="hold">
-                              <p:stCondLst>
-                                <p:cond delay="0"/>
-                              </p:stCondLst>
-                            </p:cTn>
-                            <p:tgtEl>
-                              <p:spTgt spid="265"/>
-                            </p:tgtEl>
-                            <p:attrNameLst>
-                              <p:attrName>style.visibility</p:attrName>
-                            </p:attrNameLst>
-                          </p:cBhvr>
-                          <p:to>
-                            <p:strVal val="visible"/>
-                          </p:to>
-                        </p:set>
-                        <p:animEffect transition="in" filter="fade">
-                          <p:cBhvr>
-                            <p:cTn id="101" dur="500"/>
-                            <p:tgtEl>
-                              <p:spTgt spid="265"/>
-                            </p:tgtEl>
-                          </p:cBhvr>
-                        </p:animEffect>
-                      </p:childTnLst>
-                    </p:cTn>
-                  </p:par>
-                  <p:par>
-                    <p:cTn id="7" presetID="10" presetClass="entr" presetSubtype="0" fill="hold" nodeType="afterPrev">
-                      <p:stCondLst>
-                        <p:cond delay="600"/>
-                      </p:stCondLst>
-                      <p:childTnLst>
-                        <p:set>
-                          <p:cBhvr>
-                            <p:cTn id="8" dur="1" fill="hold">
-                              <p:stCondLst>
-                                <p:cond delay="0"/>
-                              </p:stCondLst>
-                            </p:cTn>
-                            <p:tgtEl>
-                              <p:spTgt spid="266"/>
-                            </p:tgtEl>
-                            <p:attrNameLst>
-                              <p:attrName>style.visibility</p:attrName>
-                            </p:attrNameLst>
-                          </p:cBhvr>
-                          <p:to>
-                            <p:strVal val="visible"/>
-                          </p:to>
-                        </p:set>
-                        <p:animEffect transition="in" filter="fade">
-                          <p:cBhvr>
-                            <p:cTn id="102" dur="500"/>
-                            <p:tgtEl>
-                              <p:spTgt spid="266"/>
-                            </p:tgtEl>
-                          </p:cBhvr>
-                        </p:animEffect>
-                      </p:childTnLst>
-                    </p:cTn>
-                  </p:par>
-                  <p:par>
-                    <p:cTn id="9" presetID="10" presetClass="entr" presetSubtype="0" fill="hold" nodeType="afterPrev">
-                      <p:stCondLst>
-                        <p:cond delay="900"/>
-                      </p:stCondLst>
-                      <p:childTnLst>
-                        <p:set>
-                          <p:cBhvr>
-                            <p:cTn id="10" dur="1" fill="hold">
-                              <p:stCondLst>
-                                <p:cond delay="0"/>
-                              </p:stCondLst>
-                            </p:cTn>
-                            <p:tgtEl>
-                              <p:spTgt spid="267"/>
-                            </p:tgtEl>
-                            <p:attrNameLst>
-                              <p:attrName>style.visibility</p:attrName>
-                            </p:attrNameLst>
-                          </p:cBhvr>
-                          <p:to>
-                            <p:strVal val="visible"/>
-                          </p:to>
-                        </p:set>
-                        <p:animEffect transition="in" filter="fade">
-                          <p:cBhvr>
-                            <p:cTn id="103" dur="500"/>
-                            <p:tgtEl>
-                              <p:spTgt spid="267"/>
-                            </p:tgtEl>
-                          </p:cBhvr>
-                        </p:animEffect>
-                      </p:childTnLst>
-                    </p:cTn>
-                  </p:par>
-                  <p:par>
-                    <p:cTn id="11" presetID="10" presetClass="entr" presetSubtype="0" fill="hold" nodeType="afterPrev">
-                      <p:stCondLst>
-                        <p:cond delay="1200"/>
-                      </p:stCondLst>
-                      <p:childTnLst>
-                        <p:set>
-                          <p:cBhvr>
-                            <p:cTn id="12" dur="1" fill="hold">
-                              <p:stCondLst>
-                                <p:cond delay="0"/>
-                              </p:stCondLst>
-                            </p:cTn>
-                            <p:tgtEl>
-                              <p:spTgt spid="268"/>
-                            </p:tgtEl>
-                            <p:attrNameLst>
-                              <p:attrName>style.visibility</p:attrName>
-                            </p:attrNameLst>
-                          </p:cBhvr>
-                          <p:to>
-                            <p:strVal val="visible"/>
-                          </p:to>
-                        </p:set>
-                        <p:animEffect transition="in" filter="fade">
-                          <p:cBhvr>
-                            <p:cTn id="104" dur="500"/>
-                            <p:tgtEl>
-                              <p:spTgt spid="268"/>
-                            </p:tgtEl>
-                          </p:cBhvr>
-                        </p:animEffect>
-                      </p:childTnLst>
-                    </p:cTn>
-                  </p:par>
-                </p:childTnLst>
-              </p:cTn>
-              <p:prevCondLst>
-                <p:cond evt="onPrev" delay="0">
-                  <p:tgtEl>
-                    <p:sldTgt/>
-                  </p:tgtEl>
-                </p:cond>
-              </p:prevCondLst>
-              <p:nextCondLst>
-                <p:cond evt="onNext" delay="0">
-                  <p:tgtEl>
-                    <p:sldTgt/>
-                  </p:tgtEl>
-                </p:cond>
-              </p:nextCondLst>
-            </p:seq>
-          </p:childTnLst>
-        </p:cTn>
-      </p:par>
-    </p:tnLst>
-  </p:timing>
 </p:sld>
 </file>
 

--- a/Tracey-Scott-Portfolio.pptx
+++ b/Tracey-Scott-Portfolio.pptx
@@ -26,7 +26,6 @@
     <p:sldId id="271" r:id="rId17"/>
     <p:sldId id="272" r:id="rId18"/>
     <p:sldId id="273" r:id="rId19"/>
-    <p:sldId id="274" r:id="rId20"/>
     <p:sldId id="275" r:id="rId21"/>
     <p:sldId id="276" r:id="rId22"/>
     <p:sldId id="277" r:id="rId23"/>
@@ -1732,110 +1731,6 @@
       <p:sp>
         <p:nvSpPr>
           <p:cNvPr id="391" name="Google Shape;391;g35ed75ccf_057:notes"/>
-          <p:cNvSpPr txBox="1">
-            <a:spLocks noGrp="1"/>
-          </p:cNvSpPr>
-          <p:nvPr>
-            <p:ph type="body" idx="1"/>
-          </p:nvPr>
-        </p:nvSpPr>
-        <p:spPr>
-          <a:xfrm>
-            <a:off x="685800" y="4343400"/>
-            <a:ext cx="5486400" cy="4114800"/>
-          </a:xfrm>
-          <a:prstGeom prst="rect">
-            <a:avLst/>
-          </a:prstGeom>
-        </p:spPr>
-        <p:txBody>
-          <a:bodyPr spcFirstLastPara="1" wrap="square" lIns="91425" tIns="91425" rIns="91425" bIns="91425" anchor="t" anchorCtr="0">
-            <a:noAutofit/>
-          </a:bodyPr>
-          <a:lstStyle/>
-          <a:p>
-            <a:pPr marL="0" lvl="0" indent="0" algn="l" rtl="0">
-              <a:spcBef>
-                <a:spcPts val="0"/>
-              </a:spcBef>
-              <a:spcAft>
-                <a:spcPts val="0"/>
-              </a:spcAft>
-              <a:buNone/>
-            </a:pPr>
-            <a:endParaRPr/>
-          </a:p>
-        </p:txBody>
-      </p:sp>
-    </p:spTree>
-  </p:cSld>
-  <p:clrMapOvr>
-    <a:masterClrMapping/>
-  </p:clrMapOvr>
-</p:notes>
-</file>
-
-<file path=ppt/notesSlides/notesSlide19.xml><?xml version="1.0" encoding="utf-8"?>
-<p:notes xmlns:a="http://schemas.openxmlformats.org/drawingml/2006/main" xmlns:r="http://schemas.openxmlformats.org/officeDocument/2006/relationships" xmlns:p="http://schemas.openxmlformats.org/presentationml/2006/main" showMasterSp="0" showMasterPhAnim="0">
-  <p:cSld>
-    <p:spTree>
-      <p:nvGrpSpPr>
-        <p:cNvPr id="1" name="Shape 401"/>
-        <p:cNvGrpSpPr/>
-        <p:nvPr/>
-      </p:nvGrpSpPr>
-      <p:grpSpPr>
-        <a:xfrm>
-          <a:off x="0" y="0"/>
-          <a:ext cx="0" cy="0"/>
-          <a:chOff x="0" y="0"/>
-          <a:chExt cx="0" cy="0"/>
-        </a:xfrm>
-      </p:grpSpPr>
-      <p:sp>
-        <p:nvSpPr>
-          <p:cNvPr id="402" name="Google Shape;402;g35ed75ccf_073:notes"/>
-          <p:cNvSpPr>
-            <a:spLocks noGrp="1" noRot="1" noChangeAspect="1"/>
-          </p:cNvSpPr>
-          <p:nvPr>
-            <p:ph type="sldImg" idx="2"/>
-          </p:nvPr>
-        </p:nvSpPr>
-        <p:spPr>
-          <a:xfrm>
-            <a:off x="381000" y="685800"/>
-            <a:ext cx="6096000" cy="3429000"/>
-          </a:xfrm>
-          <a:custGeom>
-            <a:avLst/>
-            <a:gdLst/>
-            <a:ahLst/>
-            <a:cxnLst/>
-            <a:rect l="l" t="t" r="r" b="b"/>
-            <a:pathLst>
-              <a:path w="120000" h="120000" extrusionOk="0">
-                <a:moveTo>
-                  <a:pt x="0" y="0"/>
-                </a:moveTo>
-                <a:lnTo>
-                  <a:pt x="120000" y="0"/>
-                </a:lnTo>
-                <a:lnTo>
-                  <a:pt x="120000" y="120000"/>
-                </a:lnTo>
-                <a:lnTo>
-                  <a:pt x="0" y="120000"/>
-                </a:lnTo>
-                <a:close/>
-              </a:path>
-            </a:pathLst>
-          </a:custGeom>
-        </p:spPr>
-      </p:sp>
-      <p:sp>
-        <p:nvSpPr>
-          <p:cNvPr id="403" name="Google Shape;403;g35ed75ccf_073:notes"/>
           <p:cNvSpPr txBox="1">
             <a:spLocks noGrp="1"/>
           </p:cNvSpPr>
@@ -33332,929 +33227,6 @@
 </p:sld>
 </file>
 
-<file path=ppt/slides/slide19.xml><?xml version="1.0" encoding="utf-8"?>
-<p:sld xmlns:a="http://schemas.openxmlformats.org/drawingml/2006/main" xmlns:r="http://schemas.openxmlformats.org/officeDocument/2006/relationships" xmlns:p="http://schemas.openxmlformats.org/presentationml/2006/main">
-  <p:cSld>
-    <p:spTree>
-      <p:nvGrpSpPr>
-        <p:cNvPr id="1" name="Shape 404"/>
-        <p:cNvGrpSpPr/>
-        <p:nvPr/>
-      </p:nvGrpSpPr>
-      <p:grpSpPr>
-        <a:xfrm>
-          <a:off x="0" y="0"/>
-          <a:ext cx="0" cy="0"/>
-          <a:chOff x="0" y="0"/>
-          <a:chExt cx="0" cy="0"/>
-        </a:xfrm>
-      </p:grpSpPr>
-      <p:sp>
-        <p:nvSpPr>
-          <p:cNvPr id="405" name="Google Shape;405;p29"/>
-          <p:cNvSpPr txBox="1">
-            <a:spLocks noGrp="1"/>
-          </p:cNvSpPr>
-          <p:nvPr>
-            <p:ph type="body" idx="1"/>
-          </p:nvPr>
-        </p:nvSpPr>
-        <p:spPr>
-          <a:xfrm>
-            <a:off x="855300" y="4406300"/>
-            <a:ext cx="7433400" cy="311400"/>
-          </a:xfrm>
-          <a:prstGeom prst="rect">
-            <a:avLst/>
-          </a:prstGeom>
-        </p:spPr>
-        <p:txBody>
-          <a:bodyPr spcFirstLastPara="1" wrap="square" lIns="0" tIns="0" rIns="0" bIns="0" anchor="t" anchorCtr="0">
-            <a:noAutofit/>
-          </a:bodyPr>
-          <a:lstStyle/>
-          <a:p>
-            <a:pPr marL="0" lvl="0" indent="0" algn="l" rtl="0">
-              <a:spcBef>
-                <a:spcPts val="0"/>
-              </a:spcBef>
-              <a:spcAft>
-                <a:spcPts val="800"/>
-              </a:spcAft>
-              <a:buNone/>
-            </a:pPr>
-            <a:r>
-              <a:rPr lang="en"/>
-              <a:t>Self-assessed proficiency across the production stack</a:t>
-            </a:r>
-            <a:endParaRPr/>
-          </a:p>
-        </p:txBody>
-      </p:sp>
-      <p:sp>
-        <p:nvSpPr>
-          <p:cNvPr id="406" name="Google Shape;406;p29"/>
-          <p:cNvSpPr txBox="1">
-            <a:spLocks noGrp="1"/>
-          </p:cNvSpPr>
-          <p:nvPr>
-            <p:ph type="sldNum" idx="12"/>
-          </p:nvPr>
-        </p:nvSpPr>
-        <p:spPr>
-          <a:xfrm>
-            <a:off x="8693400" y="4749850"/>
-            <a:ext cx="450600" cy="347100"/>
-          </a:xfrm>
-          <a:prstGeom prst="rect">
-            <a:avLst/>
-          </a:prstGeom>
-        </p:spPr>
-        <p:txBody>
-          <a:bodyPr spcFirstLastPara="1" wrap="square" lIns="0" tIns="0" rIns="0" bIns="0" anchor="ctr" anchorCtr="0">
-            <a:noAutofit/>
-          </a:bodyPr>
-          <a:lstStyle/>
-          <a:p>
-            <a:pPr marL="0" lvl="0" indent="0" algn="ctr" rtl="0">
-              <a:spcBef>
-                <a:spcPts val="0"/>
-              </a:spcBef>
-              <a:spcAft>
-                <a:spcPts val="0"/>
-              </a:spcAft>
-              <a:buNone/>
-            </a:pPr>
-            <a:fld id="{00000000-1234-1234-1234-123412341234}" type="slidenum">
-              <a:rPr lang="en"/>
-              <a:t>19</a:t>
-            </a:fld>
-            <a:endParaRPr/>
-          </a:p>
-        </p:txBody>
-      </p:sp>
-      <p:cxnSp>
-        <p:nvCxnSpPr>
-          <p:cNvPr id="407" name="Google Shape;407;p29"/>
-          <p:cNvCxnSpPr/>
-          <p:nvPr/>
-        </p:nvCxnSpPr>
-        <p:spPr>
-          <a:xfrm>
-            <a:off x="952500" y="1074701"/>
-            <a:ext cx="7239000" cy="0"/>
-          </a:xfrm>
-          <a:prstGeom prst="straightConnector1">
-            <a:avLst/>
-          </a:prstGeom>
-          <a:noFill/>
-          <a:ln w="9525" cap="flat" cmpd="sng">
-            <a:solidFill>
-              <a:schemeClr val="accent5"/>
-            </a:solidFill>
-            <a:prstDash val="solid"/>
-            <a:round/>
-            <a:headEnd type="none" w="med" len="med"/>
-            <a:tailEnd type="none" w="med" len="med"/>
-          </a:ln>
-        </p:spPr>
-      </p:cxnSp>
-      <p:cxnSp>
-        <p:nvCxnSpPr>
-          <p:cNvPr id="408" name="Google Shape;408;p29"/>
-          <p:cNvCxnSpPr/>
-          <p:nvPr/>
-        </p:nvCxnSpPr>
-        <p:spPr>
-          <a:xfrm>
-            <a:off x="952500" y="1784183"/>
-            <a:ext cx="7239000" cy="0"/>
-          </a:xfrm>
-          <a:prstGeom prst="straightConnector1">
-            <a:avLst/>
-          </a:prstGeom>
-          <a:noFill/>
-          <a:ln w="9525" cap="flat" cmpd="sng">
-            <a:solidFill>
-              <a:schemeClr val="accent5"/>
-            </a:solidFill>
-            <a:prstDash val="solid"/>
-            <a:round/>
-            <a:headEnd type="none" w="med" len="med"/>
-            <a:tailEnd type="none" w="med" len="med"/>
-          </a:ln>
-        </p:spPr>
-      </p:cxnSp>
-      <p:cxnSp>
-        <p:nvCxnSpPr>
-          <p:cNvPr id="409" name="Google Shape;409;p29"/>
-          <p:cNvCxnSpPr/>
-          <p:nvPr/>
-        </p:nvCxnSpPr>
-        <p:spPr>
-          <a:xfrm>
-            <a:off x="952500" y="2493664"/>
-            <a:ext cx="7239000" cy="0"/>
-          </a:xfrm>
-          <a:prstGeom prst="straightConnector1">
-            <a:avLst/>
-          </a:prstGeom>
-          <a:noFill/>
-          <a:ln w="9525" cap="flat" cmpd="sng">
-            <a:solidFill>
-              <a:schemeClr val="accent5"/>
-            </a:solidFill>
-            <a:prstDash val="solid"/>
-            <a:round/>
-            <a:headEnd type="none" w="med" len="med"/>
-            <a:tailEnd type="none" w="med" len="med"/>
-          </a:ln>
-        </p:spPr>
-      </p:cxnSp>
-      <p:cxnSp>
-        <p:nvCxnSpPr>
-          <p:cNvPr id="410" name="Google Shape;410;p29"/>
-          <p:cNvCxnSpPr/>
-          <p:nvPr/>
-        </p:nvCxnSpPr>
-        <p:spPr>
-          <a:xfrm>
-            <a:off x="952500" y="3203146"/>
-            <a:ext cx="7239000" cy="0"/>
-          </a:xfrm>
-          <a:prstGeom prst="straightConnector1">
-            <a:avLst/>
-          </a:prstGeom>
-          <a:noFill/>
-          <a:ln w="9525" cap="flat" cmpd="sng">
-            <a:solidFill>
-              <a:schemeClr val="accent5"/>
-            </a:solidFill>
-            <a:prstDash val="solid"/>
-            <a:round/>
-            <a:headEnd type="none" w="med" len="med"/>
-            <a:tailEnd type="none" w="med" len="med"/>
-          </a:ln>
-        </p:spPr>
-      </p:cxnSp>
-      <p:cxnSp>
-        <p:nvCxnSpPr>
-          <p:cNvPr id="411" name="Google Shape;411;p29"/>
-          <p:cNvCxnSpPr/>
-          <p:nvPr/>
-        </p:nvCxnSpPr>
-        <p:spPr>
-          <a:xfrm>
-            <a:off x="952500" y="3934526"/>
-            <a:ext cx="7239000" cy="0"/>
-          </a:xfrm>
-          <a:prstGeom prst="straightConnector1">
-            <a:avLst/>
-          </a:prstGeom>
-          <a:noFill/>
-          <a:ln w="9525" cap="flat" cmpd="sng">
-            <a:solidFill>
-              <a:schemeClr val="accent5"/>
-            </a:solidFill>
-            <a:prstDash val="solid"/>
-            <a:round/>
-            <a:headEnd type="none" w="med" len="med"/>
-            <a:tailEnd type="none" w="med" len="med"/>
-          </a:ln>
-        </p:spPr>
-      </p:cxnSp>
-      <p:sp>
-        <p:nvSpPr>
-          <p:cNvPr id="412" name="Google Shape;412;p29"/>
-          <p:cNvSpPr txBox="1"/>
-          <p:nvPr/>
-        </p:nvSpPr>
-        <p:spPr>
-          <a:xfrm>
-            <a:off x="952500" y="915950"/>
-            <a:ext cx="309300" cy="3030300"/>
-          </a:xfrm>
-          <a:prstGeom prst="rect">
-            <a:avLst/>
-          </a:prstGeom>
-          <a:noFill/>
-          <a:ln>
-            <a:noFill/>
-          </a:ln>
-        </p:spPr>
-        <p:txBody>
-          <a:bodyPr spcFirstLastPara="1" wrap="square" lIns="0" tIns="0" rIns="0" bIns="0" anchor="t" anchorCtr="0">
-            <a:noAutofit/>
-          </a:bodyPr>
-          <a:lstStyle/>
-          <a:p>
-            <a:pPr marL="0" marR="0" lvl="0" indent="0" algn="r" rtl="0">
-              <a:lnSpc>
-                <a:spcPct val="100000"/>
-              </a:lnSpc>
-              <a:spcBef>
-                <a:spcPts val="0"/>
-              </a:spcBef>
-              <a:spcAft>
-                <a:spcPts val="0"/>
-              </a:spcAft>
-              <a:buNone/>
-            </a:pPr>
-            <a:r>
-              <a:rPr lang="en" sz="1000">
-                <a:solidFill>
-                  <a:schemeClr val="dk2"/>
-                </a:solidFill>
-                <a:latin typeface="Barlow Light"/>
-                <a:ea typeface="Barlow Light"/>
-                <a:cs typeface="Barlow Light"/>
-                <a:sym typeface="Barlow Light"/>
-              </a:rPr>
-              <a:t>4000</a:t>
-            </a:r>
-            <a:endParaRPr sz="1000">
-              <a:solidFill>
-                <a:schemeClr val="dk2"/>
-              </a:solidFill>
-              <a:latin typeface="Barlow Light"/>
-              <a:ea typeface="Barlow Light"/>
-              <a:cs typeface="Barlow Light"/>
-              <a:sym typeface="Barlow Light"/>
-            </a:endParaRPr>
-          </a:p>
-          <a:p>
-            <a:pPr marL="0" marR="0" lvl="0" indent="0" algn="r" rtl="0">
-              <a:lnSpc>
-                <a:spcPct val="100000"/>
-              </a:lnSpc>
-              <a:spcBef>
-                <a:spcPts val="4400"/>
-              </a:spcBef>
-              <a:spcAft>
-                <a:spcPts val="0"/>
-              </a:spcAft>
-              <a:buNone/>
-            </a:pPr>
-            <a:r>
-              <a:rPr lang="en" sz="1000">
-                <a:solidFill>
-                  <a:schemeClr val="dk2"/>
-                </a:solidFill>
-                <a:latin typeface="Barlow Light"/>
-                <a:ea typeface="Barlow Light"/>
-                <a:cs typeface="Barlow Light"/>
-                <a:sym typeface="Barlow Light"/>
-              </a:rPr>
-              <a:t>3000</a:t>
-            </a:r>
-            <a:endParaRPr sz="1000">
-              <a:solidFill>
-                <a:schemeClr val="dk2"/>
-              </a:solidFill>
-              <a:latin typeface="Barlow Light"/>
-              <a:ea typeface="Barlow Light"/>
-              <a:cs typeface="Barlow Light"/>
-              <a:sym typeface="Barlow Light"/>
-            </a:endParaRPr>
-          </a:p>
-          <a:p>
-            <a:pPr marL="0" marR="0" lvl="0" indent="0" algn="r" rtl="0">
-              <a:lnSpc>
-                <a:spcPct val="100000"/>
-              </a:lnSpc>
-              <a:spcBef>
-                <a:spcPts val="4400"/>
-              </a:spcBef>
-              <a:spcAft>
-                <a:spcPts val="0"/>
-              </a:spcAft>
-              <a:buNone/>
-            </a:pPr>
-            <a:r>
-              <a:rPr lang="en" sz="1000">
-                <a:solidFill>
-                  <a:schemeClr val="dk2"/>
-                </a:solidFill>
-                <a:latin typeface="Barlow Light"/>
-                <a:ea typeface="Barlow Light"/>
-                <a:cs typeface="Barlow Light"/>
-                <a:sym typeface="Barlow Light"/>
-              </a:rPr>
-              <a:t>2000</a:t>
-            </a:r>
-            <a:endParaRPr sz="1000">
-              <a:solidFill>
-                <a:schemeClr val="dk2"/>
-              </a:solidFill>
-              <a:latin typeface="Barlow Light"/>
-              <a:ea typeface="Barlow Light"/>
-              <a:cs typeface="Barlow Light"/>
-              <a:sym typeface="Barlow Light"/>
-            </a:endParaRPr>
-          </a:p>
-          <a:p>
-            <a:pPr marL="0" marR="0" lvl="0" indent="0" algn="r" rtl="0">
-              <a:lnSpc>
-                <a:spcPct val="100000"/>
-              </a:lnSpc>
-              <a:spcBef>
-                <a:spcPts val="4400"/>
-              </a:spcBef>
-              <a:spcAft>
-                <a:spcPts val="0"/>
-              </a:spcAft>
-              <a:buNone/>
-            </a:pPr>
-            <a:r>
-              <a:rPr lang="en" sz="1000">
-                <a:solidFill>
-                  <a:schemeClr val="dk2"/>
-                </a:solidFill>
-                <a:latin typeface="Barlow Light"/>
-                <a:ea typeface="Barlow Light"/>
-                <a:cs typeface="Barlow Light"/>
-                <a:sym typeface="Barlow Light"/>
-              </a:rPr>
-              <a:t>1000</a:t>
-            </a:r>
-            <a:endParaRPr sz="1000">
-              <a:solidFill>
-                <a:schemeClr val="dk2"/>
-              </a:solidFill>
-              <a:latin typeface="Barlow Light"/>
-              <a:ea typeface="Barlow Light"/>
-              <a:cs typeface="Barlow Light"/>
-              <a:sym typeface="Barlow Light"/>
-            </a:endParaRPr>
-          </a:p>
-          <a:p>
-            <a:pPr marL="0" marR="0" lvl="0" indent="0" algn="r" rtl="0">
-              <a:lnSpc>
-                <a:spcPct val="100000"/>
-              </a:lnSpc>
-              <a:spcBef>
-                <a:spcPts val="4400"/>
-              </a:spcBef>
-              <a:spcAft>
-                <a:spcPts val="4400"/>
-              </a:spcAft>
-              <a:buNone/>
-            </a:pPr>
-            <a:r>
-              <a:rPr lang="en" sz="1000">
-                <a:solidFill>
-                  <a:schemeClr val="dk2"/>
-                </a:solidFill>
-                <a:latin typeface="Barlow Light"/>
-                <a:ea typeface="Barlow Light"/>
-                <a:cs typeface="Barlow Light"/>
-                <a:sym typeface="Barlow Light"/>
-              </a:rPr>
-              <a:t>0</a:t>
-            </a:r>
-            <a:endParaRPr sz="1000">
-              <a:solidFill>
-                <a:schemeClr val="dk2"/>
-              </a:solidFill>
-              <a:latin typeface="Barlow Light"/>
-              <a:ea typeface="Barlow Light"/>
-              <a:cs typeface="Barlow Light"/>
-              <a:sym typeface="Barlow Light"/>
-            </a:endParaRPr>
-          </a:p>
-        </p:txBody>
-      </p:sp>
-      <p:sp>
-        <p:nvSpPr>
-          <p:cNvPr id="413" name="Google Shape;413;p29"/>
-          <p:cNvSpPr/>
-          <p:nvPr/>
-        </p:nvSpPr>
-        <p:spPr>
-          <a:xfrm>
-            <a:off x="1572782" y="2380937"/>
-            <a:ext cx="233700" cy="1553700"/>
-          </a:xfrm>
-          <a:prstGeom prst="rect">
-            <a:avLst/>
-          </a:prstGeom>
-          <a:solidFill>
-            <a:schemeClr val="accent1"/>
-          </a:solidFill>
-          <a:ln>
-            <a:noFill/>
-          </a:ln>
-        </p:spPr>
-        <p:txBody>
-          <a:bodyPr spcFirstLastPara="1" wrap="square" lIns="91425" tIns="91425" rIns="91425" bIns="91425" anchor="ctr" anchorCtr="0">
-            <a:noAutofit/>
-          </a:bodyPr>
-          <a:lstStyle/>
-          <a:p>
-            <a:pPr marL="0" lvl="0" indent="0" algn="l" rtl="0">
-              <a:spcBef>
-                <a:spcPts val="0"/>
-              </a:spcBef>
-              <a:spcAft>
-                <a:spcPts val="0"/>
-              </a:spcAft>
-              <a:buNone/>
-            </a:pPr>
-            <a:endParaRPr/>
-          </a:p>
-        </p:txBody>
-      </p:sp>
-      <p:sp>
-        <p:nvSpPr>
-          <p:cNvPr id="414" name="Google Shape;414;p29"/>
-          <p:cNvSpPr/>
-          <p:nvPr/>
-        </p:nvSpPr>
-        <p:spPr>
-          <a:xfrm>
-            <a:off x="1887026" y="1986874"/>
-            <a:ext cx="233700" cy="1947900"/>
-          </a:xfrm>
-          <a:prstGeom prst="rect">
-            <a:avLst/>
-          </a:prstGeom>
-          <a:solidFill>
-            <a:schemeClr val="accent2"/>
-          </a:solidFill>
-          <a:ln>
-            <a:noFill/>
-          </a:ln>
-        </p:spPr>
-        <p:txBody>
-          <a:bodyPr spcFirstLastPara="1" wrap="square" lIns="91425" tIns="91425" rIns="91425" bIns="91425" anchor="ctr" anchorCtr="0">
-            <a:noAutofit/>
-          </a:bodyPr>
-          <a:lstStyle/>
-          <a:p>
-            <a:pPr marL="0" lvl="0" indent="0" algn="l" rtl="0">
-              <a:spcBef>
-                <a:spcPts val="0"/>
-              </a:spcBef>
-              <a:spcAft>
-                <a:spcPts val="0"/>
-              </a:spcAft>
-              <a:buNone/>
-            </a:pPr>
-            <a:endParaRPr/>
-          </a:p>
-        </p:txBody>
-      </p:sp>
-      <p:sp>
-        <p:nvSpPr>
-          <p:cNvPr id="415" name="Google Shape;415;p29"/>
-          <p:cNvSpPr/>
-          <p:nvPr/>
-        </p:nvSpPr>
-        <p:spPr>
-          <a:xfrm>
-            <a:off x="2201270" y="2493664"/>
-            <a:ext cx="233700" cy="1441200"/>
-          </a:xfrm>
-          <a:prstGeom prst="rect">
-            <a:avLst/>
-          </a:prstGeom>
-          <a:solidFill>
-            <a:schemeClr val="accent3"/>
-          </a:solidFill>
-          <a:ln>
-            <a:noFill/>
-          </a:ln>
-        </p:spPr>
-        <p:txBody>
-          <a:bodyPr spcFirstLastPara="1" wrap="square" lIns="91425" tIns="91425" rIns="91425" bIns="91425" anchor="ctr" anchorCtr="0">
-            <a:noAutofit/>
-          </a:bodyPr>
-          <a:lstStyle/>
-          <a:p>
-            <a:pPr marL="0" lvl="0" indent="0" algn="l" rtl="0">
-              <a:spcBef>
-                <a:spcPts val="0"/>
-              </a:spcBef>
-              <a:spcAft>
-                <a:spcPts val="0"/>
-              </a:spcAft>
-              <a:buNone/>
-            </a:pPr>
-            <a:endParaRPr/>
-          </a:p>
-        </p:txBody>
-      </p:sp>
-      <p:sp>
-        <p:nvSpPr>
-          <p:cNvPr id="416" name="Google Shape;416;p29"/>
-          <p:cNvSpPr/>
-          <p:nvPr/>
-        </p:nvSpPr>
-        <p:spPr>
-          <a:xfrm>
-            <a:off x="3325786" y="2694727"/>
-            <a:ext cx="233700" cy="1239900"/>
-          </a:xfrm>
-          <a:prstGeom prst="rect">
-            <a:avLst/>
-          </a:prstGeom>
-          <a:solidFill>
-            <a:schemeClr val="accent1"/>
-          </a:solidFill>
-          <a:ln>
-            <a:noFill/>
-          </a:ln>
-        </p:spPr>
-        <p:txBody>
-          <a:bodyPr spcFirstLastPara="1" wrap="square" lIns="91425" tIns="91425" rIns="91425" bIns="91425" anchor="ctr" anchorCtr="0">
-            <a:noAutofit/>
-          </a:bodyPr>
-          <a:lstStyle/>
-          <a:p>
-            <a:pPr marL="0" lvl="0" indent="0" algn="l" rtl="0">
-              <a:spcBef>
-                <a:spcPts val="0"/>
-              </a:spcBef>
-              <a:spcAft>
-                <a:spcPts val="0"/>
-              </a:spcAft>
-              <a:buNone/>
-            </a:pPr>
-            <a:endParaRPr/>
-          </a:p>
-        </p:txBody>
-      </p:sp>
-      <p:sp>
-        <p:nvSpPr>
-          <p:cNvPr id="417" name="Google Shape;417;p29"/>
-          <p:cNvSpPr/>
-          <p:nvPr/>
-        </p:nvSpPr>
-        <p:spPr>
-          <a:xfrm>
-            <a:off x="3640031" y="2096344"/>
-            <a:ext cx="233700" cy="1838400"/>
-          </a:xfrm>
-          <a:prstGeom prst="rect">
-            <a:avLst/>
-          </a:prstGeom>
-          <a:solidFill>
-            <a:schemeClr val="accent2"/>
-          </a:solidFill>
-          <a:ln>
-            <a:noFill/>
-          </a:ln>
-        </p:spPr>
-        <p:txBody>
-          <a:bodyPr spcFirstLastPara="1" wrap="square" lIns="91425" tIns="91425" rIns="91425" bIns="91425" anchor="ctr" anchorCtr="0">
-            <a:noAutofit/>
-          </a:bodyPr>
-          <a:lstStyle/>
-          <a:p>
-            <a:pPr marL="0" lvl="0" indent="0" algn="l" rtl="0">
-              <a:spcBef>
-                <a:spcPts val="0"/>
-              </a:spcBef>
-              <a:spcAft>
-                <a:spcPts val="0"/>
-              </a:spcAft>
-              <a:buNone/>
-            </a:pPr>
-            <a:endParaRPr/>
-          </a:p>
-        </p:txBody>
-      </p:sp>
-      <p:sp>
-        <p:nvSpPr>
-          <p:cNvPr id="418" name="Google Shape;418;p29"/>
-          <p:cNvSpPr/>
-          <p:nvPr/>
-        </p:nvSpPr>
-        <p:spPr>
-          <a:xfrm>
-            <a:off x="3954275" y="1229025"/>
-            <a:ext cx="233700" cy="2706000"/>
-          </a:xfrm>
-          <a:prstGeom prst="rect">
-            <a:avLst/>
-          </a:prstGeom>
-          <a:solidFill>
-            <a:schemeClr val="accent3"/>
-          </a:solidFill>
-          <a:ln>
-            <a:noFill/>
-          </a:ln>
-        </p:spPr>
-        <p:txBody>
-          <a:bodyPr spcFirstLastPara="1" wrap="square" lIns="91425" tIns="91425" rIns="91425" bIns="91425" anchor="ctr" anchorCtr="0">
-            <a:noAutofit/>
-          </a:bodyPr>
-          <a:lstStyle/>
-          <a:p>
-            <a:pPr marL="0" lvl="0" indent="0" algn="l" rtl="0">
-              <a:spcBef>
-                <a:spcPts val="0"/>
-              </a:spcBef>
-              <a:spcAft>
-                <a:spcPts val="0"/>
-              </a:spcAft>
-              <a:buNone/>
-            </a:pPr>
-            <a:endParaRPr/>
-          </a:p>
-        </p:txBody>
-      </p:sp>
-      <p:sp>
-        <p:nvSpPr>
-          <p:cNvPr id="419" name="Google Shape;419;p29"/>
-          <p:cNvSpPr/>
-          <p:nvPr/>
-        </p:nvSpPr>
-        <p:spPr>
-          <a:xfrm>
-            <a:off x="5078791" y="2140120"/>
-            <a:ext cx="233700" cy="1794600"/>
-          </a:xfrm>
-          <a:prstGeom prst="rect">
-            <a:avLst/>
-          </a:prstGeom>
-          <a:solidFill>
-            <a:schemeClr val="accent1"/>
-          </a:solidFill>
-          <a:ln>
-            <a:noFill/>
-          </a:ln>
-        </p:spPr>
-        <p:txBody>
-          <a:bodyPr spcFirstLastPara="1" wrap="square" lIns="91425" tIns="91425" rIns="91425" bIns="91425" anchor="ctr" anchorCtr="0">
-            <a:noAutofit/>
-          </a:bodyPr>
-          <a:lstStyle/>
-          <a:p>
-            <a:pPr marL="0" lvl="0" indent="0" algn="l" rtl="0">
-              <a:spcBef>
-                <a:spcPts val="0"/>
-              </a:spcBef>
-              <a:spcAft>
-                <a:spcPts val="0"/>
-              </a:spcAft>
-              <a:buNone/>
-            </a:pPr>
-            <a:endParaRPr/>
-          </a:p>
-        </p:txBody>
-      </p:sp>
-      <p:sp>
-        <p:nvSpPr>
-          <p:cNvPr id="420" name="Google Shape;420;p29"/>
-          <p:cNvSpPr/>
-          <p:nvPr/>
-        </p:nvSpPr>
-        <p:spPr>
-          <a:xfrm>
-            <a:off x="5393035" y="1074577"/>
-            <a:ext cx="233700" cy="2860200"/>
-          </a:xfrm>
-          <a:prstGeom prst="rect">
-            <a:avLst/>
-          </a:prstGeom>
-          <a:solidFill>
-            <a:schemeClr val="accent2"/>
-          </a:solidFill>
-          <a:ln>
-            <a:noFill/>
-          </a:ln>
-        </p:spPr>
-        <p:txBody>
-          <a:bodyPr spcFirstLastPara="1" wrap="square" lIns="91425" tIns="91425" rIns="91425" bIns="91425" anchor="ctr" anchorCtr="0">
-            <a:noAutofit/>
-          </a:bodyPr>
-          <a:lstStyle/>
-          <a:p>
-            <a:pPr marL="0" lvl="0" indent="0" algn="l" rtl="0">
-              <a:spcBef>
-                <a:spcPts val="0"/>
-              </a:spcBef>
-              <a:spcAft>
-                <a:spcPts val="0"/>
-              </a:spcAft>
-              <a:buNone/>
-            </a:pPr>
-            <a:endParaRPr/>
-          </a:p>
-        </p:txBody>
-      </p:sp>
-      <p:sp>
-        <p:nvSpPr>
-          <p:cNvPr id="421" name="Google Shape;421;p29"/>
-          <p:cNvSpPr/>
-          <p:nvPr/>
-        </p:nvSpPr>
-        <p:spPr>
-          <a:xfrm>
-            <a:off x="5707280" y="2322562"/>
-            <a:ext cx="233700" cy="1611900"/>
-          </a:xfrm>
-          <a:prstGeom prst="rect">
-            <a:avLst/>
-          </a:prstGeom>
-          <a:solidFill>
-            <a:schemeClr val="accent3"/>
-          </a:solidFill>
-          <a:ln>
-            <a:noFill/>
-          </a:ln>
-        </p:spPr>
-        <p:txBody>
-          <a:bodyPr spcFirstLastPara="1" wrap="square" lIns="91425" tIns="91425" rIns="91425" bIns="91425" anchor="ctr" anchorCtr="0">
-            <a:noAutofit/>
-          </a:bodyPr>
-          <a:lstStyle/>
-          <a:p>
-            <a:pPr marL="0" lvl="0" indent="0" algn="l" rtl="0">
-              <a:spcBef>
-                <a:spcPts val="0"/>
-              </a:spcBef>
-              <a:spcAft>
-                <a:spcPts val="0"/>
-              </a:spcAft>
-              <a:buNone/>
-            </a:pPr>
-            <a:endParaRPr/>
-          </a:p>
-        </p:txBody>
-      </p:sp>
-      <p:sp>
-        <p:nvSpPr>
-          <p:cNvPr id="422" name="Google Shape;422;p29"/>
-          <p:cNvSpPr/>
-          <p:nvPr/>
-        </p:nvSpPr>
-        <p:spPr>
-          <a:xfrm>
-            <a:off x="6831796" y="2753101"/>
-            <a:ext cx="233700" cy="1181400"/>
-          </a:xfrm>
-          <a:prstGeom prst="rect">
-            <a:avLst/>
-          </a:prstGeom>
-          <a:solidFill>
-            <a:schemeClr val="accent1"/>
-          </a:solidFill>
-          <a:ln>
-            <a:noFill/>
-          </a:ln>
-        </p:spPr>
-        <p:txBody>
-          <a:bodyPr spcFirstLastPara="1" wrap="square" lIns="91425" tIns="91425" rIns="91425" bIns="91425" anchor="ctr" anchorCtr="0">
-            <a:noAutofit/>
-          </a:bodyPr>
-          <a:lstStyle/>
-          <a:p>
-            <a:pPr marL="0" lvl="0" indent="0" algn="l" rtl="0">
-              <a:spcBef>
-                <a:spcPts val="0"/>
-              </a:spcBef>
-              <a:spcAft>
-                <a:spcPts val="0"/>
-              </a:spcAft>
-              <a:buNone/>
-            </a:pPr>
-            <a:endParaRPr/>
-          </a:p>
-        </p:txBody>
-      </p:sp>
-      <p:sp>
-        <p:nvSpPr>
-          <p:cNvPr id="423" name="Google Shape;423;p29"/>
-          <p:cNvSpPr/>
-          <p:nvPr/>
-        </p:nvSpPr>
-        <p:spPr>
-          <a:xfrm>
-            <a:off x="7146040" y="1293620"/>
-            <a:ext cx="233700" cy="2641200"/>
-          </a:xfrm>
-          <a:prstGeom prst="rect">
-            <a:avLst/>
-          </a:prstGeom>
-          <a:solidFill>
-            <a:schemeClr val="accent2"/>
-          </a:solidFill>
-          <a:ln>
-            <a:noFill/>
-          </a:ln>
-        </p:spPr>
-        <p:txBody>
-          <a:bodyPr spcFirstLastPara="1" wrap="square" lIns="91425" tIns="91425" rIns="91425" bIns="91425" anchor="ctr" anchorCtr="0">
-            <a:noAutofit/>
-          </a:bodyPr>
-          <a:lstStyle/>
-          <a:p>
-            <a:pPr marL="0" lvl="0" indent="0" algn="l" rtl="0">
-              <a:spcBef>
-                <a:spcPts val="0"/>
-              </a:spcBef>
-              <a:spcAft>
-                <a:spcPts val="0"/>
-              </a:spcAft>
-              <a:buNone/>
-            </a:pPr>
-            <a:endParaRPr/>
-          </a:p>
-        </p:txBody>
-      </p:sp>
-      <p:sp>
-        <p:nvSpPr>
-          <p:cNvPr id="424" name="Google Shape;424;p29"/>
-          <p:cNvSpPr/>
-          <p:nvPr/>
-        </p:nvSpPr>
-        <p:spPr>
-          <a:xfrm>
-            <a:off x="7460284" y="1607410"/>
-            <a:ext cx="233700" cy="2327400"/>
-          </a:xfrm>
-          <a:prstGeom prst="rect">
-            <a:avLst/>
-          </a:prstGeom>
-          <a:solidFill>
-            <a:schemeClr val="accent3"/>
-          </a:solidFill>
-          <a:ln>
-            <a:noFill/>
-          </a:ln>
-        </p:spPr>
-        <p:txBody>
-          <a:bodyPr spcFirstLastPara="1" wrap="square" lIns="91425" tIns="91425" rIns="91425" bIns="91425" anchor="ctr" anchorCtr="0">
-            <a:noAutofit/>
-          </a:bodyPr>
-          <a:lstStyle/>
-          <a:p>
-            <a:pPr marL="0" lvl="0" indent="0" algn="l" rtl="0">
-              <a:spcBef>
-                <a:spcPts val="0"/>
-              </a:spcBef>
-              <a:spcAft>
-                <a:spcPts val="0"/>
-              </a:spcAft>
-              <a:buNone/>
-            </a:pPr>
-            <a:endParaRPr/>
-          </a:p>
-        </p:txBody>
-      </p:sp>
-    </p:spTree>
-  </p:cSld>
-  <p:clrMapOvr>
-    <a:masterClrMapping/>
-  </p:clrMapOvr>
-  <p:transition spd="med" advClick="1">
-    <p:fade/>
-  </p:transition>
-</p:sld>
-</file>
-
 <file path=ppt/slides/slide2.xml><?xml version="1.0" encoding="utf-8"?>
 <p:sld xmlns:a="http://schemas.openxmlformats.org/drawingml/2006/main" xmlns:r="http://schemas.openxmlformats.org/officeDocument/2006/relationships" xmlns:p="http://schemas.openxmlformats.org/presentationml/2006/main">
   <p:cSld>
